--- a/Planning docs/Slides/lesson-6-1-teacher-slides.pptx
+++ b/Planning docs/Slides/lesson-6-1-teacher-slides.pptx
@@ -516,7 +516,7 @@
           <a:p>
             <a:r>
               <a:rPr lang="en-US" dirty="0"/>
-              <a:t>Title slide for Week 6 Day 1. Nonfiction Unit.</a:t>
+              <a:t>Lesson 6.1. Reading: 📰 Read: What Is a Map?.</a:t>
             </a:r>
             <a:endParaRPr lang="en-US" dirty="0"/>
           </a:p>
@@ -604,7 +604,7 @@
           <a:p>
             <a:r>
               <a:rPr lang="en-US" dirty="0"/>
-              <a:t>Review morphology focus. Have students identify the base word and affix in each example.</a:t>
+              <a:t>Each word appears in the chapters read this week, in the author’s own sentence.</a:t>
             </a:r>
             <a:endParaRPr lang="en-US" dirty="0"/>
           </a:p>
@@ -692,7 +692,7 @@
           <a:p>
             <a:r>
               <a:rPr lang="en-US" dirty="0"/>
-              <a:t>Go through each vocabulary word. For flip cards, have students guess the definition before revealing.</a:t>
+              <a:t>Answers: Arizona, Every, Texas., Pacific</a:t>
             </a:r>
             <a:endParaRPr lang="en-US" dirty="0"/>
           </a:p>
@@ -780,7 +780,7 @@
           <a:p>
             <a:r>
               <a:rPr lang="en-US" dirty="0"/>
-              <a:t>Give students time to sort the words. Use the chat or paper to organize.</a:t>
+              <a:t>Answers: Arizona, Every, Texas., Pacific</a:t>
             </a:r>
             <a:endParaRPr lang="en-US" dirty="0"/>
           </a:p>
@@ -868,7 +868,7 @@
           <a:p>
             <a:r>
               <a:rPr lang="en-US" dirty="0"/>
-              <a:t>Review each column. Ask: what pattern do you see in each group?</a:t>
+              <a:t>Compound word: mailbox, postcard, landmark, notebook | Not a compound word: compass, envelope, journey, letter</a:t>
             </a:r>
             <a:endParaRPr lang="en-US" dirty="0"/>
           </a:p>
@@ -956,7 +956,7 @@
           <a:p>
             <a:r>
               <a:rPr lang="en-US" dirty="0"/>
-              <a:t>Reading focus slide. Use pause-and-think questions during reading. Copywork can be done after reading.</a:t>
+              <a:t>Compound word: mailbox, postcard, landmark, notebook | Not a compound word: compass, envelope, journey, letter</a:t>
             </a:r>
             <a:endParaRPr lang="en-US" dirty="0"/>
           </a:p>
@@ -1044,7 +1044,7 @@
           <a:p>
             <a:r>
               <a:rPr lang="en-US" dirty="0"/>
-              <a:t>Transition to the writing workshop assignment in Canvas.</a:t>
+              <a:t>Read the chapters, then return to the pause questions.</a:t>
             </a:r>
             <a:endParaRPr lang="en-US" dirty="0"/>
           </a:p>
@@ -1132,7 +1132,7 @@
           <a:p>
             <a:r>
               <a:rPr lang="en-US" dirty="0"/>
-              <a:t>Read the prompt aloud once. Give students about 1 minute to read it again silently and think. Remind them: there is no wrong answer — just write what comes to mind. Advance to the writing slide when ready.</a:t>
+              <a:t>Read the prompt aloud. Give students a moment to think before writing.</a:t>
             </a:r>
             <a:endParaRPr lang="en-US" dirty="0"/>
           </a:p>
@@ -1220,7 +1220,7 @@
           <a:p>
             <a:r>
               <a:rPr lang="en-US" dirty="0"/>
-              <a:t>Set a 5-minute timer. Walk the room quietly. If a student stops, gently encourage them: "Keep writing — even one more sentence." The goal is sustained writing, not perfection. Do not interrupt to correct spelling or grammar during this time.</a:t>
+              <a:t>Five minutes of sustained writing. Stamina over polish. Do not correct spelling now.</a:t>
             </a:r>
             <a:endParaRPr lang="en-US" dirty="0"/>
           </a:p>
@@ -1308,7 +1308,7 @@
           <a:p>
             <a:r>
               <a:rPr lang="en-US" dirty="0"/>
-              <a:t>Set a 1-minute timer. Remind students: we are only fixing ONE thing today — Did I use direction words like left, right, past, and between?. They should also do a quick conventions check (capitals, punctuation, spelling). They do NOT need to rewrite — just fix and improve. Revision = improving ideas; Editing = fixing conventions. Keep them separate in your language.</a:t>
+              <a:t>One fix only. Editing is conventions; revision is ideas. Name which one you are asking for.</a:t>
             </a:r>
             <a:endParaRPr lang="en-US" dirty="0"/>
           </a:p>
@@ -1396,7 +1396,7 @@
           <a:p>
             <a:r>
               <a:rPr lang="en-US" dirty="0"/>
-              <a:t>Call on 3-5 students to share. Respond with genuine interest: "I love how you described that" or "That's a really interesting idea." Avoid correcting grammar or spelling during share time — this is about celebrating writing. If time is short, have 2-3 students share in chat instead.</a:t>
+              <a:t>Two or three volunteers. Praise something specific in each.</a:t>
             </a:r>
             <a:endParaRPr lang="en-US" dirty="0"/>
           </a:p>
@@ -1484,7 +1484,7 @@
           <a:p>
             <a:r>
               <a:rPr lang="en-US" dirty="0"/>
-              <a:t>Review the big question and reading lens with students before reading.</a:t>
+              <a:t>Reading lens: Good nonfiction readers look for the central idea as they read. The central idea is the most important point the author wants you to understand. Supporting details back it up.</a:t>
             </a:r>
             <a:endParaRPr lang="en-US" dirty="0"/>
           </a:p>
@@ -1572,7 +1572,8 @@
           <a:p>
             <a:r>
               <a:rPr lang="en-US" dirty="0"/>
-              <a:t>Read the model sentence aloud. Ask students: what do you notice about the punctuation and capitalization?</a:t>
+              <a:t>Corrected: Corrected: 
+Look for: The key on a map is sometimes called a legend . It explains all the symbols on the map .</a:t>
             </a:r>
             <a:endParaRPr lang="en-US" dirty="0"/>
           </a:p>
@@ -1660,7 +1661,8 @@
           <a:p>
             <a:r>
               <a:rPr lang="en-US" dirty="0"/>
-              <a:t>Give students 1-2 minutes to fix the sentence. Walk the room and check.</a:t>
+              <a:t>Corrected: Corrected: 
+Look for: The key on a map is sometimes called a legend . It explains all the symbols on the map .</a:t>
             </a:r>
             <a:endParaRPr lang="en-US" dirty="0"/>
           </a:p>
@@ -1748,7 +1750,7 @@
           <a:p>
             <a:r>
               <a:rPr lang="en-US" dirty="0"/>
-              <a:t>Reveal the corrected version. Point out each fix: capitalization, punctuation, spelling.</a:t>
+              <a:t>Break the word into base + word part. Ask what the part adds to the meaning.</a:t>
             </a:r>
             <a:endParaRPr lang="en-US" dirty="0"/>
           </a:p>
@@ -2129,8 +2131,8 @@
         </p:nvSpPr>
         <p:spPr>
           <a:xfrm>
-            <a:off x="457200" y="914400"/>
-            <a:ext cx="8229600" cy="1097280"/>
+            <a:off x="0" y="822960"/>
+            <a:ext cx="9144000" cy="822960"/>
           </a:xfrm>
           <a:prstGeom prst="rect">
             <a:avLst/>
@@ -2146,7 +2148,43 @@
               <a:buNone/>
             </a:pPr>
             <a:r>
-              <a:rPr lang="en-US" sz="4000" b="1" dirty="0">
+              <a:rPr lang="en-US" sz="5200" dirty="0">
+                <a:solidFill>
+                  <a:srgbClr val="000000"/>
+                </a:solidFill>
+              </a:rPr>
+              <a:t>🗺️</a:t>
+            </a:r>
+            <a:endParaRPr lang="en-US" sz="5200" dirty="0"/>
+          </a:p>
+        </p:txBody>
+      </p:sp>
+      <p:sp>
+        <p:nvSpPr>
+          <p:cNvPr id="3" name="Text 1"/>
+          <p:cNvSpPr/>
+          <p:nvPr/>
+        </p:nvSpPr>
+        <p:spPr>
+          <a:xfrm>
+            <a:off x="457200" y="1691640"/>
+            <a:ext cx="8229600" cy="566928"/>
+          </a:xfrm>
+          <a:prstGeom prst="rect">
+            <a:avLst/>
+          </a:prstGeom>
+          <a:noFill/>
+          <a:ln/>
+        </p:spPr>
+        <p:txBody>
+          <a:bodyPr wrap="square" lIns="0" tIns="0" rIns="0" bIns="0" rtlCol="0" anchor="ctr"/>
+          <a:lstStyle/>
+          <a:p>
+            <a:pPr algn="ctr" indent="0" marL="0">
+              <a:buNone/>
+            </a:pPr>
+            <a:r>
+              <a:rPr lang="en-US" sz="2600" b="1" dirty="0">
                 <a:solidFill>
                   <a:srgbClr val="FFFFFF"/>
                 </a:solidFill>
@@ -2154,22 +2192,22 @@
                 <a:ea typeface="Calibri" pitchFamily="34" charset="-122"/>
                 <a:cs typeface="Calibri" pitchFamily="34" charset="-120"/>
               </a:rPr>
-              <a:t>🗺️  Week 6 · Day 1</a:t>
-            </a:r>
-            <a:endParaRPr lang="en-US" sz="4000" dirty="0"/>
-          </a:p>
-        </p:txBody>
-      </p:sp>
-      <p:sp>
-        <p:nvSpPr>
-          <p:cNvPr id="3" name="Text 1"/>
-          <p:cNvSpPr/>
-          <p:nvPr/>
-        </p:nvSpPr>
-        <p:spPr>
-          <a:xfrm>
-            <a:off x="457200" y="2103120"/>
-            <a:ext cx="8229600" cy="731520"/>
+              <a:t>Nonfiction: Maps, Mail &amp; Places</a:t>
+            </a:r>
+            <a:endParaRPr lang="en-US" sz="2600" dirty="0"/>
+          </a:p>
+        </p:txBody>
+      </p:sp>
+      <p:sp>
+        <p:nvSpPr>
+          <p:cNvPr id="4" name="Text 2"/>
+          <p:cNvSpPr/>
+          <p:nvPr/>
+        </p:nvSpPr>
+        <p:spPr>
+          <a:xfrm>
+            <a:off x="457200" y="2331720"/>
+            <a:ext cx="8229600" cy="411480"/>
           </a:xfrm>
           <a:prstGeom prst="rect">
             <a:avLst/>
@@ -2185,7 +2223,7 @@
               <a:buNone/>
             </a:pPr>
             <a:r>
-              <a:rPr lang="en-US" sz="1800" dirty="0">
+              <a:rPr lang="en-US" sz="2000" dirty="0">
                 <a:solidFill>
                   <a:srgbClr val="5CB85C"/>
                 </a:solidFill>
@@ -2193,22 +2231,22 @@
                 <a:ea typeface="Calibri" pitchFamily="34" charset="-122"/>
                 <a:cs typeface="Calibri" pitchFamily="34" charset="-120"/>
               </a:rPr>
-              <a:t>Nonfiction Unit — Lesson 6.1</a:t>
-            </a:r>
-            <a:endParaRPr lang="en-US" sz="1800" dirty="0"/>
-          </a:p>
-        </p:txBody>
-      </p:sp>
-      <p:sp>
-        <p:nvSpPr>
-          <p:cNvPr id="4" name="Text 2"/>
-          <p:cNvSpPr/>
-          <p:nvPr/>
-        </p:nvSpPr>
-        <p:spPr>
-          <a:xfrm>
-            <a:off x="457200" y="4114800"/>
-            <a:ext cx="8229600" cy="457200"/>
+              <a:t>Lesson 6.1  ·  📰 Read: What Is a Map?</a:t>
+            </a:r>
+            <a:endParaRPr lang="en-US" sz="2000" dirty="0"/>
+          </a:p>
+        </p:txBody>
+      </p:sp>
+      <p:sp>
+        <p:nvSpPr>
+          <p:cNvPr id="5" name="Text 3"/>
+          <p:cNvSpPr/>
+          <p:nvPr/>
+        </p:nvSpPr>
+        <p:spPr>
+          <a:xfrm>
+            <a:off x="457200" y="2880360"/>
+            <a:ext cx="8229600" cy="320040"/>
           </a:xfrm>
           <a:prstGeom prst="rect">
             <a:avLst/>
@@ -2224,17 +2262,17 @@
               <a:buNone/>
             </a:pPr>
             <a:r>
-              <a:rPr lang="en-US" sz="1300" dirty="0">
-                <a:solidFill>
-                  <a:srgbClr val="AAAAAA"/>
-                </a:solidFill>
-                <a:latin typeface="Calibri" pitchFamily="34" charset="0"/>
-                <a:ea typeface="Calibri" pitchFamily="34" charset="-122"/>
-                <a:cs typeface="Calibri" pitchFamily="34" charset="-120"/>
-              </a:rPr>
-              <a:t>Optima Academy Online · 3rd Grade ELA</a:t>
-            </a:r>
-            <a:endParaRPr lang="en-US" sz="1300" dirty="0"/>
+              <a:rPr lang="en-US" sz="1400" dirty="0">
+                <a:solidFill>
+                  <a:srgbClr val="C9BCE4"/>
+                </a:solidFill>
+                <a:latin typeface="Calibri" pitchFamily="34" charset="0"/>
+                <a:ea typeface="Calibri" pitchFamily="34" charset="-122"/>
+                <a:cs typeface="Calibri" pitchFamily="34" charset="-120"/>
+              </a:rPr>
+              <a:t>Grade 3 ELA  ·  Virtue: Diligence</a:t>
+            </a:r>
+            <a:endParaRPr lang="en-US" sz="1400" dirty="0"/>
           </a:p>
         </p:txBody>
       </p:sp>
@@ -2272,65 +2310,62 @@
       </p:grpSpPr>
       <p:sp>
         <p:nvSpPr>
-          <p:cNvPr id="2" name="Text 0"/>
-          <p:cNvSpPr/>
-          <p:nvPr/>
-        </p:nvSpPr>
-        <p:spPr>
-          <a:xfrm>
-            <a:off x="365760" y="164592"/>
-            <a:ext cx="8412480" cy="566928"/>
-          </a:xfrm>
-          <a:prstGeom prst="rect">
-            <a:avLst/>
-          </a:prstGeom>
-          <a:noFill/>
-          <a:ln/>
-        </p:spPr>
-        <p:txBody>
-          <a:bodyPr wrap="square" lIns="0" tIns="0" rIns="0" bIns="0" rtlCol="0" anchor="ctr"/>
-          <a:lstStyle/>
-          <a:p>
-            <a:pPr algn="l" indent="0" marL="0">
-              <a:buNone/>
-            </a:pPr>
-            <a:r>
-              <a:rPr lang="en-US" sz="2800" b="1" dirty="0">
-                <a:solidFill>
-                  <a:srgbClr val="0E1C42"/>
-                </a:solidFill>
-                <a:latin typeface="Calibri" pitchFamily="34" charset="0"/>
-                <a:ea typeface="Calibri" pitchFamily="34" charset="-122"/>
-                <a:cs typeface="Calibri" pitchFamily="34" charset="-120"/>
-              </a:rPr>
-              <a:t>🌱 Morphology: Prefix mis- means wrong</a:t>
-            </a:r>
-            <a:endParaRPr lang="en-US" sz="2800" dirty="0"/>
-          </a:p>
-        </p:txBody>
-      </p:sp>
-      <p:sp>
-        <p:nvSpPr>
-          <p:cNvPr id="3" name="Shape 1"/>
-          <p:cNvSpPr/>
-          <p:nvPr/>
-        </p:nvSpPr>
-        <p:spPr>
-          <a:xfrm>
-            <a:off x="365760" y="749808"/>
-            <a:ext cx="8412480" cy="0"/>
-          </a:xfrm>
-          <a:prstGeom prst="line">
-            <a:avLst/>
-          </a:prstGeom>
-          <a:noFill/>
-          <a:ln w="19050">
-            <a:solidFill>
-              <a:srgbClr val="8B6FC0"/>
-            </a:solidFill>
-            <a:prstDash val="solid"/>
-          </a:ln>
-        </p:spPr>
+          <p:cNvPr id="2" name="Shape 0"/>
+          <p:cNvSpPr/>
+          <p:nvPr/>
+        </p:nvSpPr>
+        <p:spPr>
+          <a:xfrm>
+            <a:off x="0" y="0"/>
+            <a:ext cx="9144000" cy="566928"/>
+          </a:xfrm>
+          <a:prstGeom prst="rect">
+            <a:avLst/>
+          </a:prstGeom>
+          <a:solidFill>
+            <a:srgbClr val="55C8E8"/>
+          </a:solidFill>
+          <a:ln/>
+        </p:spPr>
+      </p:sp>
+      <p:sp>
+        <p:nvSpPr>
+          <p:cNvPr id="3" name="Text 1"/>
+          <p:cNvSpPr/>
+          <p:nvPr/>
+        </p:nvSpPr>
+        <p:spPr>
+          <a:xfrm>
+            <a:off x="365760" y="54864"/>
+            <a:ext cx="8412480" cy="457200"/>
+          </a:xfrm>
+          <a:prstGeom prst="rect">
+            <a:avLst/>
+          </a:prstGeom>
+          <a:noFill/>
+          <a:ln/>
+        </p:spPr>
+        <p:txBody>
+          <a:bodyPr wrap="square" lIns="0" tIns="0" rIns="0" bIns="0" rtlCol="0" anchor="ctr"/>
+          <a:lstStyle/>
+          <a:p>
+            <a:pPr indent="0" marL="0">
+              <a:buNone/>
+            </a:pPr>
+            <a:r>
+              <a:rPr lang="en-US" sz="2200" b="1" dirty="0">
+                <a:solidFill>
+                  <a:srgbClr val="FFFFFF"/>
+                </a:solidFill>
+                <a:latin typeface="Calibri" pitchFamily="34" charset="0"/>
+                <a:ea typeface="Calibri" pitchFamily="34" charset="-122"/>
+                <a:cs typeface="Calibri" pitchFamily="34" charset="-120"/>
+              </a:rPr>
+              <a:t>🔤  Vocabulary</a:t>
+            </a:r>
+            <a:endParaRPr lang="en-US" sz="2200" dirty="0"/>
+          </a:p>
+        </p:txBody>
       </p:sp>
       <p:sp>
         <p:nvSpPr>
@@ -2340,32 +2375,32 @@
         </p:nvSpPr>
         <p:spPr>
           <a:xfrm>
-            <a:off x="457200" y="1005840"/>
-            <a:ext cx="8046720" cy="292608"/>
-          </a:xfrm>
-          <a:prstGeom prst="rect">
-            <a:avLst/>
-          </a:prstGeom>
-          <a:noFill/>
-          <a:ln/>
-        </p:spPr>
-        <p:txBody>
-          <a:bodyPr wrap="square" lIns="0" tIns="0" rIns="0" bIns="0" rtlCol="0" anchor="ctr"/>
-          <a:lstStyle/>
-          <a:p>
-            <a:pPr indent="0" marL="0">
-              <a:buNone/>
-            </a:pPr>
-            <a:r>
-              <a:rPr lang="en-US" sz="1100" b="1" spc="200" kern="0" dirty="0">
-                <a:solidFill>
-                  <a:srgbClr val="8B6FC0"/>
-                </a:solidFill>
-                <a:latin typeface="Calibri" pitchFamily="34" charset="0"/>
-                <a:ea typeface="Calibri" pitchFamily="34" charset="-122"/>
-                <a:cs typeface="Calibri" pitchFamily="34" charset="-120"/>
-              </a:rPr>
-              <a:t>WORD BUILDING</a:t>
+            <a:off x="365760" y="804672"/>
+            <a:ext cx="8229600" cy="237744"/>
+          </a:xfrm>
+          <a:prstGeom prst="rect">
+            <a:avLst/>
+          </a:prstGeom>
+          <a:noFill/>
+          <a:ln/>
+        </p:spPr>
+        <p:txBody>
+          <a:bodyPr wrap="square" lIns="0" tIns="0" rIns="0" bIns="0" rtlCol="0" anchor="ctr"/>
+          <a:lstStyle/>
+          <a:p>
+            <a:pPr indent="0" marL="0">
+              <a:buNone/>
+            </a:pPr>
+            <a:r>
+              <a:rPr lang="en-US" sz="1100" b="1" spc="100" kern="0" dirty="0">
+                <a:solidFill>
+                  <a:srgbClr val="55C8E8"/>
+                </a:solidFill>
+                <a:latin typeface="Calibri" pitchFamily="34" charset="0"/>
+                <a:ea typeface="Calibri" pitchFamily="34" charset="-122"/>
+                <a:cs typeface="Calibri" pitchFamily="34" charset="-120"/>
+              </a:rPr>
+              <a:t>THIS WEEK’S WORDS</a:t>
             </a:r>
             <a:endParaRPr lang="en-US" sz="1100" dirty="0"/>
           </a:p>
@@ -2379,16 +2414,16 @@
         </p:nvSpPr>
         <p:spPr>
           <a:xfrm>
-            <a:off x="457200" y="1371600"/>
-            <a:ext cx="8229600" cy="457200"/>
+            <a:off x="365760" y="1097280"/>
+            <a:ext cx="8412480" cy="658368"/>
           </a:xfrm>
           <a:prstGeom prst="roundRect">
             <a:avLst>
-              <a:gd name="adj" fmla="val 20000"/>
+              <a:gd name="adj" fmla="val 13889"/>
             </a:avLst>
           </a:prstGeom>
           <a:solidFill>
-            <a:srgbClr val="F0E8FF"/>
+            <a:srgbClr val="E5F7FC"/>
           </a:solidFill>
           <a:ln/>
           <a:effectLst>
@@ -2408,24 +2443,24 @@
         </p:nvSpPr>
         <p:spPr>
           <a:xfrm>
-            <a:off x="640080" y="1417320"/>
-            <a:ext cx="7863840" cy="365760"/>
-          </a:xfrm>
-          <a:prstGeom prst="rect">
-            <a:avLst/>
-          </a:prstGeom>
-          <a:noFill/>
-          <a:ln/>
-        </p:spPr>
-        <p:txBody>
-          <a:bodyPr wrap="square" lIns="0" tIns="0" rIns="0" bIns="0" rtlCol="0" anchor="ctr"/>
-          <a:lstStyle/>
-          <a:p>
-            <a:pPr indent="0" marL="0">
-              <a:buNone/>
-            </a:pPr>
-            <a:r>
-              <a:rPr lang="en-US" sz="1600" b="1" dirty="0">
+            <a:off x="594360" y="1225296"/>
+            <a:ext cx="7863840" cy="420624"/>
+          </a:xfrm>
+          <a:prstGeom prst="rect">
+            <a:avLst/>
+          </a:prstGeom>
+          <a:noFill/>
+          <a:ln/>
+        </p:spPr>
+        <p:txBody>
+          <a:bodyPr wrap="square" lIns="0" tIns="0" rIns="0" bIns="0" rtlCol="0" anchor="ctr"/>
+          <a:lstStyle/>
+          <a:p>
+            <a:pPr indent="0" marL="0">
+              <a:buNone/>
+            </a:pPr>
+            <a:r>
+              <a:rPr lang="en-US" sz="1700" b="1" dirty="0">
                 <a:solidFill>
                   <a:srgbClr val="0E1C42"/>
                 </a:solidFill>
@@ -2433,7 +2468,7 @@
                 <a:ea typeface="Calibri" pitchFamily="34" charset="-122"/>
                 <a:cs typeface="Calibri" pitchFamily="34" charset="-120"/>
               </a:rPr>
-              <a:t>misread</a:t>
+              <a:t>map  </a:t>
             </a:r>
             <a:pPr indent="0" marL="0">
               <a:buNone/>
@@ -2441,15 +2476,15 @@
             <a:r>
               <a:rPr lang="en-US" sz="1400" dirty="0">
                 <a:solidFill>
-                  <a:srgbClr val="64748B"/>
-                </a:solidFill>
-                <a:latin typeface="Calibri" pitchFamily="34" charset="0"/>
-                <a:ea typeface="Calibri" pitchFamily="34" charset="-122"/>
-                <a:cs typeface="Calibri" pitchFamily="34" charset="-120"/>
-              </a:rPr>
-              <a:t>  ·  mis- + read =</a:t>
-            </a:r>
-            <a:endParaRPr lang="en-US" sz="1600" dirty="0"/>
+                  <a:srgbClr val="1E293B"/>
+                </a:solidFill>
+                <a:latin typeface="Calibri" pitchFamily="34" charset="0"/>
+                <a:ea typeface="Calibri" pitchFamily="34" charset="-122"/>
+                <a:cs typeface="Calibri" pitchFamily="34" charset="-120"/>
+              </a:rPr>
+              <a:t>A drawing that shows what a place looks like from above.</a:t>
+            </a:r>
+            <a:endParaRPr lang="en-US" sz="1700" dirty="0"/>
           </a:p>
         </p:txBody>
       </p:sp>
@@ -2461,16 +2496,16 @@
         </p:nvSpPr>
         <p:spPr>
           <a:xfrm>
-            <a:off x="457200" y="1901952"/>
-            <a:ext cx="8229600" cy="457200"/>
+            <a:off x="365760" y="1828800"/>
+            <a:ext cx="8412480" cy="658368"/>
           </a:xfrm>
           <a:prstGeom prst="roundRect">
             <a:avLst>
-              <a:gd name="adj" fmla="val 20000"/>
+              <a:gd name="adj" fmla="val 13889"/>
             </a:avLst>
           </a:prstGeom>
           <a:solidFill>
-            <a:srgbClr val="F0E8FF"/>
+            <a:srgbClr val="FFFFFF"/>
           </a:solidFill>
           <a:ln/>
           <a:effectLst>
@@ -2490,24 +2525,24 @@
         </p:nvSpPr>
         <p:spPr>
           <a:xfrm>
-            <a:off x="640080" y="1947672"/>
-            <a:ext cx="7863840" cy="365760"/>
-          </a:xfrm>
-          <a:prstGeom prst="rect">
-            <a:avLst/>
-          </a:prstGeom>
-          <a:noFill/>
-          <a:ln/>
-        </p:spPr>
-        <p:txBody>
-          <a:bodyPr wrap="square" lIns="0" tIns="0" rIns="0" bIns="0" rtlCol="0" anchor="ctr"/>
-          <a:lstStyle/>
-          <a:p>
-            <a:pPr indent="0" marL="0">
-              <a:buNone/>
-            </a:pPr>
-            <a:r>
-              <a:rPr lang="en-US" sz="1600" b="1" dirty="0">
+            <a:off x="594360" y="1956816"/>
+            <a:ext cx="7863840" cy="420624"/>
+          </a:xfrm>
+          <a:prstGeom prst="rect">
+            <a:avLst/>
+          </a:prstGeom>
+          <a:noFill/>
+          <a:ln/>
+        </p:spPr>
+        <p:txBody>
+          <a:bodyPr wrap="square" lIns="0" tIns="0" rIns="0" bIns="0" rtlCol="0" anchor="ctr"/>
+          <a:lstStyle/>
+          <a:p>
+            <a:pPr indent="0" marL="0">
+              <a:buNone/>
+            </a:pPr>
+            <a:r>
+              <a:rPr lang="en-US" sz="1700" b="1" dirty="0">
                 <a:solidFill>
                   <a:srgbClr val="0E1C42"/>
                 </a:solidFill>
@@ -2515,7 +2550,7 @@
                 <a:ea typeface="Calibri" pitchFamily="34" charset="-122"/>
                 <a:cs typeface="Calibri" pitchFamily="34" charset="-120"/>
               </a:rPr>
-              <a:t>misuse</a:t>
+              <a:t>compass rose  </a:t>
             </a:r>
             <a:pPr indent="0" marL="0">
               <a:buNone/>
@@ -2523,15 +2558,15 @@
             <a:r>
               <a:rPr lang="en-US" sz="1400" dirty="0">
                 <a:solidFill>
-                  <a:srgbClr val="64748B"/>
-                </a:solidFill>
-                <a:latin typeface="Calibri" pitchFamily="34" charset="0"/>
-                <a:ea typeface="Calibri" pitchFamily="34" charset="-122"/>
-                <a:cs typeface="Calibri" pitchFamily="34" charset="-120"/>
-              </a:rPr>
-              <a:t>  ·  mis- + use =</a:t>
-            </a:r>
-            <a:endParaRPr lang="en-US" sz="1600" dirty="0"/>
+                  <a:srgbClr val="1E293B"/>
+                </a:solidFill>
+                <a:latin typeface="Calibri" pitchFamily="34" charset="0"/>
+                <a:ea typeface="Calibri" pitchFamily="34" charset="-122"/>
+                <a:cs typeface="Calibri" pitchFamily="34" charset="-120"/>
+              </a:rPr>
+              <a:t>A symbol on a map that shows directions: north, south, east, west.</a:t>
+            </a:r>
+            <a:endParaRPr lang="en-US" sz="1700" dirty="0"/>
           </a:p>
         </p:txBody>
       </p:sp>
@@ -2543,16 +2578,16 @@
         </p:nvSpPr>
         <p:spPr>
           <a:xfrm>
-            <a:off x="457200" y="2432304"/>
-            <a:ext cx="8229600" cy="457200"/>
+            <a:off x="365760" y="2560320"/>
+            <a:ext cx="8412480" cy="658368"/>
           </a:xfrm>
           <a:prstGeom prst="roundRect">
             <a:avLst>
-              <a:gd name="adj" fmla="val 20000"/>
+              <a:gd name="adj" fmla="val 13889"/>
             </a:avLst>
           </a:prstGeom>
           <a:solidFill>
-            <a:srgbClr val="F0E8FF"/>
+            <a:srgbClr val="E5F7FC"/>
           </a:solidFill>
           <a:ln/>
           <a:effectLst>
@@ -2572,24 +2607,24 @@
         </p:nvSpPr>
         <p:spPr>
           <a:xfrm>
-            <a:off x="640080" y="2478024"/>
-            <a:ext cx="7863840" cy="365760"/>
-          </a:xfrm>
-          <a:prstGeom prst="rect">
-            <a:avLst/>
-          </a:prstGeom>
-          <a:noFill/>
-          <a:ln/>
-        </p:spPr>
-        <p:txBody>
-          <a:bodyPr wrap="square" lIns="0" tIns="0" rIns="0" bIns="0" rtlCol="0" anchor="ctr"/>
-          <a:lstStyle/>
-          <a:p>
-            <a:pPr indent="0" marL="0">
-              <a:buNone/>
-            </a:pPr>
-            <a:r>
-              <a:rPr lang="en-US" sz="1600" b="1" dirty="0">
+            <a:off x="594360" y="2688336"/>
+            <a:ext cx="7863840" cy="420624"/>
+          </a:xfrm>
+          <a:prstGeom prst="rect">
+            <a:avLst/>
+          </a:prstGeom>
+          <a:noFill/>
+          <a:ln/>
+        </p:spPr>
+        <p:txBody>
+          <a:bodyPr wrap="square" lIns="0" tIns="0" rIns="0" bIns="0" rtlCol="0" anchor="ctr"/>
+          <a:lstStyle/>
+          <a:p>
+            <a:pPr indent="0" marL="0">
+              <a:buNone/>
+            </a:pPr>
+            <a:r>
+              <a:rPr lang="en-US" sz="1700" b="1" dirty="0">
                 <a:solidFill>
                   <a:srgbClr val="0E1C42"/>
                 </a:solidFill>
@@ -2597,7 +2632,7 @@
                 <a:ea typeface="Calibri" pitchFamily="34" charset="-122"/>
                 <a:cs typeface="Calibri" pitchFamily="34" charset="-120"/>
               </a:rPr>
-              <a:t>mistake</a:t>
+              <a:t>scale  </a:t>
             </a:r>
             <a:pPr indent="0" marL="0">
               <a:buNone/>
@@ -2605,15 +2640,15 @@
             <a:r>
               <a:rPr lang="en-US" sz="1400" dirty="0">
                 <a:solidFill>
-                  <a:srgbClr val="64748B"/>
-                </a:solidFill>
-                <a:latin typeface="Calibri" pitchFamily="34" charset="0"/>
-                <a:ea typeface="Calibri" pitchFamily="34" charset="-122"/>
-                <a:cs typeface="Calibri" pitchFamily="34" charset="-120"/>
-              </a:rPr>
-              <a:t>  ·  mis- + take =</a:t>
-            </a:r>
-            <a:endParaRPr lang="en-US" sz="1600" dirty="0"/>
+                  <a:srgbClr val="1E293B"/>
+                </a:solidFill>
+                <a:latin typeface="Calibri" pitchFamily="34" charset="0"/>
+                <a:ea typeface="Calibri" pitchFamily="34" charset="-122"/>
+                <a:cs typeface="Calibri" pitchFamily="34" charset="-120"/>
+              </a:rPr>
+              <a:t>A line on a map that helps you measure real distances.</a:t>
+            </a:r>
+            <a:endParaRPr lang="en-US" sz="1700" dirty="0"/>
           </a:p>
         </p:txBody>
       </p:sp>
@@ -2625,16 +2660,16 @@
         </p:nvSpPr>
         <p:spPr>
           <a:xfrm>
-            <a:off x="457200" y="2962656"/>
-            <a:ext cx="8229600" cy="457200"/>
+            <a:off x="365760" y="3291840"/>
+            <a:ext cx="8412480" cy="658368"/>
           </a:xfrm>
           <a:prstGeom prst="roundRect">
             <a:avLst>
-              <a:gd name="adj" fmla="val 20000"/>
+              <a:gd name="adj" fmla="val 13889"/>
             </a:avLst>
           </a:prstGeom>
           <a:solidFill>
-            <a:srgbClr val="F0E8FF"/>
+            <a:srgbClr val="FFFFFF"/>
           </a:solidFill>
           <a:ln/>
           <a:effectLst>
@@ -2654,24 +2689,24 @@
         </p:nvSpPr>
         <p:spPr>
           <a:xfrm>
-            <a:off x="640080" y="3008376"/>
-            <a:ext cx="7863840" cy="365760"/>
-          </a:xfrm>
-          <a:prstGeom prst="rect">
-            <a:avLst/>
-          </a:prstGeom>
-          <a:noFill/>
-          <a:ln/>
-        </p:spPr>
-        <p:txBody>
-          <a:bodyPr wrap="square" lIns="0" tIns="0" rIns="0" bIns="0" rtlCol="0" anchor="ctr"/>
-          <a:lstStyle/>
-          <a:p>
-            <a:pPr indent="0" marL="0">
-              <a:buNone/>
-            </a:pPr>
-            <a:r>
-              <a:rPr lang="en-US" sz="1600" b="1" dirty="0">
+            <a:off x="594360" y="3419856"/>
+            <a:ext cx="7863840" cy="420624"/>
+          </a:xfrm>
+          <a:prstGeom prst="rect">
+            <a:avLst/>
+          </a:prstGeom>
+          <a:noFill/>
+          <a:ln/>
+        </p:spPr>
+        <p:txBody>
+          <a:bodyPr wrap="square" lIns="0" tIns="0" rIns="0" bIns="0" rtlCol="0" anchor="ctr"/>
+          <a:lstStyle/>
+          <a:p>
+            <a:pPr indent="0" marL="0">
+              <a:buNone/>
+            </a:pPr>
+            <a:r>
+              <a:rPr lang="en-US" sz="1700" b="1" dirty="0">
                 <a:solidFill>
                   <a:srgbClr val="0E1C42"/>
                 </a:solidFill>
@@ -2679,7 +2714,7 @@
                 <a:ea typeface="Calibri" pitchFamily="34" charset="-122"/>
                 <a:cs typeface="Calibri" pitchFamily="34" charset="-120"/>
               </a:rPr>
-              <a:t>mismatch</a:t>
+              <a:t>key  </a:t>
             </a:r>
             <a:pPr indent="0" marL="0">
               <a:buNone/>
@@ -2687,93 +2722,15 @@
             <a:r>
               <a:rPr lang="en-US" sz="1400" dirty="0">
                 <a:solidFill>
-                  <a:srgbClr val="64748B"/>
-                </a:solidFill>
-                <a:latin typeface="Calibri" pitchFamily="34" charset="0"/>
-                <a:ea typeface="Calibri" pitchFamily="34" charset="-122"/>
-                <a:cs typeface="Calibri" pitchFamily="34" charset="-120"/>
-              </a:rPr>
-              <a:t>  ·  mis- + match =</a:t>
-            </a:r>
-            <a:endParaRPr lang="en-US" sz="1600" dirty="0"/>
-          </a:p>
-        </p:txBody>
-      </p:sp>
-      <p:sp>
-        <p:nvSpPr>
-          <p:cNvPr id="13" name="Text 11"/>
-          <p:cNvSpPr/>
-          <p:nvPr/>
-        </p:nvSpPr>
-        <p:spPr>
-          <a:xfrm>
-            <a:off x="457200" y="3493008"/>
-            <a:ext cx="8046720" cy="292608"/>
-          </a:xfrm>
-          <a:prstGeom prst="rect">
-            <a:avLst/>
-          </a:prstGeom>
-          <a:noFill/>
-          <a:ln/>
-        </p:spPr>
-        <p:txBody>
-          <a:bodyPr wrap="square" lIns="0" tIns="0" rIns="0" bIns="0" rtlCol="0" anchor="ctr"/>
-          <a:lstStyle/>
-          <a:p>
-            <a:pPr indent="0" marL="0">
-              <a:buNone/>
-            </a:pPr>
-            <a:r>
-              <a:rPr lang="en-US" sz="1100" b="1" spc="200" kern="0" dirty="0">
-                <a:solidFill>
-                  <a:srgbClr val="64748B"/>
-                </a:solidFill>
-                <a:latin typeface="Calibri" pitchFamily="34" charset="0"/>
-                <a:ea typeface="Calibri" pitchFamily="34" charset="-122"/>
-                <a:cs typeface="Calibri" pitchFamily="34" charset="-120"/>
-              </a:rPr>
-              <a:t>CONCEPT EXAMPLES</a:t>
-            </a:r>
-            <a:endParaRPr lang="en-US" sz="1100" dirty="0"/>
-          </a:p>
-        </p:txBody>
-      </p:sp>
-      <p:sp>
-        <p:nvSpPr>
-          <p:cNvPr id="14" name="Text 12"/>
-          <p:cNvSpPr/>
-          <p:nvPr/>
-        </p:nvSpPr>
-        <p:spPr>
-          <a:xfrm>
-            <a:off x="640080" y="3813048"/>
-            <a:ext cx="7863840" cy="320040"/>
-          </a:xfrm>
-          <a:prstGeom prst="rect">
-            <a:avLst/>
-          </a:prstGeom>
-          <a:noFill/>
-          <a:ln/>
-        </p:spPr>
-        <p:txBody>
-          <a:bodyPr wrap="square" lIns="0" tIns="0" rIns="0" bIns="0" rtlCol="0" anchor="ctr"/>
-          <a:lstStyle/>
-          <a:p>
-            <a:pPr indent="0" marL="0">
-              <a:buNone/>
-            </a:pPr>
-            <a:r>
-              <a:rPr lang="en-US" sz="1300" dirty="0">
-                <a:solidFill>
                   <a:srgbClr val="1E293B"/>
                 </a:solidFill>
                 <a:latin typeface="Calibri" pitchFamily="34" charset="0"/>
                 <a:ea typeface="Calibri" pitchFamily="34" charset="-122"/>
                 <a:cs typeface="Calibri" pitchFamily="34" charset="-120"/>
               </a:rPr>
-              <a:t>• 📌 Examples</a:t>
-            </a:r>
-            <a:endParaRPr lang="en-US" sz="1300" dirty="0"/>
+              <a:t>A box on a map that explains what the symbols mean.</a:t>
+            </a:r>
+            <a:endParaRPr lang="en-US" sz="1700" dirty="0"/>
           </a:p>
         </p:txBody>
       </p:sp>
@@ -2791,7 +2748,7 @@
     <p:bg>
       <p:bgPr>
         <a:solidFill>
-          <a:srgbClr val="FFFFFF"/>
+          <a:srgbClr val="F8FAFC"/>
         </a:solidFill>
       </p:bgPr>
     </p:bg>
@@ -2811,80 +2768,116 @@
       </p:grpSpPr>
       <p:sp>
         <p:nvSpPr>
-          <p:cNvPr id="2" name="Text 0"/>
-          <p:cNvSpPr/>
-          <p:nvPr/>
-        </p:nvSpPr>
-        <p:spPr>
-          <a:xfrm>
-            <a:off x="365760" y="164592"/>
-            <a:ext cx="8412480" cy="566928"/>
-          </a:xfrm>
-          <a:prstGeom prst="rect">
-            <a:avLst/>
-          </a:prstGeom>
-          <a:noFill/>
-          <a:ln/>
-        </p:spPr>
-        <p:txBody>
-          <a:bodyPr wrap="square" lIns="0" tIns="0" rIns="0" bIns="0" rtlCol="0" anchor="ctr"/>
-          <a:lstStyle/>
-          <a:p>
-            <a:pPr algn="l" indent="0" marL="0">
-              <a:buNone/>
-            </a:pPr>
-            <a:r>
-              <a:rPr lang="en-US" sz="2800" b="1" dirty="0">
-                <a:solidFill>
-                  <a:srgbClr val="0E1C42"/>
-                </a:solidFill>
-                <a:latin typeface="Calibri" pitchFamily="34" charset="0"/>
-                <a:ea typeface="Calibri" pitchFamily="34" charset="-122"/>
-                <a:cs typeface="Calibri" pitchFamily="34" charset="-120"/>
-              </a:rPr>
-              <a:t>🔤 Vocabulary</a:t>
-            </a:r>
-            <a:endParaRPr lang="en-US" sz="2800" dirty="0"/>
-          </a:p>
-        </p:txBody>
-      </p:sp>
-      <p:sp>
-        <p:nvSpPr>
-          <p:cNvPr id="3" name="Shape 1"/>
-          <p:cNvSpPr/>
-          <p:nvPr/>
-        </p:nvSpPr>
-        <p:spPr>
-          <a:xfrm>
-            <a:off x="365760" y="749808"/>
-            <a:ext cx="8412480" cy="0"/>
-          </a:xfrm>
-          <a:prstGeom prst="line">
-            <a:avLst/>
-          </a:prstGeom>
-          <a:noFill/>
-          <a:ln w="19050">
-            <a:solidFill>
-              <a:srgbClr val="55C8E8"/>
-            </a:solidFill>
-            <a:prstDash val="solid"/>
-          </a:ln>
-        </p:spPr>
-      </p:sp>
-      <p:sp>
-        <p:nvSpPr>
-          <p:cNvPr id="4" name="Shape 2"/>
-          <p:cNvSpPr/>
-          <p:nvPr/>
-        </p:nvSpPr>
-        <p:spPr>
-          <a:xfrm>
-            <a:off x="457200" y="1005840"/>
-            <a:ext cx="3840480" cy="640080"/>
+          <p:cNvPr id="2" name="Shape 0"/>
+          <p:cNvSpPr/>
+          <p:nvPr/>
+        </p:nvSpPr>
+        <p:spPr>
+          <a:xfrm>
+            <a:off x="0" y="0"/>
+            <a:ext cx="9144000" cy="566928"/>
+          </a:xfrm>
+          <a:prstGeom prst="rect">
+            <a:avLst/>
+          </a:prstGeom>
+          <a:solidFill>
+            <a:srgbClr val="C7922C"/>
+          </a:solidFill>
+          <a:ln/>
+        </p:spPr>
+      </p:sp>
+      <p:sp>
+        <p:nvSpPr>
+          <p:cNvPr id="3" name="Text 1"/>
+          <p:cNvSpPr/>
+          <p:nvPr/>
+        </p:nvSpPr>
+        <p:spPr>
+          <a:xfrm>
+            <a:off x="365760" y="54864"/>
+            <a:ext cx="8412480" cy="457200"/>
+          </a:xfrm>
+          <a:prstGeom prst="rect">
+            <a:avLst/>
+          </a:prstGeom>
+          <a:noFill/>
+          <a:ln/>
+        </p:spPr>
+        <p:txBody>
+          <a:bodyPr wrap="square" lIns="0" tIns="0" rIns="0" bIns="0" rtlCol="0" anchor="ctr"/>
+          <a:lstStyle/>
+          <a:p>
+            <a:pPr indent="0" marL="0">
+              <a:buNone/>
+            </a:pPr>
+            <a:r>
+              <a:rPr lang="en-US" sz="2200" b="1" dirty="0">
+                <a:solidFill>
+                  <a:srgbClr val="FFFFFF"/>
+                </a:solidFill>
+                <a:latin typeface="Calibri" pitchFamily="34" charset="0"/>
+                <a:ea typeface="Calibri" pitchFamily="34" charset="-122"/>
+                <a:cs typeface="Calibri" pitchFamily="34" charset="-120"/>
+              </a:rPr>
+              <a:t>✏️  Grammar</a:t>
+            </a:r>
+            <a:endParaRPr lang="en-US" sz="2200" dirty="0"/>
+          </a:p>
+        </p:txBody>
+      </p:sp>
+      <p:sp>
+        <p:nvSpPr>
+          <p:cNvPr id="4" name="Text 2"/>
+          <p:cNvSpPr/>
+          <p:nvPr/>
+        </p:nvSpPr>
+        <p:spPr>
+          <a:xfrm>
+            <a:off x="365760" y="777240"/>
+            <a:ext cx="8229600" cy="237744"/>
+          </a:xfrm>
+          <a:prstGeom prst="rect">
+            <a:avLst/>
+          </a:prstGeom>
+          <a:noFill/>
+          <a:ln/>
+        </p:spPr>
+        <p:txBody>
+          <a:bodyPr wrap="square" lIns="0" tIns="0" rIns="0" bIns="0" rtlCol="0" anchor="ctr"/>
+          <a:lstStyle/>
+          <a:p>
+            <a:pPr indent="0" marL="0">
+              <a:buNone/>
+            </a:pPr>
+            <a:r>
+              <a:rPr lang="en-US" sz="1100" b="1" spc="100" kern="0" dirty="0">
+                <a:solidFill>
+                  <a:srgbClr val="C7922C"/>
+                </a:solidFill>
+                <a:latin typeface="Calibri" pitchFamily="34" charset="0"/>
+                <a:ea typeface="Calibri" pitchFamily="34" charset="-122"/>
+                <a:cs typeface="Calibri" pitchFamily="34" charset="-120"/>
+              </a:rPr>
+              <a:t>COMMON AND PROPER NOUNS REVIEW</a:t>
+            </a:r>
+            <a:endParaRPr lang="en-US" sz="1100" dirty="0"/>
+          </a:p>
+        </p:txBody>
+      </p:sp>
+      <p:sp>
+        <p:nvSpPr>
+          <p:cNvPr id="5" name="Shape 3"/>
+          <p:cNvSpPr/>
+          <p:nvPr/>
+        </p:nvSpPr>
+        <p:spPr>
+          <a:xfrm>
+            <a:off x="365760" y="1078992"/>
+            <a:ext cx="8412480" cy="658368"/>
           </a:xfrm>
           <a:prstGeom prst="roundRect">
             <a:avLst>
-              <a:gd name="adj" fmla="val 14286"/>
+              <a:gd name="adj" fmla="val 13889"/>
             </a:avLst>
           </a:prstGeom>
           <a:solidFill>
@@ -2902,50 +2895,30 @@
       </p:sp>
       <p:sp>
         <p:nvSpPr>
-          <p:cNvPr id="5" name="Text 3"/>
-          <p:cNvSpPr/>
-          <p:nvPr/>
-        </p:nvSpPr>
-        <p:spPr>
-          <a:xfrm>
-            <a:off x="594360" y="1060704"/>
-            <a:ext cx="3566160" cy="530352"/>
-          </a:xfrm>
-          <a:prstGeom prst="rect">
-            <a:avLst/>
-          </a:prstGeom>
-          <a:noFill/>
-          <a:ln/>
-        </p:spPr>
-        <p:txBody>
-          <a:bodyPr wrap="square" lIns="0" tIns="0" rIns="0" bIns="0" rtlCol="0" anchor="ctr"/>
-          <a:lstStyle/>
-          <a:p>
-            <a:pPr indent="0" marL="0">
-              <a:buNone/>
-            </a:pPr>
-            <a:r>
-              <a:rPr lang="en-US" sz="1500" b="1" dirty="0">
-                <a:solidFill>
-                  <a:srgbClr val="0E1C42"/>
-                </a:solidFill>
-                <a:latin typeface="Calibri" pitchFamily="34" charset="0"/>
-                <a:ea typeface="Calibri" pitchFamily="34" charset="-122"/>
-                <a:cs typeface="Calibri" pitchFamily="34" charset="-120"/>
-              </a:rPr>
-              <a:t>map</a:t>
-            </a:r>
-            <a:pPr indent="0" marL="0">
-              <a:buNone/>
-            </a:pPr>
-            <a:endParaRPr lang="en-US" sz="1500" dirty="0"/>
-          </a:p>
-          <a:p>
-            <a:pPr indent="0" marL="0">
-              <a:buNone/>
-            </a:pPr>
-            <a:r>
-              <a:rPr lang="en-US" sz="1200" dirty="0">
+          <p:cNvPr id="6" name="Text 4"/>
+          <p:cNvSpPr/>
+          <p:nvPr/>
+        </p:nvSpPr>
+        <p:spPr>
+          <a:xfrm>
+            <a:off x="594360" y="1225296"/>
+            <a:ext cx="7863840" cy="402336"/>
+          </a:xfrm>
+          <a:prstGeom prst="rect">
+            <a:avLst/>
+          </a:prstGeom>
+          <a:noFill/>
+          <a:ln/>
+        </p:spPr>
+        <p:txBody>
+          <a:bodyPr wrap="square" lIns="0" tIns="0" rIns="0" bIns="0" rtlCol="0" anchor="ctr"/>
+          <a:lstStyle/>
+          <a:p>
+            <a:pPr indent="0" marL="0">
+              <a:buNone/>
+            </a:pPr>
+            <a:r>
+              <a:rPr lang="en-US" sz="1600" dirty="0">
                 <a:solidFill>
                   <a:srgbClr val="1E293B"/>
                 </a:solidFill>
@@ -2953,30 +2926,30 @@
                 <a:ea typeface="Calibri" pitchFamily="34" charset="-122"/>
                 <a:cs typeface="Calibri" pitchFamily="34" charset="-120"/>
               </a:rPr>
-              <a:t>A drawing that shows what a place looks like from above.</a:t>
-            </a:r>
-            <a:endParaRPr lang="en-US" sz="1500" dirty="0"/>
-          </a:p>
-        </p:txBody>
-      </p:sp>
-      <p:sp>
-        <p:nvSpPr>
-          <p:cNvPr id="6" name="Shape 4"/>
-          <p:cNvSpPr/>
-          <p:nvPr/>
-        </p:nvSpPr>
-        <p:spPr>
-          <a:xfrm>
-            <a:off x="4572000" y="1005840"/>
-            <a:ext cx="3840480" cy="640080"/>
+              <a:t>The map showed the state of Arizona in red.</a:t>
+            </a:r>
+            <a:endParaRPr lang="en-US" sz="1600" dirty="0"/>
+          </a:p>
+        </p:txBody>
+      </p:sp>
+      <p:sp>
+        <p:nvSpPr>
+          <p:cNvPr id="7" name="Shape 5"/>
+          <p:cNvSpPr/>
+          <p:nvPr/>
+        </p:nvSpPr>
+        <p:spPr>
+          <a:xfrm>
+            <a:off x="365760" y="1810512"/>
+            <a:ext cx="8412480" cy="658368"/>
           </a:xfrm>
           <a:prstGeom prst="roundRect">
             <a:avLst>
-              <a:gd name="adj" fmla="val 14286"/>
+              <a:gd name="adj" fmla="val 13889"/>
             </a:avLst>
           </a:prstGeom>
           <a:solidFill>
-            <a:srgbClr val="FEF6E8"/>
+            <a:srgbClr val="FFFFFF"/>
           </a:solidFill>
           <a:ln/>
           <a:effectLst>
@@ -2990,50 +2963,30 @@
       </p:sp>
       <p:sp>
         <p:nvSpPr>
-          <p:cNvPr id="7" name="Text 5"/>
-          <p:cNvSpPr/>
-          <p:nvPr/>
-        </p:nvSpPr>
-        <p:spPr>
-          <a:xfrm>
-            <a:off x="4709160" y="1060704"/>
-            <a:ext cx="3566160" cy="530352"/>
-          </a:xfrm>
-          <a:prstGeom prst="rect">
-            <a:avLst/>
-          </a:prstGeom>
-          <a:noFill/>
-          <a:ln/>
-        </p:spPr>
-        <p:txBody>
-          <a:bodyPr wrap="square" lIns="0" tIns="0" rIns="0" bIns="0" rtlCol="0" anchor="ctr"/>
-          <a:lstStyle/>
-          <a:p>
-            <a:pPr indent="0" marL="0">
-              <a:buNone/>
-            </a:pPr>
-            <a:r>
-              <a:rPr lang="en-US" sz="1500" b="1" dirty="0">
-                <a:solidFill>
-                  <a:srgbClr val="0E1C42"/>
-                </a:solidFill>
-                <a:latin typeface="Calibri" pitchFamily="34" charset="0"/>
-                <a:ea typeface="Calibri" pitchFamily="34" charset="-122"/>
-                <a:cs typeface="Calibri" pitchFamily="34" charset="-120"/>
-              </a:rPr>
-              <a:t>compass rose</a:t>
-            </a:r>
-            <a:pPr indent="0" marL="0">
-              <a:buNone/>
-            </a:pPr>
-            <a:endParaRPr lang="en-US" sz="1500" dirty="0"/>
-          </a:p>
-          <a:p>
-            <a:pPr indent="0" marL="0">
-              <a:buNone/>
-            </a:pPr>
-            <a:r>
-              <a:rPr lang="en-US" sz="1200" dirty="0">
+          <p:cNvPr id="8" name="Text 6"/>
+          <p:cNvSpPr/>
+          <p:nvPr/>
+        </p:nvSpPr>
+        <p:spPr>
+          <a:xfrm>
+            <a:off x="594360" y="1956816"/>
+            <a:ext cx="7863840" cy="402336"/>
+          </a:xfrm>
+          <a:prstGeom prst="rect">
+            <a:avLst/>
+          </a:prstGeom>
+          <a:noFill/>
+          <a:ln/>
+        </p:spPr>
+        <p:txBody>
+          <a:bodyPr wrap="square" lIns="0" tIns="0" rIns="0" bIns="0" rtlCol="0" anchor="ctr"/>
+          <a:lstStyle/>
+          <a:p>
+            <a:pPr indent="0" marL="0">
+              <a:buNone/>
+            </a:pPr>
+            <a:r>
+              <a:rPr lang="en-US" sz="1600" dirty="0">
                 <a:solidFill>
                   <a:srgbClr val="1E293B"/>
                 </a:solidFill>
@@ -3041,26 +2994,26 @@
                 <a:ea typeface="Calibri" pitchFamily="34" charset="-122"/>
                 <a:cs typeface="Calibri" pitchFamily="34" charset="-120"/>
               </a:rPr>
-              <a:t>A symbol on a map that shows directions: north, south, east, west.</a:t>
-            </a:r>
-            <a:endParaRPr lang="en-US" sz="1500" dirty="0"/>
-          </a:p>
-        </p:txBody>
-      </p:sp>
-      <p:sp>
-        <p:nvSpPr>
-          <p:cNvPr id="8" name="Shape 6"/>
-          <p:cNvSpPr/>
-          <p:nvPr/>
-        </p:nvSpPr>
-        <p:spPr>
-          <a:xfrm>
-            <a:off x="457200" y="1755648"/>
-            <a:ext cx="3840480" cy="640080"/>
+              <a:t>Every country has a capital city.</a:t>
+            </a:r>
+            <a:endParaRPr lang="en-US" sz="1600" dirty="0"/>
+          </a:p>
+        </p:txBody>
+      </p:sp>
+      <p:sp>
+        <p:nvSpPr>
+          <p:cNvPr id="9" name="Shape 7"/>
+          <p:cNvSpPr/>
+          <p:nvPr/>
+        </p:nvSpPr>
+        <p:spPr>
+          <a:xfrm>
+            <a:off x="365760" y="2542032"/>
+            <a:ext cx="8412480" cy="658368"/>
           </a:xfrm>
           <a:prstGeom prst="roundRect">
             <a:avLst>
-              <a:gd name="adj" fmla="val 14286"/>
+              <a:gd name="adj" fmla="val 13889"/>
             </a:avLst>
           </a:prstGeom>
           <a:solidFill>
@@ -3078,50 +3031,30 @@
       </p:sp>
       <p:sp>
         <p:nvSpPr>
-          <p:cNvPr id="9" name="Text 7"/>
-          <p:cNvSpPr/>
-          <p:nvPr/>
-        </p:nvSpPr>
-        <p:spPr>
-          <a:xfrm>
-            <a:off x="594360" y="1810512"/>
-            <a:ext cx="3566160" cy="530352"/>
-          </a:xfrm>
-          <a:prstGeom prst="rect">
-            <a:avLst/>
-          </a:prstGeom>
-          <a:noFill/>
-          <a:ln/>
-        </p:spPr>
-        <p:txBody>
-          <a:bodyPr wrap="square" lIns="0" tIns="0" rIns="0" bIns="0" rtlCol="0" anchor="ctr"/>
-          <a:lstStyle/>
-          <a:p>
-            <a:pPr indent="0" marL="0">
-              <a:buNone/>
-            </a:pPr>
-            <a:r>
-              <a:rPr lang="en-US" sz="1500" b="1" dirty="0">
-                <a:solidFill>
-                  <a:srgbClr val="0E1C42"/>
-                </a:solidFill>
-                <a:latin typeface="Calibri" pitchFamily="34" charset="0"/>
-                <a:ea typeface="Calibri" pitchFamily="34" charset="-122"/>
-                <a:cs typeface="Calibri" pitchFamily="34" charset="-120"/>
-              </a:rPr>
-              <a:t>scale</a:t>
-            </a:r>
-            <a:pPr indent="0" marL="0">
-              <a:buNone/>
-            </a:pPr>
-            <a:endParaRPr lang="en-US" sz="1500" dirty="0"/>
-          </a:p>
-          <a:p>
-            <a:pPr indent="0" marL="0">
-              <a:buNone/>
-            </a:pPr>
-            <a:r>
-              <a:rPr lang="en-US" sz="1200" dirty="0">
+          <p:cNvPr id="10" name="Text 8"/>
+          <p:cNvSpPr/>
+          <p:nvPr/>
+        </p:nvSpPr>
+        <p:spPr>
+          <a:xfrm>
+            <a:off x="594360" y="2688336"/>
+            <a:ext cx="7863840" cy="402336"/>
+          </a:xfrm>
+          <a:prstGeom prst="rect">
+            <a:avLst/>
+          </a:prstGeom>
+          <a:noFill/>
+          <a:ln/>
+        </p:spPr>
+        <p:txBody>
+          <a:bodyPr wrap="square" lIns="0" tIns="0" rIns="0" bIns="0" rtlCol="0" anchor="ctr"/>
+          <a:lstStyle/>
+          <a:p>
+            <a:pPr indent="0" marL="0">
+              <a:buNone/>
+            </a:pPr>
+            <a:r>
+              <a:rPr lang="en-US" sz="1600" dirty="0">
                 <a:solidFill>
                   <a:srgbClr val="1E293B"/>
                 </a:solidFill>
@@ -3129,30 +3062,30 @@
                 <a:ea typeface="Calibri" pitchFamily="34" charset="-122"/>
                 <a:cs typeface="Calibri" pitchFamily="34" charset="-120"/>
               </a:rPr>
-              <a:t>A line on a map that helps you measure real distances.</a:t>
-            </a:r>
-            <a:endParaRPr lang="en-US" sz="1500" dirty="0"/>
-          </a:p>
-        </p:txBody>
-      </p:sp>
-      <p:sp>
-        <p:nvSpPr>
-          <p:cNvPr id="10" name="Shape 8"/>
-          <p:cNvSpPr/>
-          <p:nvPr/>
-        </p:nvSpPr>
-        <p:spPr>
-          <a:xfrm>
-            <a:off x="4572000" y="1755648"/>
-            <a:ext cx="3840480" cy="640080"/>
+              <a:t>We followed the river all the way to Texas.</a:t>
+            </a:r>
+            <a:endParaRPr lang="en-US" sz="1600" dirty="0"/>
+          </a:p>
+        </p:txBody>
+      </p:sp>
+      <p:sp>
+        <p:nvSpPr>
+          <p:cNvPr id="11" name="Shape 9"/>
+          <p:cNvSpPr/>
+          <p:nvPr/>
+        </p:nvSpPr>
+        <p:spPr>
+          <a:xfrm>
+            <a:off x="365760" y="3273552"/>
+            <a:ext cx="8412480" cy="658368"/>
           </a:xfrm>
           <a:prstGeom prst="roundRect">
             <a:avLst>
-              <a:gd name="adj" fmla="val 14286"/>
+              <a:gd name="adj" fmla="val 13889"/>
             </a:avLst>
           </a:prstGeom>
           <a:solidFill>
-            <a:srgbClr val="FEF6E8"/>
+            <a:srgbClr val="FFFFFF"/>
           </a:solidFill>
           <a:ln/>
           <a:effectLst>
@@ -3166,50 +3099,30 @@
       </p:sp>
       <p:sp>
         <p:nvSpPr>
-          <p:cNvPr id="11" name="Text 9"/>
-          <p:cNvSpPr/>
-          <p:nvPr/>
-        </p:nvSpPr>
-        <p:spPr>
-          <a:xfrm>
-            <a:off x="4709160" y="1810512"/>
-            <a:ext cx="3566160" cy="530352"/>
-          </a:xfrm>
-          <a:prstGeom prst="rect">
-            <a:avLst/>
-          </a:prstGeom>
-          <a:noFill/>
-          <a:ln/>
-        </p:spPr>
-        <p:txBody>
-          <a:bodyPr wrap="square" lIns="0" tIns="0" rIns="0" bIns="0" rtlCol="0" anchor="ctr"/>
-          <a:lstStyle/>
-          <a:p>
-            <a:pPr indent="0" marL="0">
-              <a:buNone/>
-            </a:pPr>
-            <a:r>
-              <a:rPr lang="en-US" sz="1500" b="1" dirty="0">
-                <a:solidFill>
-                  <a:srgbClr val="0E1C42"/>
-                </a:solidFill>
-                <a:latin typeface="Calibri" pitchFamily="34" charset="0"/>
-                <a:ea typeface="Calibri" pitchFamily="34" charset="-122"/>
-                <a:cs typeface="Calibri" pitchFamily="34" charset="-120"/>
-              </a:rPr>
-              <a:t>key</a:t>
-            </a:r>
-            <a:pPr indent="0" marL="0">
-              <a:buNone/>
-            </a:pPr>
-            <a:endParaRPr lang="en-US" sz="1500" dirty="0"/>
-          </a:p>
-          <a:p>
-            <a:pPr indent="0" marL="0">
-              <a:buNone/>
-            </a:pPr>
-            <a:r>
-              <a:rPr lang="en-US" sz="1200" dirty="0">
+          <p:cNvPr id="12" name="Text 10"/>
+          <p:cNvSpPr/>
+          <p:nvPr/>
+        </p:nvSpPr>
+        <p:spPr>
+          <a:xfrm>
+            <a:off x="594360" y="3419856"/>
+            <a:ext cx="7863840" cy="402336"/>
+          </a:xfrm>
+          <a:prstGeom prst="rect">
+            <a:avLst/>
+          </a:prstGeom>
+          <a:noFill/>
+          <a:ln/>
+        </p:spPr>
+        <p:txBody>
+          <a:bodyPr wrap="square" lIns="0" tIns="0" rIns="0" bIns="0" rtlCol="0" anchor="ctr"/>
+          <a:lstStyle/>
+          <a:p>
+            <a:pPr indent="0" marL="0">
+              <a:buNone/>
+            </a:pPr>
+            <a:r>
+              <a:rPr lang="en-US" sz="1600" dirty="0">
                 <a:solidFill>
                   <a:srgbClr val="1E293B"/>
                 </a:solidFill>
@@ -3217,7 +3130,46 @@
                 <a:ea typeface="Calibri" pitchFamily="34" charset="-122"/>
                 <a:cs typeface="Calibri" pitchFamily="34" charset="-120"/>
               </a:rPr>
-              <a:t>A box on a map that explains what the symbols mean.</a:t>
+              <a:t>The Pacific Ocean borders the western coast.</a:t>
+            </a:r>
+            <a:endParaRPr lang="en-US" sz="1600" dirty="0"/>
+          </a:p>
+        </p:txBody>
+      </p:sp>
+      <p:sp>
+        <p:nvSpPr>
+          <p:cNvPr id="13" name="Text 11"/>
+          <p:cNvSpPr/>
+          <p:nvPr/>
+        </p:nvSpPr>
+        <p:spPr>
+          <a:xfrm>
+            <a:off x="365760" y="4050792"/>
+            <a:ext cx="8412480" cy="365760"/>
+          </a:xfrm>
+          <a:prstGeom prst="rect">
+            <a:avLst/>
+          </a:prstGeom>
+          <a:noFill/>
+          <a:ln/>
+        </p:spPr>
+        <p:txBody>
+          <a:bodyPr wrap="square" lIns="0" tIns="0" rIns="0" bIns="0" rtlCol="0" anchor="ctr"/>
+          <a:lstStyle/>
+          <a:p>
+            <a:pPr indent="0" marL="0">
+              <a:buNone/>
+            </a:pPr>
+            <a:r>
+              <a:rPr lang="en-US" sz="1500" i="1" dirty="0">
+                <a:solidFill>
+                  <a:srgbClr val="64748B"/>
+                </a:solidFill>
+                <a:latin typeface="Calibri" pitchFamily="34" charset="0"/>
+                <a:ea typeface="Calibri" pitchFamily="34" charset="-122"/>
+                <a:cs typeface="Calibri" pitchFamily="34" charset="-120"/>
+              </a:rPr>
+              <a:t>Your turn. Tap the proper noun in each sentence — the one that names a specific place and starts with a capital letter. Tap a word to check — green means you got it.</a:t>
             </a:r>
             <a:endParaRPr lang="en-US" sz="1500" dirty="0"/>
           </a:p>
@@ -3237,7 +3189,7 @@
     <p:bg>
       <p:bgPr>
         <a:solidFill>
-          <a:srgbClr val="E5F7FC"/>
+          <a:srgbClr val="F8FAFC"/>
         </a:solidFill>
       </p:bgPr>
     </p:bg>
@@ -3257,180 +3209,116 @@
       </p:grpSpPr>
       <p:sp>
         <p:nvSpPr>
-          <p:cNvPr id="2" name="Text 0"/>
-          <p:cNvSpPr/>
-          <p:nvPr/>
-        </p:nvSpPr>
-        <p:spPr>
-          <a:xfrm>
-            <a:off x="365760" y="164592"/>
-            <a:ext cx="5943600" cy="566928"/>
-          </a:xfrm>
-          <a:prstGeom prst="rect">
-            <a:avLst/>
-          </a:prstGeom>
-          <a:noFill/>
-          <a:ln/>
-        </p:spPr>
-        <p:txBody>
-          <a:bodyPr wrap="square" lIns="0" tIns="0" rIns="0" bIns="0" rtlCol="0" anchor="ctr"/>
-          <a:lstStyle/>
-          <a:p>
-            <a:pPr algn="l" indent="0" marL="0">
-              <a:buNone/>
-            </a:pPr>
-            <a:r>
-              <a:rPr lang="en-US" sz="2800" b="1" dirty="0">
-                <a:solidFill>
-                  <a:srgbClr val="0E1C42"/>
-                </a:solidFill>
-                <a:latin typeface="Calibri" pitchFamily="34" charset="0"/>
-                <a:ea typeface="Calibri" pitchFamily="34" charset="-122"/>
-                <a:cs typeface="Calibri" pitchFamily="34" charset="-120"/>
-              </a:rPr>
-              <a:t>🔠 Spelling: Compound words</a:t>
-            </a:r>
-            <a:endParaRPr lang="en-US" sz="2800" dirty="0"/>
-          </a:p>
-        </p:txBody>
-      </p:sp>
-      <p:sp>
-        <p:nvSpPr>
-          <p:cNvPr id="3" name="Shape 1"/>
-          <p:cNvSpPr/>
-          <p:nvPr/>
-        </p:nvSpPr>
-        <p:spPr>
-          <a:xfrm>
-            <a:off x="365760" y="749808"/>
-            <a:ext cx="8412480" cy="0"/>
-          </a:xfrm>
-          <a:prstGeom prst="line">
-            <a:avLst/>
-          </a:prstGeom>
-          <a:noFill/>
-          <a:ln w="19050">
-            <a:solidFill>
-              <a:srgbClr val="5CB85C"/>
-            </a:solidFill>
-            <a:prstDash val="solid"/>
-          </a:ln>
-        </p:spPr>
-      </p:sp>
-      <p:sp>
-        <p:nvSpPr>
-          <p:cNvPr id="4" name="Shape 2"/>
-          <p:cNvSpPr/>
-          <p:nvPr/>
-        </p:nvSpPr>
-        <p:spPr>
-          <a:xfrm>
-            <a:off x="6492240" y="173736"/>
-            <a:ext cx="2286000" cy="502920"/>
+          <p:cNvPr id="2" name="Shape 0"/>
+          <p:cNvSpPr/>
+          <p:nvPr/>
+        </p:nvSpPr>
+        <p:spPr>
+          <a:xfrm>
+            <a:off x="0" y="0"/>
+            <a:ext cx="9144000" cy="566928"/>
+          </a:xfrm>
+          <a:prstGeom prst="rect">
+            <a:avLst/>
+          </a:prstGeom>
+          <a:solidFill>
+            <a:srgbClr val="C7922C"/>
+          </a:solidFill>
+          <a:ln/>
+        </p:spPr>
+      </p:sp>
+      <p:sp>
+        <p:nvSpPr>
+          <p:cNvPr id="3" name="Text 1"/>
+          <p:cNvSpPr/>
+          <p:nvPr/>
+        </p:nvSpPr>
+        <p:spPr>
+          <a:xfrm>
+            <a:off x="365760" y="54864"/>
+            <a:ext cx="8412480" cy="457200"/>
+          </a:xfrm>
+          <a:prstGeom prst="rect">
+            <a:avLst/>
+          </a:prstGeom>
+          <a:noFill/>
+          <a:ln/>
+        </p:spPr>
+        <p:txBody>
+          <a:bodyPr wrap="square" lIns="0" tIns="0" rIns="0" bIns="0" rtlCol="0" anchor="ctr"/>
+          <a:lstStyle/>
+          <a:p>
+            <a:pPr indent="0" marL="0">
+              <a:buNone/>
+            </a:pPr>
+            <a:r>
+              <a:rPr lang="en-US" sz="2200" b="1" dirty="0">
+                <a:solidFill>
+                  <a:srgbClr val="FFFFFF"/>
+                </a:solidFill>
+                <a:latin typeface="Calibri" pitchFamily="34" charset="0"/>
+                <a:ea typeface="Calibri" pitchFamily="34" charset="-122"/>
+                <a:cs typeface="Calibri" pitchFamily="34" charset="-120"/>
+              </a:rPr>
+              <a:t>✏️  Grammar</a:t>
+            </a:r>
+            <a:endParaRPr lang="en-US" sz="2200" dirty="0"/>
+          </a:p>
+        </p:txBody>
+      </p:sp>
+      <p:sp>
+        <p:nvSpPr>
+          <p:cNvPr id="4" name="Text 2"/>
+          <p:cNvSpPr/>
+          <p:nvPr/>
+        </p:nvSpPr>
+        <p:spPr>
+          <a:xfrm>
+            <a:off x="365760" y="777240"/>
+            <a:ext cx="8229600" cy="237744"/>
+          </a:xfrm>
+          <a:prstGeom prst="rect">
+            <a:avLst/>
+          </a:prstGeom>
+          <a:noFill/>
+          <a:ln/>
+        </p:spPr>
+        <p:txBody>
+          <a:bodyPr wrap="square" lIns="0" tIns="0" rIns="0" bIns="0" rtlCol="0" anchor="ctr"/>
+          <a:lstStyle/>
+          <a:p>
+            <a:pPr indent="0" marL="0">
+              <a:buNone/>
+            </a:pPr>
+            <a:r>
+              <a:rPr lang="en-US" sz="1100" b="1" spc="100" kern="0" dirty="0">
+                <a:solidFill>
+                  <a:srgbClr val="C7922C"/>
+                </a:solidFill>
+                <a:latin typeface="Calibri" pitchFamily="34" charset="0"/>
+                <a:ea typeface="Calibri" pitchFamily="34" charset="-122"/>
+                <a:cs typeface="Calibri" pitchFamily="34" charset="-120"/>
+              </a:rPr>
+              <a:t>COMMON AND PROPER NOUNS REVIEW</a:t>
+            </a:r>
+            <a:endParaRPr lang="en-US" sz="1100" dirty="0"/>
+          </a:p>
+        </p:txBody>
+      </p:sp>
+      <p:sp>
+        <p:nvSpPr>
+          <p:cNvPr id="5" name="Shape 3"/>
+          <p:cNvSpPr/>
+          <p:nvPr/>
+        </p:nvSpPr>
+        <p:spPr>
+          <a:xfrm>
+            <a:off x="365760" y="1078992"/>
+            <a:ext cx="8412480" cy="658368"/>
           </a:xfrm>
           <a:prstGeom prst="roundRect">
             <a:avLst>
-              <a:gd name="adj" fmla="val 21818"/>
-            </a:avLst>
-          </a:prstGeom>
-          <a:solidFill>
-            <a:srgbClr val="5CB85C"/>
-          </a:solidFill>
-          <a:ln/>
-        </p:spPr>
-      </p:sp>
-      <p:sp>
-        <p:nvSpPr>
-          <p:cNvPr id="5" name="Text 3"/>
-          <p:cNvSpPr/>
-          <p:nvPr/>
-        </p:nvSpPr>
-        <p:spPr>
-          <a:xfrm>
-            <a:off x="6492240" y="173736"/>
-            <a:ext cx="2286000" cy="502920"/>
-          </a:xfrm>
-          <a:prstGeom prst="rect">
-            <a:avLst/>
-          </a:prstGeom>
-          <a:noFill/>
-          <a:ln/>
-        </p:spPr>
-        <p:txBody>
-          <a:bodyPr wrap="square" lIns="0" tIns="0" rIns="0" bIns="0" rtlCol="0" anchor="ctr"/>
-          <a:lstStyle/>
-          <a:p>
-            <a:pPr algn="ctr" indent="0" marL="0">
-              <a:buNone/>
-            </a:pPr>
-            <a:r>
-              <a:rPr lang="en-US" sz="1100" b="1" dirty="0">
-                <a:solidFill>
-                  <a:srgbClr val="0E1C42"/>
-                </a:solidFill>
-                <a:latin typeface="Calibri" pitchFamily="34" charset="0"/>
-                <a:ea typeface="Calibri" pitchFamily="34" charset="-122"/>
-                <a:cs typeface="Calibri" pitchFamily="34" charset="-120"/>
-              </a:rPr>
-              <a:t>CHAT PROMPT</a:t>
-            </a:r>
-            <a:endParaRPr lang="en-US" sz="1100" dirty="0"/>
-          </a:p>
-        </p:txBody>
-      </p:sp>
-      <p:sp>
-        <p:nvSpPr>
-          <p:cNvPr id="6" name="Text 4"/>
-          <p:cNvSpPr/>
-          <p:nvPr/>
-        </p:nvSpPr>
-        <p:spPr>
-          <a:xfrm>
-            <a:off x="457200" y="1005840"/>
-            <a:ext cx="8046720" cy="292608"/>
-          </a:xfrm>
-          <a:prstGeom prst="rect">
-            <a:avLst/>
-          </a:prstGeom>
-          <a:noFill/>
-          <a:ln/>
-        </p:spPr>
-        <p:txBody>
-          <a:bodyPr wrap="square" lIns="0" tIns="0" rIns="0" bIns="0" rtlCol="0" anchor="ctr"/>
-          <a:lstStyle/>
-          <a:p>
-            <a:pPr indent="0" marL="0">
-              <a:buNone/>
-            </a:pPr>
-            <a:r>
-              <a:rPr lang="en-US" sz="1100" b="1" spc="200" kern="0" dirty="0">
-                <a:solidFill>
-                  <a:srgbClr val="C7922C"/>
-                </a:solidFill>
-                <a:latin typeface="Calibri" pitchFamily="34" charset="0"/>
-                <a:ea typeface="Calibri" pitchFamily="34" charset="-122"/>
-                <a:cs typeface="Calibri" pitchFamily="34" charset="-120"/>
-              </a:rPr>
-              <a:t>WORD BANK — Sort these words!</a:t>
-            </a:r>
-            <a:endParaRPr lang="en-US" sz="1100" dirty="0"/>
-          </a:p>
-        </p:txBody>
-      </p:sp>
-      <p:sp>
-        <p:nvSpPr>
-          <p:cNvPr id="7" name="Shape 5"/>
-          <p:cNvSpPr/>
-          <p:nvPr/>
-        </p:nvSpPr>
-        <p:spPr>
-          <a:xfrm>
-            <a:off x="457200" y="1371600"/>
-            <a:ext cx="8229600" cy="914400"/>
-          </a:xfrm>
-          <a:prstGeom prst="roundRect">
-            <a:avLst>
-              <a:gd name="adj" fmla="val 10000"/>
+              <a:gd name="adj" fmla="val 13889"/>
             </a:avLst>
           </a:prstGeom>
           <a:solidFill>
@@ -3448,38 +3336,66 @@
       </p:sp>
       <p:sp>
         <p:nvSpPr>
-          <p:cNvPr id="8" name="Text 6"/>
-          <p:cNvSpPr/>
-          <p:nvPr/>
-        </p:nvSpPr>
-        <p:spPr>
-          <a:xfrm>
-            <a:off x="640080" y="1463040"/>
-            <a:ext cx="7863840" cy="731520"/>
-          </a:xfrm>
-          <a:prstGeom prst="rect">
-            <a:avLst/>
-          </a:prstGeom>
-          <a:noFill/>
-          <a:ln/>
-        </p:spPr>
-        <p:txBody>
-          <a:bodyPr wrap="square" lIns="0" tIns="0" rIns="0" bIns="0" rtlCol="0" anchor="ctr"/>
-          <a:lstStyle/>
-          <a:p>
-            <a:pPr algn="ctr" indent="0" marL="0">
+          <p:cNvPr id="6" name="Text 4"/>
+          <p:cNvSpPr/>
+          <p:nvPr/>
+        </p:nvSpPr>
+        <p:spPr>
+          <a:xfrm>
+            <a:off x="594360" y="1225296"/>
+            <a:ext cx="7863840" cy="402336"/>
+          </a:xfrm>
+          <a:prstGeom prst="rect">
+            <a:avLst/>
+          </a:prstGeom>
+          <a:noFill/>
+          <a:ln/>
+        </p:spPr>
+        <p:txBody>
+          <a:bodyPr wrap="square" lIns="0" tIns="0" rIns="0" bIns="0" rtlCol="0" anchor="ctr"/>
+          <a:lstStyle/>
+          <a:p>
+            <a:pPr indent="0" marL="0">
               <a:buNone/>
             </a:pPr>
             <a:r>
               <a:rPr lang="en-US" sz="1600" dirty="0">
                 <a:solidFill>
-                  <a:srgbClr val="0E1C42"/>
-                </a:solidFill>
-                <a:latin typeface="Calibri" pitchFamily="34" charset="0"/>
-                <a:ea typeface="Calibri" pitchFamily="34" charset="-122"/>
-                <a:cs typeface="Calibri" pitchFamily="34" charset="-120"/>
-              </a:rPr>
-              <a:t>mailbox     postcard     compass     landmark     bedroom     sunlight     raincoat     notebook</a:t>
+                  <a:srgbClr val="1E293B"/>
+                </a:solidFill>
+                <a:latin typeface="Calibri" pitchFamily="34" charset="0"/>
+                <a:ea typeface="Calibri" pitchFamily="34" charset="-122"/>
+                <a:cs typeface="Calibri" pitchFamily="34" charset="-120"/>
+              </a:rPr>
+              <a:t>The map showed the state of </a:t>
+            </a:r>
+            <a:pPr indent="0" marL="0">
+              <a:buNone/>
+            </a:pPr>
+            <a:r>
+              <a:rPr lang="en-US" sz="1600" b="1" dirty="0">
+                <a:solidFill>
+                  <a:srgbClr val="34B76F"/>
+                </a:solidFill>
+                <a:latin typeface="Calibri" pitchFamily="34" charset="0"/>
+                <a:ea typeface="Calibri" pitchFamily="34" charset="-122"/>
+                <a:cs typeface="Calibri" pitchFamily="34" charset="-120"/>
+              </a:rPr>
+              <a:t>Arizona</a:t>
+            </a:r>
+            <a:pPr indent="0" marL="0">
+              <a:buNone/>
+            </a:pPr>
+            <a:r>
+              <a:rPr lang="en-US" sz="1600" dirty="0">
+                <a:solidFill>
+                  <a:srgbClr val="1E293B"/>
+                </a:solidFill>
+                <a:latin typeface="Calibri" pitchFamily="34" charset="0"/>
+                <a:ea typeface="Calibri" pitchFamily="34" charset="-122"/>
+                <a:cs typeface="Calibri" pitchFamily="34" charset="-120"/>
+              </a:rPr>
+              <a:t> in red.</a:t>
             </a:r>
             <a:endParaRPr lang="en-US" sz="1600" dirty="0"/>
           </a:p>
@@ -3487,22 +3403,22 @@
       </p:sp>
       <p:sp>
         <p:nvSpPr>
-          <p:cNvPr id="9" name="Shape 7"/>
-          <p:cNvSpPr/>
-          <p:nvPr/>
-        </p:nvSpPr>
-        <p:spPr>
-          <a:xfrm>
-            <a:off x="457200" y="2468880"/>
-            <a:ext cx="7680960" cy="457200"/>
+          <p:cNvPr id="7" name="Shape 5"/>
+          <p:cNvSpPr/>
+          <p:nvPr/>
+        </p:nvSpPr>
+        <p:spPr>
+          <a:xfrm>
+            <a:off x="365760" y="1810512"/>
+            <a:ext cx="8412480" cy="658368"/>
           </a:xfrm>
           <a:prstGeom prst="roundRect">
             <a:avLst>
-              <a:gd name="adj" fmla="val 20000"/>
+              <a:gd name="adj" fmla="val 13889"/>
             </a:avLst>
           </a:prstGeom>
           <a:solidFill>
-            <a:srgbClr val="F0E8FF"/>
+            <a:srgbClr val="FFFFFF"/>
           </a:solidFill>
           <a:ln/>
           <a:effectLst>
@@ -3516,40 +3432,271 @@
       </p:sp>
       <p:sp>
         <p:nvSpPr>
+          <p:cNvPr id="8" name="Text 6"/>
+          <p:cNvSpPr/>
+          <p:nvPr/>
+        </p:nvSpPr>
+        <p:spPr>
+          <a:xfrm>
+            <a:off x="594360" y="1956816"/>
+            <a:ext cx="7863840" cy="402336"/>
+          </a:xfrm>
+          <a:prstGeom prst="rect">
+            <a:avLst/>
+          </a:prstGeom>
+          <a:noFill/>
+          <a:ln/>
+        </p:spPr>
+        <p:txBody>
+          <a:bodyPr wrap="square" lIns="0" tIns="0" rIns="0" bIns="0" rtlCol="0" anchor="ctr"/>
+          <a:lstStyle/>
+          <a:p>
+            <a:pPr indent="0" marL="0">
+              <a:buNone/>
+            </a:pPr>
+            <a:r>
+              <a:rPr lang="en-US" sz="1600" b="1" dirty="0">
+                <a:solidFill>
+                  <a:srgbClr val="34B76F"/>
+                </a:solidFill>
+                <a:latin typeface="Calibri" pitchFamily="34" charset="0"/>
+                <a:ea typeface="Calibri" pitchFamily="34" charset="-122"/>
+                <a:cs typeface="Calibri" pitchFamily="34" charset="-120"/>
+              </a:rPr>
+              <a:t>Every</a:t>
+            </a:r>
+            <a:pPr indent="0" marL="0">
+              <a:buNone/>
+            </a:pPr>
+            <a:r>
+              <a:rPr lang="en-US" sz="1600" dirty="0">
+                <a:solidFill>
+                  <a:srgbClr val="1E293B"/>
+                </a:solidFill>
+                <a:latin typeface="Calibri" pitchFamily="34" charset="0"/>
+                <a:ea typeface="Calibri" pitchFamily="34" charset="-122"/>
+                <a:cs typeface="Calibri" pitchFamily="34" charset="-120"/>
+              </a:rPr>
+              <a:t> country has a capital city.</a:t>
+            </a:r>
+            <a:endParaRPr lang="en-US" sz="1600" dirty="0"/>
+          </a:p>
+        </p:txBody>
+      </p:sp>
+      <p:sp>
+        <p:nvSpPr>
+          <p:cNvPr id="9" name="Shape 7"/>
+          <p:cNvSpPr/>
+          <p:nvPr/>
+        </p:nvSpPr>
+        <p:spPr>
+          <a:xfrm>
+            <a:off x="365760" y="2542032"/>
+            <a:ext cx="8412480" cy="658368"/>
+          </a:xfrm>
+          <a:prstGeom prst="roundRect">
+            <a:avLst>
+              <a:gd name="adj" fmla="val 13889"/>
+            </a:avLst>
+          </a:prstGeom>
+          <a:solidFill>
+            <a:srgbClr val="FEF6E8"/>
+          </a:solidFill>
+          <a:ln/>
+          <a:effectLst>
+            <a:outerShdw sx="100000" sy="100000" kx="0" ky="0" algn="bl" rotWithShape="0" blurRad="101600" dist="38100" dir="2700000">
+              <a:srgbClr val="000000">
+                <a:alpha val="12000"/>
+              </a:srgbClr>
+            </a:outerShdw>
+          </a:effectLst>
+        </p:spPr>
+      </p:sp>
+      <p:sp>
+        <p:nvSpPr>
           <p:cNvPr id="10" name="Text 8"/>
           <p:cNvSpPr/>
           <p:nvPr/>
         </p:nvSpPr>
         <p:spPr>
           <a:xfrm>
-            <a:off x="548640" y="2514600"/>
-            <a:ext cx="7498080" cy="365760"/>
-          </a:xfrm>
-          <a:prstGeom prst="rect">
-            <a:avLst/>
-          </a:prstGeom>
-          <a:noFill/>
-          <a:ln/>
-        </p:spPr>
-        <p:txBody>
-          <a:bodyPr wrap="square" lIns="0" tIns="0" rIns="0" bIns="0" rtlCol="0" anchor="ctr"/>
-          <a:lstStyle/>
-          <a:p>
-            <a:pPr algn="ctr" indent="0" marL="0">
-              <a:buNone/>
-            </a:pPr>
-            <a:r>
-              <a:rPr lang="en-US" sz="1400" b="1" dirty="0">
-                <a:solidFill>
-                  <a:srgbClr val="0E1C42"/>
-                </a:solidFill>
-                <a:latin typeface="Calibri" pitchFamily="34" charset="0"/>
-                <a:ea typeface="Calibri" pitchFamily="34" charset="-122"/>
-                <a:cs typeface="Calibri" pitchFamily="34" charset="-120"/>
-              </a:rPr>
-              <a:t>compound</a:t>
-            </a:r>
-            <a:endParaRPr lang="en-US" sz="1400" dirty="0"/>
+            <a:off x="594360" y="2688336"/>
+            <a:ext cx="7863840" cy="402336"/>
+          </a:xfrm>
+          <a:prstGeom prst="rect">
+            <a:avLst/>
+          </a:prstGeom>
+          <a:noFill/>
+          <a:ln/>
+        </p:spPr>
+        <p:txBody>
+          <a:bodyPr wrap="square" lIns="0" tIns="0" rIns="0" bIns="0" rtlCol="0" anchor="ctr"/>
+          <a:lstStyle/>
+          <a:p>
+            <a:pPr indent="0" marL="0">
+              <a:buNone/>
+            </a:pPr>
+            <a:r>
+              <a:rPr lang="en-US" sz="1600" dirty="0">
+                <a:solidFill>
+                  <a:srgbClr val="1E293B"/>
+                </a:solidFill>
+                <a:latin typeface="Calibri" pitchFamily="34" charset="0"/>
+                <a:ea typeface="Calibri" pitchFamily="34" charset="-122"/>
+                <a:cs typeface="Calibri" pitchFamily="34" charset="-120"/>
+              </a:rPr>
+              <a:t>We followed the river all the way to </a:t>
+            </a:r>
+            <a:pPr indent="0" marL="0">
+              <a:buNone/>
+            </a:pPr>
+            <a:r>
+              <a:rPr lang="en-US" sz="1600" b="1" dirty="0">
+                <a:solidFill>
+                  <a:srgbClr val="34B76F"/>
+                </a:solidFill>
+                <a:latin typeface="Calibri" pitchFamily="34" charset="0"/>
+                <a:ea typeface="Calibri" pitchFamily="34" charset="-122"/>
+                <a:cs typeface="Calibri" pitchFamily="34" charset="-120"/>
+              </a:rPr>
+              <a:t>Texas.</a:t>
+            </a:r>
+            <a:endParaRPr lang="en-US" sz="1600" dirty="0"/>
+          </a:p>
+        </p:txBody>
+      </p:sp>
+      <p:sp>
+        <p:nvSpPr>
+          <p:cNvPr id="11" name="Shape 9"/>
+          <p:cNvSpPr/>
+          <p:nvPr/>
+        </p:nvSpPr>
+        <p:spPr>
+          <a:xfrm>
+            <a:off x="365760" y="3273552"/>
+            <a:ext cx="8412480" cy="658368"/>
+          </a:xfrm>
+          <a:prstGeom prst="roundRect">
+            <a:avLst>
+              <a:gd name="adj" fmla="val 13889"/>
+            </a:avLst>
+          </a:prstGeom>
+          <a:solidFill>
+            <a:srgbClr val="FFFFFF"/>
+          </a:solidFill>
+          <a:ln/>
+          <a:effectLst>
+            <a:outerShdw sx="100000" sy="100000" kx="0" ky="0" algn="bl" rotWithShape="0" blurRad="101600" dist="38100" dir="2700000">
+              <a:srgbClr val="000000">
+                <a:alpha val="12000"/>
+              </a:srgbClr>
+            </a:outerShdw>
+          </a:effectLst>
+        </p:spPr>
+      </p:sp>
+      <p:sp>
+        <p:nvSpPr>
+          <p:cNvPr id="12" name="Text 10"/>
+          <p:cNvSpPr/>
+          <p:nvPr/>
+        </p:nvSpPr>
+        <p:spPr>
+          <a:xfrm>
+            <a:off x="594360" y="3419856"/>
+            <a:ext cx="7863840" cy="402336"/>
+          </a:xfrm>
+          <a:prstGeom prst="rect">
+            <a:avLst/>
+          </a:prstGeom>
+          <a:noFill/>
+          <a:ln/>
+        </p:spPr>
+        <p:txBody>
+          <a:bodyPr wrap="square" lIns="0" tIns="0" rIns="0" bIns="0" rtlCol="0" anchor="ctr"/>
+          <a:lstStyle/>
+          <a:p>
+            <a:pPr indent="0" marL="0">
+              <a:buNone/>
+            </a:pPr>
+            <a:r>
+              <a:rPr lang="en-US" sz="1600" dirty="0">
+                <a:solidFill>
+                  <a:srgbClr val="1E293B"/>
+                </a:solidFill>
+                <a:latin typeface="Calibri" pitchFamily="34" charset="0"/>
+                <a:ea typeface="Calibri" pitchFamily="34" charset="-122"/>
+                <a:cs typeface="Calibri" pitchFamily="34" charset="-120"/>
+              </a:rPr>
+              <a:t>The </a:t>
+            </a:r>
+            <a:pPr indent="0" marL="0">
+              <a:buNone/>
+            </a:pPr>
+            <a:r>
+              <a:rPr lang="en-US" sz="1600" b="1" dirty="0">
+                <a:solidFill>
+                  <a:srgbClr val="34B76F"/>
+                </a:solidFill>
+                <a:latin typeface="Calibri" pitchFamily="34" charset="0"/>
+                <a:ea typeface="Calibri" pitchFamily="34" charset="-122"/>
+                <a:cs typeface="Calibri" pitchFamily="34" charset="-120"/>
+              </a:rPr>
+              <a:t>Pacific</a:t>
+            </a:r>
+            <a:pPr indent="0" marL="0">
+              <a:buNone/>
+            </a:pPr>
+            <a:r>
+              <a:rPr lang="en-US" sz="1600" dirty="0">
+                <a:solidFill>
+                  <a:srgbClr val="1E293B"/>
+                </a:solidFill>
+                <a:latin typeface="Calibri" pitchFamily="34" charset="0"/>
+                <a:ea typeface="Calibri" pitchFamily="34" charset="-122"/>
+                <a:cs typeface="Calibri" pitchFamily="34" charset="-120"/>
+              </a:rPr>
+              <a:t> Ocean borders the western coast.</a:t>
+            </a:r>
+            <a:endParaRPr lang="en-US" sz="1600" dirty="0"/>
+          </a:p>
+        </p:txBody>
+      </p:sp>
+      <p:sp>
+        <p:nvSpPr>
+          <p:cNvPr id="13" name="Text 11"/>
+          <p:cNvSpPr/>
+          <p:nvPr/>
+        </p:nvSpPr>
+        <p:spPr>
+          <a:xfrm>
+            <a:off x="365760" y="4050792"/>
+            <a:ext cx="8412480" cy="365760"/>
+          </a:xfrm>
+          <a:prstGeom prst="rect">
+            <a:avLst/>
+          </a:prstGeom>
+          <a:noFill/>
+          <a:ln/>
+        </p:spPr>
+        <p:txBody>
+          <a:bodyPr wrap="square" lIns="0" tIns="0" rIns="0" bIns="0" rtlCol="0" anchor="ctr"/>
+          <a:lstStyle/>
+          <a:p>
+            <a:pPr indent="0" marL="0">
+              <a:buNone/>
+            </a:pPr>
+            <a:r>
+              <a:rPr lang="en-US" sz="1500" b="1" dirty="0">
+                <a:solidFill>
+                  <a:srgbClr val="34B76F"/>
+                </a:solidFill>
+                <a:latin typeface="Calibri" pitchFamily="34" charset="0"/>
+                <a:ea typeface="Calibri" pitchFamily="34" charset="-122"/>
+                <a:cs typeface="Calibri" pitchFamily="34" charset="-120"/>
+              </a:rPr>
+              <a:t>✅  Answers revealed</a:t>
+            </a:r>
+            <a:endParaRPr lang="en-US" sz="1500" dirty="0"/>
           </a:p>
         </p:txBody>
       </p:sp>
@@ -3567,7 +3714,7 @@
     <p:bg>
       <p:bgPr>
         <a:solidFill>
-          <a:srgbClr val="E5F7FC"/>
+          <a:srgbClr val="F8FAFC"/>
         </a:solidFill>
       </p:bgPr>
     </p:bg>
@@ -3587,30 +3734,89 @@
       </p:grpSpPr>
       <p:sp>
         <p:nvSpPr>
-          <p:cNvPr id="2" name="Text 0"/>
-          <p:cNvSpPr/>
-          <p:nvPr/>
-        </p:nvSpPr>
-        <p:spPr>
-          <a:xfrm>
-            <a:off x="365760" y="164592"/>
-            <a:ext cx="5943600" cy="566928"/>
-          </a:xfrm>
-          <a:prstGeom prst="rect">
-            <a:avLst/>
-          </a:prstGeom>
-          <a:noFill/>
-          <a:ln/>
-        </p:spPr>
-        <p:txBody>
-          <a:bodyPr wrap="square" lIns="0" tIns="0" rIns="0" bIns="0" rtlCol="0" anchor="ctr"/>
-          <a:lstStyle/>
-          <a:p>
-            <a:pPr algn="l" indent="0" marL="0">
-              <a:buNone/>
-            </a:pPr>
-            <a:r>
-              <a:rPr lang="en-US" sz="2800" b="1" dirty="0">
+          <p:cNvPr id="2" name="Shape 0"/>
+          <p:cNvSpPr/>
+          <p:nvPr/>
+        </p:nvSpPr>
+        <p:spPr>
+          <a:xfrm>
+            <a:off x="0" y="0"/>
+            <a:ext cx="9144000" cy="566928"/>
+          </a:xfrm>
+          <a:prstGeom prst="rect">
+            <a:avLst/>
+          </a:prstGeom>
+          <a:solidFill>
+            <a:srgbClr val="0E1C42"/>
+          </a:solidFill>
+          <a:ln/>
+        </p:spPr>
+      </p:sp>
+      <p:sp>
+        <p:nvSpPr>
+          <p:cNvPr id="3" name="Text 1"/>
+          <p:cNvSpPr/>
+          <p:nvPr/>
+        </p:nvSpPr>
+        <p:spPr>
+          <a:xfrm>
+            <a:off x="365760" y="54864"/>
+            <a:ext cx="8412480" cy="457200"/>
+          </a:xfrm>
+          <a:prstGeom prst="rect">
+            <a:avLst/>
+          </a:prstGeom>
+          <a:noFill/>
+          <a:ln/>
+        </p:spPr>
+        <p:txBody>
+          <a:bodyPr wrap="square" lIns="0" tIns="0" rIns="0" bIns="0" rtlCol="0" anchor="ctr"/>
+          <a:lstStyle/>
+          <a:p>
+            <a:pPr indent="0" marL="0">
+              <a:buNone/>
+            </a:pPr>
+            <a:r>
+              <a:rPr lang="en-US" sz="2200" b="1" dirty="0">
+                <a:solidFill>
+                  <a:srgbClr val="FFFFFF"/>
+                </a:solidFill>
+                <a:latin typeface="Calibri" pitchFamily="34" charset="0"/>
+                <a:ea typeface="Calibri" pitchFamily="34" charset="-122"/>
+                <a:cs typeface="Calibri" pitchFamily="34" charset="-120"/>
+              </a:rPr>
+              <a:t>🔠  Spelling</a:t>
+            </a:r>
+            <a:endParaRPr lang="en-US" sz="2200" dirty="0"/>
+          </a:p>
+        </p:txBody>
+      </p:sp>
+      <p:sp>
+        <p:nvSpPr>
+          <p:cNvPr id="4" name="Text 2"/>
+          <p:cNvSpPr/>
+          <p:nvPr/>
+        </p:nvSpPr>
+        <p:spPr>
+          <a:xfrm>
+            <a:off x="365760" y="777240"/>
+            <a:ext cx="8229600" cy="237744"/>
+          </a:xfrm>
+          <a:prstGeom prst="rect">
+            <a:avLst/>
+          </a:prstGeom>
+          <a:noFill/>
+          <a:ln/>
+        </p:spPr>
+        <p:txBody>
+          <a:bodyPr wrap="square" lIns="0" tIns="0" rIns="0" bIns="0" rtlCol="0" anchor="ctr"/>
+          <a:lstStyle/>
+          <a:p>
+            <a:pPr indent="0" marL="0">
+              <a:buNone/>
+            </a:pPr>
+            <a:r>
+              <a:rPr lang="en-US" sz="1100" b="1" spc="100" kern="0" dirty="0">
                 <a:solidFill>
                   <a:srgbClr val="0E1C42"/>
                 </a:solidFill>
@@ -3618,116 +3824,76 @@
                 <a:ea typeface="Calibri" pitchFamily="34" charset="-122"/>
                 <a:cs typeface="Calibri" pitchFamily="34" charset="-120"/>
               </a:rPr>
-              <a:t>🔠 Spelling: Compound words — Sorted</a:t>
-            </a:r>
-            <a:endParaRPr lang="en-US" sz="2800" dirty="0"/>
-          </a:p>
-        </p:txBody>
-      </p:sp>
-      <p:sp>
-        <p:nvSpPr>
-          <p:cNvPr id="3" name="Shape 1"/>
-          <p:cNvSpPr/>
-          <p:nvPr/>
-        </p:nvSpPr>
-        <p:spPr>
-          <a:xfrm>
-            <a:off x="365760" y="749808"/>
-            <a:ext cx="8412480" cy="0"/>
-          </a:xfrm>
-          <a:prstGeom prst="line">
-            <a:avLst/>
-          </a:prstGeom>
-          <a:noFill/>
+              <a:t>COMPOUND WORDS</a:t>
+            </a:r>
+            <a:endParaRPr lang="en-US" sz="1100" dirty="0"/>
+          </a:p>
+        </p:txBody>
+      </p:sp>
+      <p:sp>
+        <p:nvSpPr>
+          <p:cNvPr id="5" name="Text 3"/>
+          <p:cNvSpPr/>
+          <p:nvPr/>
+        </p:nvSpPr>
+        <p:spPr>
+          <a:xfrm>
+            <a:off x="365760" y="1078992"/>
+            <a:ext cx="8229600" cy="237744"/>
+          </a:xfrm>
+          <a:prstGeom prst="rect">
+            <a:avLst/>
+          </a:prstGeom>
+          <a:noFill/>
+          <a:ln/>
+        </p:spPr>
+        <p:txBody>
+          <a:bodyPr wrap="square" lIns="0" tIns="0" rIns="0" bIns="0" rtlCol="0" anchor="ctr"/>
+          <a:lstStyle/>
+          <a:p>
+            <a:pPr indent="0" marL="0">
+              <a:buNone/>
+            </a:pPr>
+            <a:r>
+              <a:rPr lang="en-US" sz="1100" b="1" spc="100" kern="0" dirty="0">
+                <a:solidFill>
+                  <a:srgbClr val="64748B"/>
+                </a:solidFill>
+                <a:latin typeface="Calibri" pitchFamily="34" charset="0"/>
+                <a:ea typeface="Calibri" pitchFamily="34" charset="-122"/>
+                <a:cs typeface="Calibri" pitchFamily="34" charset="-120"/>
+              </a:rPr>
+              <a:t>WORD BANK</a:t>
+            </a:r>
+            <a:endParaRPr lang="en-US" sz="1100" dirty="0"/>
+          </a:p>
+        </p:txBody>
+      </p:sp>
+      <p:sp>
+        <p:nvSpPr>
+          <p:cNvPr id="6" name="Shape 4"/>
+          <p:cNvSpPr/>
+          <p:nvPr/>
+        </p:nvSpPr>
+        <p:spPr>
+          <a:xfrm>
+            <a:off x="365760" y="1353312"/>
+            <a:ext cx="8412480" cy="1005840"/>
+          </a:xfrm>
+          <a:prstGeom prst="roundRect">
+            <a:avLst>
+              <a:gd name="adj" fmla="val 9091"/>
+            </a:avLst>
+          </a:prstGeom>
+          <a:solidFill>
+            <a:srgbClr val="FFFFFF"/>
+          </a:solidFill>
           <a:ln w="19050">
             <a:solidFill>
-              <a:srgbClr val="5CB85C"/>
+              <a:srgbClr val="0E1C42"/>
             </a:solidFill>
             <a:prstDash val="solid"/>
           </a:ln>
-        </p:spPr>
-      </p:sp>
-      <p:sp>
-        <p:nvSpPr>
-          <p:cNvPr id="4" name="Shape 2"/>
-          <p:cNvSpPr/>
-          <p:nvPr/>
-        </p:nvSpPr>
-        <p:spPr>
-          <a:xfrm>
-            <a:off x="6492240" y="173736"/>
-            <a:ext cx="2286000" cy="502920"/>
-          </a:xfrm>
-          <a:prstGeom prst="roundRect">
-            <a:avLst>
-              <a:gd name="adj" fmla="val 21818"/>
-            </a:avLst>
-          </a:prstGeom>
-          <a:solidFill>
-            <a:srgbClr val="5CB85C"/>
-          </a:solidFill>
-          <a:ln/>
-        </p:spPr>
-      </p:sp>
-      <p:sp>
-        <p:nvSpPr>
-          <p:cNvPr id="5" name="Text 3"/>
-          <p:cNvSpPr/>
-          <p:nvPr/>
-        </p:nvSpPr>
-        <p:spPr>
-          <a:xfrm>
-            <a:off x="6492240" y="173736"/>
-            <a:ext cx="2286000" cy="502920"/>
-          </a:xfrm>
-          <a:prstGeom prst="rect">
-            <a:avLst/>
-          </a:prstGeom>
-          <a:noFill/>
-          <a:ln/>
-        </p:spPr>
-        <p:txBody>
-          <a:bodyPr wrap="square" lIns="0" tIns="0" rIns="0" bIns="0" rtlCol="0" anchor="ctr"/>
-          <a:lstStyle/>
-          <a:p>
-            <a:pPr algn="ctr" indent="0" marL="0">
-              <a:buNone/>
-            </a:pPr>
-            <a:r>
-              <a:rPr lang="en-US" sz="1100" b="1" dirty="0">
-                <a:solidFill>
-                  <a:srgbClr val="0E1C42"/>
-                </a:solidFill>
-                <a:latin typeface="Calibri" pitchFamily="34" charset="0"/>
-                <a:ea typeface="Calibri" pitchFamily="34" charset="-122"/>
-                <a:cs typeface="Calibri" pitchFamily="34" charset="-120"/>
-              </a:rPr>
-              <a:t>CHAT PROMPT</a:t>
-            </a:r>
-            <a:endParaRPr lang="en-US" sz="1100" dirty="0"/>
-          </a:p>
-        </p:txBody>
-      </p:sp>
-      <p:sp>
-        <p:nvSpPr>
-          <p:cNvPr id="6" name="Shape 4"/>
-          <p:cNvSpPr/>
-          <p:nvPr/>
-        </p:nvSpPr>
-        <p:spPr>
-          <a:xfrm>
-            <a:off x="457200" y="1005840"/>
-            <a:ext cx="7680960" cy="457200"/>
-          </a:xfrm>
-          <a:prstGeom prst="roundRect">
-            <a:avLst>
-              <a:gd name="adj" fmla="val 20000"/>
-            </a:avLst>
-          </a:prstGeom>
-          <a:solidFill>
-            <a:srgbClr val="F0E8FF"/>
-          </a:solidFill>
-          <a:ln/>
           <a:effectLst>
             <a:outerShdw sx="100000" sy="100000" kx="0" ky="0" algn="bl" rotWithShape="0" blurRad="101600" dist="38100" dir="2700000">
               <a:srgbClr val="000000">
@@ -3745,24 +3911,24 @@
         </p:nvSpPr>
         <p:spPr>
           <a:xfrm>
-            <a:off x="548640" y="1051560"/>
-            <a:ext cx="7498080" cy="365760"/>
-          </a:xfrm>
-          <a:prstGeom prst="rect">
-            <a:avLst/>
-          </a:prstGeom>
-          <a:noFill/>
-          <a:ln/>
-        </p:spPr>
-        <p:txBody>
-          <a:bodyPr wrap="square" lIns="0" tIns="0" rIns="0" bIns="0" rtlCol="0" anchor="ctr"/>
-          <a:lstStyle/>
-          <a:p>
-            <a:pPr algn="ctr" indent="0" marL="0">
-              <a:buNone/>
-            </a:pPr>
-            <a:r>
-              <a:rPr lang="en-US" sz="1400" b="1" dirty="0">
+            <a:off x="594360" y="1481328"/>
+            <a:ext cx="7955280" cy="749808"/>
+          </a:xfrm>
+          <a:prstGeom prst="rect">
+            <a:avLst/>
+          </a:prstGeom>
+          <a:noFill/>
+          <a:ln/>
+        </p:spPr>
+        <p:txBody>
+          <a:bodyPr wrap="square" lIns="0" tIns="0" rIns="0" bIns="0" rtlCol="0" anchor="ctr"/>
+          <a:lstStyle/>
+          <a:p>
+            <a:pPr indent="0" marL="0">
+              <a:buNone/>
+            </a:pPr>
+            <a:r>
+              <a:rPr lang="en-US" sz="1700" dirty="0">
                 <a:solidFill>
                   <a:srgbClr val="0E1C42"/>
                 </a:solidFill>
@@ -3770,9 +3936,9 @@
                 <a:ea typeface="Calibri" pitchFamily="34" charset="-122"/>
                 <a:cs typeface="Calibri" pitchFamily="34" charset="-120"/>
               </a:rPr>
-              <a:t>compound</a:t>
-            </a:r>
-            <a:endParaRPr lang="en-US" sz="1400" dirty="0"/>
+              <a:t>mailbox   ·   postcard   ·   landmark   ·   notebook   ·   compass   ·   envelope   ·   journey   ·   letter</a:t>
+            </a:r>
+            <a:endParaRPr lang="en-US" sz="1700" dirty="0"/>
           </a:p>
         </p:txBody>
       </p:sp>
@@ -3784,307 +3950,34 @@
         </p:nvSpPr>
         <p:spPr>
           <a:xfrm>
-            <a:off x="548640" y="1554480"/>
-            <a:ext cx="7498080" cy="320040"/>
-          </a:xfrm>
-          <a:prstGeom prst="rect">
-            <a:avLst/>
-          </a:prstGeom>
-          <a:noFill/>
-          <a:ln/>
-        </p:spPr>
-        <p:txBody>
-          <a:bodyPr wrap="square" lIns="0" tIns="0" rIns="0" bIns="0" rtlCol="0" anchor="ctr"/>
-          <a:lstStyle/>
-          <a:p>
-            <a:pPr algn="ctr" indent="0" marL="0">
-              <a:buNone/>
-            </a:pPr>
-            <a:r>
-              <a:rPr lang="en-US" sz="1400" b="1" dirty="0">
-                <a:solidFill>
-                  <a:srgbClr val="34B76F"/>
-                </a:solidFill>
-                <a:latin typeface="Calibri" pitchFamily="34" charset="0"/>
-                <a:ea typeface="Calibri" pitchFamily="34" charset="-122"/>
-                <a:cs typeface="Calibri" pitchFamily="34" charset="-120"/>
-              </a:rPr>
-              <a:t>mailbox</a:t>
-            </a:r>
-            <a:endParaRPr lang="en-US" sz="1400" dirty="0"/>
-          </a:p>
-        </p:txBody>
-      </p:sp>
-      <p:sp>
-        <p:nvSpPr>
-          <p:cNvPr id="9" name="Text 7"/>
-          <p:cNvSpPr/>
-          <p:nvPr/>
-        </p:nvSpPr>
-        <p:spPr>
-          <a:xfrm>
-            <a:off x="548640" y="1901952"/>
-            <a:ext cx="7498080" cy="320040"/>
-          </a:xfrm>
-          <a:prstGeom prst="rect">
-            <a:avLst/>
-          </a:prstGeom>
-          <a:noFill/>
-          <a:ln/>
-        </p:spPr>
-        <p:txBody>
-          <a:bodyPr wrap="square" lIns="0" tIns="0" rIns="0" bIns="0" rtlCol="0" anchor="ctr"/>
-          <a:lstStyle/>
-          <a:p>
-            <a:pPr algn="ctr" indent="0" marL="0">
-              <a:buNone/>
-            </a:pPr>
-            <a:r>
-              <a:rPr lang="en-US" sz="1400" b="1" dirty="0">
-                <a:solidFill>
-                  <a:srgbClr val="34B76F"/>
-                </a:solidFill>
-                <a:latin typeface="Calibri" pitchFamily="34" charset="0"/>
-                <a:ea typeface="Calibri" pitchFamily="34" charset="-122"/>
-                <a:cs typeface="Calibri" pitchFamily="34" charset="-120"/>
-              </a:rPr>
-              <a:t>postcard</a:t>
-            </a:r>
-            <a:endParaRPr lang="en-US" sz="1400" dirty="0"/>
-          </a:p>
-        </p:txBody>
-      </p:sp>
-      <p:sp>
-        <p:nvSpPr>
-          <p:cNvPr id="10" name="Text 8"/>
-          <p:cNvSpPr/>
-          <p:nvPr/>
-        </p:nvSpPr>
-        <p:spPr>
-          <a:xfrm>
-            <a:off x="548640" y="2249424"/>
-            <a:ext cx="7498080" cy="320040"/>
-          </a:xfrm>
-          <a:prstGeom prst="rect">
-            <a:avLst/>
-          </a:prstGeom>
-          <a:noFill/>
-          <a:ln/>
-        </p:spPr>
-        <p:txBody>
-          <a:bodyPr wrap="square" lIns="0" tIns="0" rIns="0" bIns="0" rtlCol="0" anchor="ctr"/>
-          <a:lstStyle/>
-          <a:p>
-            <a:pPr algn="ctr" indent="0" marL="0">
-              <a:buNone/>
-            </a:pPr>
-            <a:r>
-              <a:rPr lang="en-US" sz="1400" b="1" dirty="0">
-                <a:solidFill>
-                  <a:srgbClr val="34B76F"/>
-                </a:solidFill>
-                <a:latin typeface="Calibri" pitchFamily="34" charset="0"/>
-                <a:ea typeface="Calibri" pitchFamily="34" charset="-122"/>
-                <a:cs typeface="Calibri" pitchFamily="34" charset="-120"/>
-              </a:rPr>
-              <a:t>compass</a:t>
-            </a:r>
-            <a:endParaRPr lang="en-US" sz="1400" dirty="0"/>
-          </a:p>
-        </p:txBody>
-      </p:sp>
-      <p:sp>
-        <p:nvSpPr>
-          <p:cNvPr id="11" name="Text 9"/>
-          <p:cNvSpPr/>
-          <p:nvPr/>
-        </p:nvSpPr>
-        <p:spPr>
-          <a:xfrm>
-            <a:off x="548640" y="2596896"/>
-            <a:ext cx="7498080" cy="320040"/>
-          </a:xfrm>
-          <a:prstGeom prst="rect">
-            <a:avLst/>
-          </a:prstGeom>
-          <a:noFill/>
-          <a:ln/>
-        </p:spPr>
-        <p:txBody>
-          <a:bodyPr wrap="square" lIns="0" tIns="0" rIns="0" bIns="0" rtlCol="0" anchor="ctr"/>
-          <a:lstStyle/>
-          <a:p>
-            <a:pPr algn="ctr" indent="0" marL="0">
-              <a:buNone/>
-            </a:pPr>
-            <a:r>
-              <a:rPr lang="en-US" sz="1400" b="1" dirty="0">
-                <a:solidFill>
-                  <a:srgbClr val="34B76F"/>
-                </a:solidFill>
-                <a:latin typeface="Calibri" pitchFamily="34" charset="0"/>
-                <a:ea typeface="Calibri" pitchFamily="34" charset="-122"/>
-                <a:cs typeface="Calibri" pitchFamily="34" charset="-120"/>
-              </a:rPr>
-              <a:t>landmark</a:t>
-            </a:r>
-            <a:endParaRPr lang="en-US" sz="1400" dirty="0"/>
-          </a:p>
-        </p:txBody>
-      </p:sp>
-      <p:sp>
-        <p:nvSpPr>
-          <p:cNvPr id="12" name="Text 10"/>
-          <p:cNvSpPr/>
-          <p:nvPr/>
-        </p:nvSpPr>
-        <p:spPr>
-          <a:xfrm>
-            <a:off x="548640" y="2944368"/>
-            <a:ext cx="7498080" cy="320040"/>
-          </a:xfrm>
-          <a:prstGeom prst="rect">
-            <a:avLst/>
-          </a:prstGeom>
-          <a:noFill/>
-          <a:ln/>
-        </p:spPr>
-        <p:txBody>
-          <a:bodyPr wrap="square" lIns="0" tIns="0" rIns="0" bIns="0" rtlCol="0" anchor="ctr"/>
-          <a:lstStyle/>
-          <a:p>
-            <a:pPr algn="ctr" indent="0" marL="0">
-              <a:buNone/>
-            </a:pPr>
-            <a:r>
-              <a:rPr lang="en-US" sz="1400" b="1" dirty="0">
-                <a:solidFill>
-                  <a:srgbClr val="34B76F"/>
-                </a:solidFill>
-                <a:latin typeface="Calibri" pitchFamily="34" charset="0"/>
-                <a:ea typeface="Calibri" pitchFamily="34" charset="-122"/>
-                <a:cs typeface="Calibri" pitchFamily="34" charset="-120"/>
-              </a:rPr>
-              <a:t>bedroom</a:t>
-            </a:r>
-            <a:endParaRPr lang="en-US" sz="1400" dirty="0"/>
-          </a:p>
-        </p:txBody>
-      </p:sp>
-      <p:sp>
-        <p:nvSpPr>
-          <p:cNvPr id="13" name="Text 11"/>
-          <p:cNvSpPr/>
-          <p:nvPr/>
-        </p:nvSpPr>
-        <p:spPr>
-          <a:xfrm>
-            <a:off x="548640" y="3291840"/>
-            <a:ext cx="7498080" cy="320040"/>
-          </a:xfrm>
-          <a:prstGeom prst="rect">
-            <a:avLst/>
-          </a:prstGeom>
-          <a:noFill/>
-          <a:ln/>
-        </p:spPr>
-        <p:txBody>
-          <a:bodyPr wrap="square" lIns="0" tIns="0" rIns="0" bIns="0" rtlCol="0" anchor="ctr"/>
-          <a:lstStyle/>
-          <a:p>
-            <a:pPr algn="ctr" indent="0" marL="0">
-              <a:buNone/>
-            </a:pPr>
-            <a:r>
-              <a:rPr lang="en-US" sz="1400" b="1" dirty="0">
-                <a:solidFill>
-                  <a:srgbClr val="34B76F"/>
-                </a:solidFill>
-                <a:latin typeface="Calibri" pitchFamily="34" charset="0"/>
-                <a:ea typeface="Calibri" pitchFamily="34" charset="-122"/>
-                <a:cs typeface="Calibri" pitchFamily="34" charset="-120"/>
-              </a:rPr>
-              <a:t>sunlight</a:t>
-            </a:r>
-            <a:endParaRPr lang="en-US" sz="1400" dirty="0"/>
-          </a:p>
-        </p:txBody>
-      </p:sp>
-      <p:sp>
-        <p:nvSpPr>
-          <p:cNvPr id="14" name="Text 12"/>
-          <p:cNvSpPr/>
-          <p:nvPr/>
-        </p:nvSpPr>
-        <p:spPr>
-          <a:xfrm>
-            <a:off x="548640" y="3639312"/>
-            <a:ext cx="7498080" cy="320040"/>
-          </a:xfrm>
-          <a:prstGeom prst="rect">
-            <a:avLst/>
-          </a:prstGeom>
-          <a:noFill/>
-          <a:ln/>
-        </p:spPr>
-        <p:txBody>
-          <a:bodyPr wrap="square" lIns="0" tIns="0" rIns="0" bIns="0" rtlCol="0" anchor="ctr"/>
-          <a:lstStyle/>
-          <a:p>
-            <a:pPr algn="ctr" indent="0" marL="0">
-              <a:buNone/>
-            </a:pPr>
-            <a:r>
-              <a:rPr lang="en-US" sz="1400" b="1" dirty="0">
-                <a:solidFill>
-                  <a:srgbClr val="34B76F"/>
-                </a:solidFill>
-                <a:latin typeface="Calibri" pitchFamily="34" charset="0"/>
-                <a:ea typeface="Calibri" pitchFamily="34" charset="-122"/>
-                <a:cs typeface="Calibri" pitchFamily="34" charset="-120"/>
-              </a:rPr>
-              <a:t>raincoat</a:t>
-            </a:r>
-            <a:endParaRPr lang="en-US" sz="1400" dirty="0"/>
-          </a:p>
-        </p:txBody>
-      </p:sp>
-      <p:sp>
-        <p:nvSpPr>
-          <p:cNvPr id="15" name="Text 13"/>
-          <p:cNvSpPr/>
-          <p:nvPr/>
-        </p:nvSpPr>
-        <p:spPr>
-          <a:xfrm>
-            <a:off x="548640" y="3986784"/>
-            <a:ext cx="7498080" cy="320040"/>
-          </a:xfrm>
-          <a:prstGeom prst="rect">
-            <a:avLst/>
-          </a:prstGeom>
-          <a:noFill/>
-          <a:ln/>
-        </p:spPr>
-        <p:txBody>
-          <a:bodyPr wrap="square" lIns="0" tIns="0" rIns="0" bIns="0" rtlCol="0" anchor="ctr"/>
-          <a:lstStyle/>
-          <a:p>
-            <a:pPr algn="ctr" indent="0" marL="0">
-              <a:buNone/>
-            </a:pPr>
-            <a:r>
-              <a:rPr lang="en-US" sz="1400" b="1" dirty="0">
-                <a:solidFill>
-                  <a:srgbClr val="34B76F"/>
-                </a:solidFill>
-                <a:latin typeface="Calibri" pitchFamily="34" charset="0"/>
-                <a:ea typeface="Calibri" pitchFamily="34" charset="-122"/>
-                <a:cs typeface="Calibri" pitchFamily="34" charset="-120"/>
-              </a:rPr>
-              <a:t>notebook</a:t>
-            </a:r>
-            <a:endParaRPr lang="en-US" sz="1400" dirty="0"/>
+            <a:off x="365760" y="2514600"/>
+            <a:ext cx="8412480" cy="457200"/>
+          </a:xfrm>
+          <a:prstGeom prst="rect">
+            <a:avLst/>
+          </a:prstGeom>
+          <a:noFill/>
+          <a:ln/>
+        </p:spPr>
+        <p:txBody>
+          <a:bodyPr wrap="square" lIns="0" tIns="0" rIns="0" bIns="0" rtlCol="0" anchor="ctr"/>
+          <a:lstStyle/>
+          <a:p>
+            <a:pPr indent="0" marL="0">
+              <a:buNone/>
+            </a:pPr>
+            <a:r>
+              <a:rPr lang="en-US" sz="1500" i="1" dirty="0">
+                <a:solidFill>
+                  <a:srgbClr val="64748B"/>
+                </a:solidFill>
+                <a:latin typeface="Calibri" pitchFamily="34" charset="0"/>
+                <a:ea typeface="Calibri" pitchFamily="34" charset="-122"/>
+                <a:cs typeface="Calibri" pitchFamily="34" charset="-120"/>
+              </a:rPr>
+              <a:t>Which column does each word belong in?  Columns: Compound word  |  Not a compound word</a:t>
+            </a:r>
+            <a:endParaRPr lang="en-US" sz="1500" dirty="0"/>
           </a:p>
         </p:txBody>
       </p:sp>
@@ -4102,7 +3995,7 @@
     <p:bg>
       <p:bgPr>
         <a:solidFill>
-          <a:srgbClr val="FFFFFF"/>
+          <a:srgbClr val="F8FAFC"/>
         </a:solidFill>
       </p:bgPr>
     </p:bg>
@@ -4122,30 +4015,89 @@
       </p:grpSpPr>
       <p:sp>
         <p:nvSpPr>
-          <p:cNvPr id="2" name="Text 0"/>
-          <p:cNvSpPr/>
-          <p:nvPr/>
-        </p:nvSpPr>
-        <p:spPr>
-          <a:xfrm>
-            <a:off x="365760" y="164592"/>
-            <a:ext cx="8412480" cy="566928"/>
-          </a:xfrm>
-          <a:prstGeom prst="rect">
-            <a:avLst/>
-          </a:prstGeom>
-          <a:noFill/>
-          <a:ln/>
-        </p:spPr>
-        <p:txBody>
-          <a:bodyPr wrap="square" lIns="0" tIns="0" rIns="0" bIns="0" rtlCol="0" anchor="ctr"/>
-          <a:lstStyle/>
-          <a:p>
-            <a:pPr algn="l" indent="0" marL="0">
-              <a:buNone/>
-            </a:pPr>
-            <a:r>
-              <a:rPr lang="en-US" sz="2800" b="1" dirty="0">
+          <p:cNvPr id="2" name="Shape 0"/>
+          <p:cNvSpPr/>
+          <p:nvPr/>
+        </p:nvSpPr>
+        <p:spPr>
+          <a:xfrm>
+            <a:off x="0" y="0"/>
+            <a:ext cx="9144000" cy="566928"/>
+          </a:xfrm>
+          <a:prstGeom prst="rect">
+            <a:avLst/>
+          </a:prstGeom>
+          <a:solidFill>
+            <a:srgbClr val="0E1C42"/>
+          </a:solidFill>
+          <a:ln/>
+        </p:spPr>
+      </p:sp>
+      <p:sp>
+        <p:nvSpPr>
+          <p:cNvPr id="3" name="Text 1"/>
+          <p:cNvSpPr/>
+          <p:nvPr/>
+        </p:nvSpPr>
+        <p:spPr>
+          <a:xfrm>
+            <a:off x="365760" y="54864"/>
+            <a:ext cx="8412480" cy="457200"/>
+          </a:xfrm>
+          <a:prstGeom prst="rect">
+            <a:avLst/>
+          </a:prstGeom>
+          <a:noFill/>
+          <a:ln/>
+        </p:spPr>
+        <p:txBody>
+          <a:bodyPr wrap="square" lIns="0" tIns="0" rIns="0" bIns="0" rtlCol="0" anchor="ctr"/>
+          <a:lstStyle/>
+          <a:p>
+            <a:pPr indent="0" marL="0">
+              <a:buNone/>
+            </a:pPr>
+            <a:r>
+              <a:rPr lang="en-US" sz="2200" b="1" dirty="0">
+                <a:solidFill>
+                  <a:srgbClr val="FFFFFF"/>
+                </a:solidFill>
+                <a:latin typeface="Calibri" pitchFamily="34" charset="0"/>
+                <a:ea typeface="Calibri" pitchFamily="34" charset="-122"/>
+                <a:cs typeface="Calibri" pitchFamily="34" charset="-120"/>
+              </a:rPr>
+              <a:t>🔠  Spelling</a:t>
+            </a:r>
+            <a:endParaRPr lang="en-US" sz="2200" dirty="0"/>
+          </a:p>
+        </p:txBody>
+      </p:sp>
+      <p:sp>
+        <p:nvSpPr>
+          <p:cNvPr id="4" name="Text 2"/>
+          <p:cNvSpPr/>
+          <p:nvPr/>
+        </p:nvSpPr>
+        <p:spPr>
+          <a:xfrm>
+            <a:off x="365760" y="777240"/>
+            <a:ext cx="8229600" cy="237744"/>
+          </a:xfrm>
+          <a:prstGeom prst="rect">
+            <a:avLst/>
+          </a:prstGeom>
+          <a:noFill/>
+          <a:ln/>
+        </p:spPr>
+        <p:txBody>
+          <a:bodyPr wrap="square" lIns="0" tIns="0" rIns="0" bIns="0" rtlCol="0" anchor="ctr"/>
+          <a:lstStyle/>
+          <a:p>
+            <a:pPr indent="0" marL="0">
+              <a:buNone/>
+            </a:pPr>
+            <a:r>
+              <a:rPr lang="en-US" sz="1100" b="1" spc="100" kern="0" dirty="0">
                 <a:solidFill>
                   <a:srgbClr val="0E1C42"/>
                 </a:solidFill>
@@ -4153,69 +4105,7 @@
                 <a:ea typeface="Calibri" pitchFamily="34" charset="-122"/>
                 <a:cs typeface="Calibri" pitchFamily="34" charset="-120"/>
               </a:rPr>
-              <a:t>📕 Reading Focus</a:t>
-            </a:r>
-            <a:endParaRPr lang="en-US" sz="2800" dirty="0"/>
-          </a:p>
-        </p:txBody>
-      </p:sp>
-      <p:sp>
-        <p:nvSpPr>
-          <p:cNvPr id="3" name="Shape 1"/>
-          <p:cNvSpPr/>
-          <p:nvPr/>
-        </p:nvSpPr>
-        <p:spPr>
-          <a:xfrm>
-            <a:off x="365760" y="749808"/>
-            <a:ext cx="8412480" cy="0"/>
-          </a:xfrm>
-          <a:prstGeom prst="line">
-            <a:avLst/>
-          </a:prstGeom>
-          <a:noFill/>
-          <a:ln w="19050">
-            <a:solidFill>
-              <a:srgbClr val="55C8E8"/>
-            </a:solidFill>
-            <a:prstDash val="solid"/>
-          </a:ln>
-        </p:spPr>
-      </p:sp>
-      <p:sp>
-        <p:nvSpPr>
-          <p:cNvPr id="4" name="Text 2"/>
-          <p:cNvSpPr/>
-          <p:nvPr/>
-        </p:nvSpPr>
-        <p:spPr>
-          <a:xfrm>
-            <a:off x="457200" y="1005840"/>
-            <a:ext cx="8046720" cy="292608"/>
-          </a:xfrm>
-          <a:prstGeom prst="rect">
-            <a:avLst/>
-          </a:prstGeom>
-          <a:noFill/>
-          <a:ln/>
-        </p:spPr>
-        <p:txBody>
-          <a:bodyPr wrap="square" lIns="0" tIns="0" rIns="0" bIns="0" rtlCol="0" anchor="ctr"/>
-          <a:lstStyle/>
-          <a:p>
-            <a:pPr indent="0" marL="0">
-              <a:buNone/>
-            </a:pPr>
-            <a:r>
-              <a:rPr lang="en-US" sz="1100" b="1" spc="200" kern="0" dirty="0">
-                <a:solidFill>
-                  <a:srgbClr val="55C8E8"/>
-                </a:solidFill>
-                <a:latin typeface="Calibri" pitchFamily="34" charset="0"/>
-                <a:ea typeface="Calibri" pitchFamily="34" charset="-122"/>
-                <a:cs typeface="Calibri" pitchFamily="34" charset="-120"/>
-              </a:rPr>
-              <a:t>PAUSE &amp; THINK</a:t>
+              <a:t>COMPOUND WORDS</a:t>
             </a:r>
             <a:endParaRPr lang="en-US" sz="1100" dirty="0"/>
           </a:p>
@@ -4223,107 +4113,85 @@
       </p:sp>
       <p:sp>
         <p:nvSpPr>
-          <p:cNvPr id="5" name="Text 3"/>
-          <p:cNvSpPr/>
-          <p:nvPr/>
-        </p:nvSpPr>
-        <p:spPr>
-          <a:xfrm>
-            <a:off x="640080" y="1325880"/>
-            <a:ext cx="7863840" cy="548640"/>
-          </a:xfrm>
-          <a:prstGeom prst="rect">
-            <a:avLst/>
-          </a:prstGeom>
-          <a:noFill/>
-          <a:ln/>
-        </p:spPr>
-        <p:txBody>
-          <a:bodyPr wrap="square" lIns="0" tIns="0" rIns="0" bIns="0" rtlCol="0" anchor="ctr"/>
-          <a:lstStyle/>
-          <a:p>
-            <a:pPr indent="0" marL="0">
-              <a:buNone/>
-            </a:pPr>
-            <a:r>
-              <a:rPr lang="en-US" sz="1400" i="1" dirty="0">
-                <a:solidFill>
-                  <a:srgbClr val="1E293B"/>
-                </a:solidFill>
-                <a:latin typeface="Calibri" pitchFamily="34" charset="0"/>
-                <a:ea typeface="Calibri" pitchFamily="34" charset="-122"/>
-                <a:cs typeface="Calibri" pitchFamily="34" charset="-120"/>
-              </a:rPr>
-              <a:t>The text says all maps have four things: a title, compass rose, scale, and key. Which of these do you think is most important? Why?</a:t>
-            </a:r>
-            <a:endParaRPr lang="en-US" sz="1400" dirty="0"/>
-          </a:p>
-        </p:txBody>
-      </p:sp>
-      <p:sp>
-        <p:nvSpPr>
-          <p:cNvPr id="6" name="Text 4"/>
-          <p:cNvSpPr/>
-          <p:nvPr/>
-        </p:nvSpPr>
-        <p:spPr>
-          <a:xfrm>
-            <a:off x="457200" y="1965960"/>
-            <a:ext cx="8046720" cy="292608"/>
-          </a:xfrm>
-          <a:prstGeom prst="rect">
-            <a:avLst/>
-          </a:prstGeom>
-          <a:noFill/>
-          <a:ln/>
-        </p:spPr>
-        <p:txBody>
-          <a:bodyPr wrap="square" lIns="0" tIns="0" rIns="0" bIns="0" rtlCol="0" anchor="ctr"/>
-          <a:lstStyle/>
-          <a:p>
-            <a:pPr indent="0" marL="0">
-              <a:buNone/>
-            </a:pPr>
-            <a:r>
-              <a:rPr lang="en-US" sz="1100" b="1" spc="200" kern="0" dirty="0">
-                <a:solidFill>
-                  <a:srgbClr val="C7922C"/>
-                </a:solidFill>
-                <a:latin typeface="Calibri" pitchFamily="34" charset="0"/>
-                <a:ea typeface="Calibri" pitchFamily="34" charset="-122"/>
-                <a:cs typeface="Calibri" pitchFamily="34" charset="-120"/>
-              </a:rPr>
-              <a:t>COPYWORK</a:t>
-            </a:r>
-            <a:endParaRPr lang="en-US" sz="1100" dirty="0"/>
-          </a:p>
-        </p:txBody>
-      </p:sp>
-      <p:sp>
-        <p:nvSpPr>
-          <p:cNvPr id="7" name="Shape 5"/>
-          <p:cNvSpPr/>
-          <p:nvPr/>
-        </p:nvSpPr>
-        <p:spPr>
-          <a:xfrm>
-            <a:off x="457200" y="2286000"/>
-            <a:ext cx="8229600" cy="731520"/>
+          <p:cNvPr id="5" name="Shape 3"/>
+          <p:cNvSpPr/>
+          <p:nvPr/>
+        </p:nvSpPr>
+        <p:spPr>
+          <a:xfrm>
+            <a:off x="411480" y="1078992"/>
+            <a:ext cx="4114800" cy="457200"/>
           </a:xfrm>
           <a:prstGeom prst="roundRect">
             <a:avLst>
-              <a:gd name="adj" fmla="val 12500"/>
+              <a:gd name="adj" fmla="val 16000"/>
             </a:avLst>
           </a:prstGeom>
           <a:solidFill>
-            <a:srgbClr val="FEF6E8"/>
+            <a:srgbClr val="0E1C42"/>
           </a:solidFill>
-          <a:ln w="12700">
-            <a:solidFill>
-              <a:srgbClr val="C7922C"/>
-            </a:solidFill>
-            <a:prstDash val="solid"/>
-          </a:ln>
+          <a:ln/>
+        </p:spPr>
+      </p:sp>
+      <p:sp>
+        <p:nvSpPr>
+          <p:cNvPr id="6" name="Text 4"/>
+          <p:cNvSpPr/>
+          <p:nvPr/>
+        </p:nvSpPr>
+        <p:spPr>
+          <a:xfrm>
+            <a:off x="457200" y="1133856"/>
+            <a:ext cx="4023360" cy="347472"/>
+          </a:xfrm>
+          <a:prstGeom prst="rect">
+            <a:avLst/>
+          </a:prstGeom>
+          <a:noFill/>
+          <a:ln/>
+        </p:spPr>
+        <p:txBody>
+          <a:bodyPr wrap="square" lIns="0" tIns="0" rIns="0" bIns="0" rtlCol="0" anchor="ctr"/>
+          <a:lstStyle/>
+          <a:p>
+            <a:pPr algn="ctr" indent="0" marL="0">
+              <a:buNone/>
+            </a:pPr>
+            <a:r>
+              <a:rPr lang="en-US" sz="1300" b="1" dirty="0">
+                <a:solidFill>
+                  <a:srgbClr val="FFFFFF"/>
+                </a:solidFill>
+                <a:latin typeface="Calibri" pitchFamily="34" charset="0"/>
+                <a:ea typeface="Calibri" pitchFamily="34" charset="-122"/>
+                <a:cs typeface="Calibri" pitchFamily="34" charset="-120"/>
+              </a:rPr>
+              <a:t>Compound word</a:t>
+            </a:r>
+            <a:endParaRPr lang="en-US" sz="1300" dirty="0"/>
+          </a:p>
+        </p:txBody>
+      </p:sp>
+      <p:sp>
+        <p:nvSpPr>
+          <p:cNvPr id="7" name="Shape 5"/>
+          <p:cNvSpPr/>
+          <p:nvPr/>
+        </p:nvSpPr>
+        <p:spPr>
+          <a:xfrm>
+            <a:off x="411480" y="1591056"/>
+            <a:ext cx="4114800" cy="2103120"/>
+          </a:xfrm>
+          <a:prstGeom prst="roundRect">
+            <a:avLst>
+              <a:gd name="adj" fmla="val 4348"/>
+            </a:avLst>
+          </a:prstGeom>
+          <a:solidFill>
+            <a:srgbClr val="FFFFFF"/>
+          </a:solidFill>
+          <a:ln/>
           <a:effectLst>
             <a:outerShdw sx="100000" sy="100000" kx="0" ky="0" algn="bl" rotWithShape="0" blurRad="101600" dist="38100" dir="2700000">
               <a:srgbClr val="000000">
@@ -4341,24 +4209,24 @@
         </p:nvSpPr>
         <p:spPr>
           <a:xfrm>
-            <a:off x="640080" y="2395728"/>
-            <a:ext cx="7863840" cy="502920"/>
-          </a:xfrm>
-          <a:prstGeom prst="rect">
-            <a:avLst/>
-          </a:prstGeom>
-          <a:noFill/>
-          <a:ln/>
-        </p:spPr>
-        <p:txBody>
-          <a:bodyPr wrap="square" lIns="0" tIns="0" rIns="0" bIns="0" rtlCol="0" anchor="ctr"/>
-          <a:lstStyle/>
-          <a:p>
-            <a:pPr indent="0" marL="0">
-              <a:buNone/>
-            </a:pPr>
-            <a:r>
-              <a:rPr lang="en-US" sz="1800" i="1" dirty="0">
+            <a:off x="502920" y="1700784"/>
+            <a:ext cx="3931920" cy="1883664"/>
+          </a:xfrm>
+          <a:prstGeom prst="rect">
+            <a:avLst/>
+          </a:prstGeom>
+          <a:noFill/>
+          <a:ln/>
+        </p:spPr>
+        <p:txBody>
+          <a:bodyPr wrap="square" lIns="0" tIns="0" rIns="0" bIns="0" rtlCol="0" anchor="ctr"/>
+          <a:lstStyle/>
+          <a:p>
+            <a:pPr algn="ctr" indent="0" marL="0">
+              <a:buNone/>
+            </a:pPr>
+            <a:r>
+              <a:rPr lang="en-US" sz="1400" dirty="0">
                 <a:solidFill>
                   <a:srgbClr val="1E293B"/>
                 </a:solidFill>
@@ -4366,9 +4234,240 @@
                 <a:ea typeface="Calibri" pitchFamily="34" charset="-122"/>
                 <a:cs typeface="Calibri" pitchFamily="34" charset="-120"/>
               </a:rPr>
-              <a:t>Maps help people find where they are, where they want to go, and how far away things are.</a:t>
-            </a:r>
-            <a:endParaRPr lang="en-US" sz="1800" dirty="0"/>
+              <a:t>mailbox</a:t>
+            </a:r>
+            <a:endParaRPr lang="en-US" sz="1400" dirty="0"/>
+          </a:p>
+          <a:p>
+            <a:pPr algn="ctr" indent="0" marL="0">
+              <a:buNone/>
+            </a:pPr>
+            <a:r>
+              <a:rPr lang="en-US" sz="1400" dirty="0">
+                <a:solidFill>
+                  <a:srgbClr val="1E293B"/>
+                </a:solidFill>
+                <a:latin typeface="Calibri" pitchFamily="34" charset="0"/>
+                <a:ea typeface="Calibri" pitchFamily="34" charset="-122"/>
+                <a:cs typeface="Calibri" pitchFamily="34" charset="-120"/>
+              </a:rPr>
+              <a:t>postcard</a:t>
+            </a:r>
+            <a:endParaRPr lang="en-US" sz="1400" dirty="0"/>
+          </a:p>
+          <a:p>
+            <a:pPr algn="ctr" indent="0" marL="0">
+              <a:buNone/>
+            </a:pPr>
+            <a:r>
+              <a:rPr lang="en-US" sz="1400" dirty="0">
+                <a:solidFill>
+                  <a:srgbClr val="1E293B"/>
+                </a:solidFill>
+                <a:latin typeface="Calibri" pitchFamily="34" charset="0"/>
+                <a:ea typeface="Calibri" pitchFamily="34" charset="-122"/>
+                <a:cs typeface="Calibri" pitchFamily="34" charset="-120"/>
+              </a:rPr>
+              <a:t>landmark</a:t>
+            </a:r>
+            <a:endParaRPr lang="en-US" sz="1400" dirty="0"/>
+          </a:p>
+          <a:p>
+            <a:pPr algn="ctr" indent="0" marL="0">
+              <a:buNone/>
+            </a:pPr>
+            <a:r>
+              <a:rPr lang="en-US" sz="1400" dirty="0">
+                <a:solidFill>
+                  <a:srgbClr val="1E293B"/>
+                </a:solidFill>
+                <a:latin typeface="Calibri" pitchFamily="34" charset="0"/>
+                <a:ea typeface="Calibri" pitchFamily="34" charset="-122"/>
+                <a:cs typeface="Calibri" pitchFamily="34" charset="-120"/>
+              </a:rPr>
+              <a:t>notebook</a:t>
+            </a:r>
+            <a:endParaRPr lang="en-US" sz="1400" dirty="0"/>
+          </a:p>
+        </p:txBody>
+      </p:sp>
+      <p:sp>
+        <p:nvSpPr>
+          <p:cNvPr id="9" name="Shape 7"/>
+          <p:cNvSpPr/>
+          <p:nvPr/>
+        </p:nvSpPr>
+        <p:spPr>
+          <a:xfrm>
+            <a:off x="4617720" y="1078992"/>
+            <a:ext cx="4114800" cy="457200"/>
+          </a:xfrm>
+          <a:prstGeom prst="roundRect">
+            <a:avLst>
+              <a:gd name="adj" fmla="val 16000"/>
+            </a:avLst>
+          </a:prstGeom>
+          <a:solidFill>
+            <a:srgbClr val="0E1C42"/>
+          </a:solidFill>
+          <a:ln/>
+        </p:spPr>
+      </p:sp>
+      <p:sp>
+        <p:nvSpPr>
+          <p:cNvPr id="10" name="Text 8"/>
+          <p:cNvSpPr/>
+          <p:nvPr/>
+        </p:nvSpPr>
+        <p:spPr>
+          <a:xfrm>
+            <a:off x="4663440" y="1133856"/>
+            <a:ext cx="4023360" cy="347472"/>
+          </a:xfrm>
+          <a:prstGeom prst="rect">
+            <a:avLst/>
+          </a:prstGeom>
+          <a:noFill/>
+          <a:ln/>
+        </p:spPr>
+        <p:txBody>
+          <a:bodyPr wrap="square" lIns="0" tIns="0" rIns="0" bIns="0" rtlCol="0" anchor="ctr"/>
+          <a:lstStyle/>
+          <a:p>
+            <a:pPr algn="ctr" indent="0" marL="0">
+              <a:buNone/>
+            </a:pPr>
+            <a:r>
+              <a:rPr lang="en-US" sz="1300" b="1" dirty="0">
+                <a:solidFill>
+                  <a:srgbClr val="FFFFFF"/>
+                </a:solidFill>
+                <a:latin typeface="Calibri" pitchFamily="34" charset="0"/>
+                <a:ea typeface="Calibri" pitchFamily="34" charset="-122"/>
+                <a:cs typeface="Calibri" pitchFamily="34" charset="-120"/>
+              </a:rPr>
+              <a:t>Not a compound word</a:t>
+            </a:r>
+            <a:endParaRPr lang="en-US" sz="1300" dirty="0"/>
+          </a:p>
+        </p:txBody>
+      </p:sp>
+      <p:sp>
+        <p:nvSpPr>
+          <p:cNvPr id="11" name="Shape 9"/>
+          <p:cNvSpPr/>
+          <p:nvPr/>
+        </p:nvSpPr>
+        <p:spPr>
+          <a:xfrm>
+            <a:off x="4617720" y="1591056"/>
+            <a:ext cx="4114800" cy="2103120"/>
+          </a:xfrm>
+          <a:prstGeom prst="roundRect">
+            <a:avLst>
+              <a:gd name="adj" fmla="val 4348"/>
+            </a:avLst>
+          </a:prstGeom>
+          <a:solidFill>
+            <a:srgbClr val="FFFFFF"/>
+          </a:solidFill>
+          <a:ln/>
+          <a:effectLst>
+            <a:outerShdw sx="100000" sy="100000" kx="0" ky="0" algn="bl" rotWithShape="0" blurRad="101600" dist="38100" dir="2700000">
+              <a:srgbClr val="000000">
+                <a:alpha val="12000"/>
+              </a:srgbClr>
+            </a:outerShdw>
+          </a:effectLst>
+        </p:spPr>
+      </p:sp>
+      <p:sp>
+        <p:nvSpPr>
+          <p:cNvPr id="12" name="Text 10"/>
+          <p:cNvSpPr/>
+          <p:nvPr/>
+        </p:nvSpPr>
+        <p:spPr>
+          <a:xfrm>
+            <a:off x="4709160" y="1700784"/>
+            <a:ext cx="3931920" cy="1883664"/>
+          </a:xfrm>
+          <a:prstGeom prst="rect">
+            <a:avLst/>
+          </a:prstGeom>
+          <a:noFill/>
+          <a:ln/>
+        </p:spPr>
+        <p:txBody>
+          <a:bodyPr wrap="square" lIns="0" tIns="0" rIns="0" bIns="0" rtlCol="0" anchor="ctr"/>
+          <a:lstStyle/>
+          <a:p>
+            <a:pPr algn="ctr" indent="0" marL="0">
+              <a:buNone/>
+            </a:pPr>
+            <a:r>
+              <a:rPr lang="en-US" sz="1400" dirty="0">
+                <a:solidFill>
+                  <a:srgbClr val="1E293B"/>
+                </a:solidFill>
+                <a:latin typeface="Calibri" pitchFamily="34" charset="0"/>
+                <a:ea typeface="Calibri" pitchFamily="34" charset="-122"/>
+                <a:cs typeface="Calibri" pitchFamily="34" charset="-120"/>
+              </a:rPr>
+              <a:t>compass</a:t>
+            </a:r>
+            <a:endParaRPr lang="en-US" sz="1400" dirty="0"/>
+          </a:p>
+          <a:p>
+            <a:pPr algn="ctr" indent="0" marL="0">
+              <a:buNone/>
+            </a:pPr>
+            <a:r>
+              <a:rPr lang="en-US" sz="1400" dirty="0">
+                <a:solidFill>
+                  <a:srgbClr val="1E293B"/>
+                </a:solidFill>
+                <a:latin typeface="Calibri" pitchFamily="34" charset="0"/>
+                <a:ea typeface="Calibri" pitchFamily="34" charset="-122"/>
+                <a:cs typeface="Calibri" pitchFamily="34" charset="-120"/>
+              </a:rPr>
+              <a:t>envelope</a:t>
+            </a:r>
+            <a:endParaRPr lang="en-US" sz="1400" dirty="0"/>
+          </a:p>
+          <a:p>
+            <a:pPr algn="ctr" indent="0" marL="0">
+              <a:buNone/>
+            </a:pPr>
+            <a:r>
+              <a:rPr lang="en-US" sz="1400" dirty="0">
+                <a:solidFill>
+                  <a:srgbClr val="1E293B"/>
+                </a:solidFill>
+                <a:latin typeface="Calibri" pitchFamily="34" charset="0"/>
+                <a:ea typeface="Calibri" pitchFamily="34" charset="-122"/>
+                <a:cs typeface="Calibri" pitchFamily="34" charset="-120"/>
+              </a:rPr>
+              <a:t>journey</a:t>
+            </a:r>
+            <a:endParaRPr lang="en-US" sz="1400" dirty="0"/>
+          </a:p>
+          <a:p>
+            <a:pPr algn="ctr" indent="0" marL="0">
+              <a:buNone/>
+            </a:pPr>
+            <a:r>
+              <a:rPr lang="en-US" sz="1400" dirty="0">
+                <a:solidFill>
+                  <a:srgbClr val="1E293B"/>
+                </a:solidFill>
+                <a:latin typeface="Calibri" pitchFamily="34" charset="0"/>
+                <a:ea typeface="Calibri" pitchFamily="34" charset="-122"/>
+                <a:cs typeface="Calibri" pitchFamily="34" charset="-120"/>
+              </a:rPr>
+              <a:t>letter</a:t>
+            </a:r>
+            <a:endParaRPr lang="en-US" sz="1400" dirty="0"/>
           </a:p>
         </p:txBody>
       </p:sp>
@@ -4406,30 +4505,89 @@
       </p:grpSpPr>
       <p:sp>
         <p:nvSpPr>
-          <p:cNvPr id="2" name="Text 0"/>
-          <p:cNvSpPr/>
-          <p:nvPr/>
-        </p:nvSpPr>
-        <p:spPr>
-          <a:xfrm>
-            <a:off x="365760" y="164592"/>
-            <a:ext cx="8412480" cy="566928"/>
-          </a:xfrm>
-          <a:prstGeom prst="rect">
-            <a:avLst/>
-          </a:prstGeom>
-          <a:noFill/>
-          <a:ln/>
-        </p:spPr>
-        <p:txBody>
-          <a:bodyPr wrap="square" lIns="0" tIns="0" rIns="0" bIns="0" rtlCol="0" anchor="ctr"/>
-          <a:lstStyle/>
-          <a:p>
-            <a:pPr algn="l" indent="0" marL="0">
-              <a:buNone/>
-            </a:pPr>
-            <a:r>
-              <a:rPr lang="en-US" sz="2800" b="1" dirty="0">
+          <p:cNvPr id="2" name="Shape 0"/>
+          <p:cNvSpPr/>
+          <p:nvPr/>
+        </p:nvSpPr>
+        <p:spPr>
+          <a:xfrm>
+            <a:off x="0" y="0"/>
+            <a:ext cx="9144000" cy="566928"/>
+          </a:xfrm>
+          <a:prstGeom prst="rect">
+            <a:avLst/>
+          </a:prstGeom>
+          <a:solidFill>
+            <a:srgbClr val="5CB85C"/>
+          </a:solidFill>
+          <a:ln/>
+        </p:spPr>
+      </p:sp>
+      <p:sp>
+        <p:nvSpPr>
+          <p:cNvPr id="3" name="Text 1"/>
+          <p:cNvSpPr/>
+          <p:nvPr/>
+        </p:nvSpPr>
+        <p:spPr>
+          <a:xfrm>
+            <a:off x="365760" y="54864"/>
+            <a:ext cx="8412480" cy="457200"/>
+          </a:xfrm>
+          <a:prstGeom prst="rect">
+            <a:avLst/>
+          </a:prstGeom>
+          <a:noFill/>
+          <a:ln/>
+        </p:spPr>
+        <p:txBody>
+          <a:bodyPr wrap="square" lIns="0" tIns="0" rIns="0" bIns="0" rtlCol="0" anchor="ctr"/>
+          <a:lstStyle/>
+          <a:p>
+            <a:pPr indent="0" marL="0">
+              <a:buNone/>
+            </a:pPr>
+            <a:r>
+              <a:rPr lang="en-US" sz="2200" b="1" dirty="0">
+                <a:solidFill>
+                  <a:srgbClr val="FFFFFF"/>
+                </a:solidFill>
+                <a:latin typeface="Calibri" pitchFamily="34" charset="0"/>
+                <a:ea typeface="Calibri" pitchFamily="34" charset="-122"/>
+                <a:cs typeface="Calibri" pitchFamily="34" charset="-120"/>
+              </a:rPr>
+              <a:t>📕  Read</a:t>
+            </a:r>
+            <a:endParaRPr lang="en-US" sz="2200" dirty="0"/>
+          </a:p>
+        </p:txBody>
+      </p:sp>
+      <p:sp>
+        <p:nvSpPr>
+          <p:cNvPr id="4" name="Text 2"/>
+          <p:cNvSpPr/>
+          <p:nvPr/>
+        </p:nvSpPr>
+        <p:spPr>
+          <a:xfrm>
+            <a:off x="365760" y="868680"/>
+            <a:ext cx="8412480" cy="502920"/>
+          </a:xfrm>
+          <a:prstGeom prst="rect">
+            <a:avLst/>
+          </a:prstGeom>
+          <a:noFill/>
+          <a:ln/>
+        </p:spPr>
+        <p:txBody>
+          <a:bodyPr wrap="square" lIns="0" tIns="0" rIns="0" bIns="0" rtlCol="0" anchor="ctr"/>
+          <a:lstStyle/>
+          <a:p>
+            <a:pPr indent="0" marL="0">
+              <a:buNone/>
+            </a:pPr>
+            <a:r>
+              <a:rPr lang="en-US" sz="2600" b="1" dirty="0">
                 <a:solidFill>
                   <a:srgbClr val="0E1C42"/>
                 </a:solidFill>
@@ -4437,61 +4595,111 @@
                 <a:ea typeface="Calibri" pitchFamily="34" charset="-122"/>
                 <a:cs typeface="Calibri" pitchFamily="34" charset="-120"/>
               </a:rPr>
-              <a:t>🪶 Writing Connection</a:t>
-            </a:r>
-            <a:endParaRPr lang="en-US" sz="2800" dirty="0"/>
-          </a:p>
-        </p:txBody>
-      </p:sp>
-      <p:sp>
-        <p:nvSpPr>
-          <p:cNvPr id="3" name="Shape 1"/>
-          <p:cNvSpPr/>
-          <p:nvPr/>
-        </p:nvSpPr>
-        <p:spPr>
-          <a:xfrm>
-            <a:off x="365760" y="749808"/>
-            <a:ext cx="8412480" cy="0"/>
-          </a:xfrm>
-          <a:prstGeom prst="line">
-            <a:avLst/>
-          </a:prstGeom>
-          <a:noFill/>
+              <a:t>📰 Read: What Is a Map?</a:t>
+            </a:r>
+            <a:endParaRPr lang="en-US" sz="2600" dirty="0"/>
+          </a:p>
+        </p:txBody>
+      </p:sp>
+      <p:sp>
+        <p:nvSpPr>
+          <p:cNvPr id="5" name="Text 3"/>
+          <p:cNvSpPr/>
+          <p:nvPr/>
+        </p:nvSpPr>
+        <p:spPr>
+          <a:xfrm>
+            <a:off x="365760" y="1463040"/>
+            <a:ext cx="8229600" cy="237744"/>
+          </a:xfrm>
+          <a:prstGeom prst="rect">
+            <a:avLst/>
+          </a:prstGeom>
+          <a:noFill/>
+          <a:ln/>
+        </p:spPr>
+        <p:txBody>
+          <a:bodyPr wrap="square" lIns="0" tIns="0" rIns="0" bIns="0" rtlCol="0" anchor="ctr"/>
+          <a:lstStyle/>
+          <a:p>
+            <a:pPr indent="0" marL="0">
+              <a:buNone/>
+            </a:pPr>
+            <a:r>
+              <a:rPr lang="en-US" sz="1100" b="1" spc="100" kern="0" dirty="0">
+                <a:solidFill>
+                  <a:srgbClr val="8B6FC0"/>
+                </a:solidFill>
+                <a:latin typeface="Calibri" pitchFamily="34" charset="0"/>
+                <a:ea typeface="Calibri" pitchFamily="34" charset="-122"/>
+                <a:cs typeface="Calibri" pitchFamily="34" charset="-120"/>
+              </a:rPr>
+              <a:t>COPYWORK — FROM THE NOVEL</a:t>
+            </a:r>
+            <a:endParaRPr lang="en-US" sz="1100" dirty="0"/>
+          </a:p>
+        </p:txBody>
+      </p:sp>
+      <p:sp>
+        <p:nvSpPr>
+          <p:cNvPr id="6" name="Shape 4"/>
+          <p:cNvSpPr/>
+          <p:nvPr/>
+        </p:nvSpPr>
+        <p:spPr>
+          <a:xfrm>
+            <a:off x="365760" y="1719072"/>
+            <a:ext cx="8412480" cy="1143000"/>
+          </a:xfrm>
+          <a:prstGeom prst="roundRect">
+            <a:avLst>
+              <a:gd name="adj" fmla="val 8000"/>
+            </a:avLst>
+          </a:prstGeom>
+          <a:solidFill>
+            <a:srgbClr val="F0E8FF"/>
+          </a:solidFill>
           <a:ln w="19050">
             <a:solidFill>
-              <a:srgbClr val="34B76F"/>
+              <a:srgbClr val="8B6FC0"/>
             </a:solidFill>
             <a:prstDash val="solid"/>
           </a:ln>
-        </p:spPr>
-      </p:sp>
-      <p:sp>
-        <p:nvSpPr>
-          <p:cNvPr id="4" name="Text 2"/>
-          <p:cNvSpPr/>
-          <p:nvPr/>
-        </p:nvSpPr>
-        <p:spPr>
-          <a:xfrm>
-            <a:off x="640080" y="1371600"/>
-            <a:ext cx="7863840" cy="457200"/>
-          </a:xfrm>
-          <a:prstGeom prst="rect">
-            <a:avLst/>
-          </a:prstGeom>
-          <a:noFill/>
-          <a:ln/>
-        </p:spPr>
-        <p:txBody>
-          <a:bodyPr wrap="square" lIns="0" tIns="0" rIns="0" bIns="0" rtlCol="0" anchor="ctr"/>
-          <a:lstStyle/>
-          <a:p>
-            <a:pPr indent="0" marL="0">
-              <a:buNone/>
-            </a:pPr>
-            <a:r>
-              <a:rPr lang="en-US" sz="1600" dirty="0">
+          <a:effectLst>
+            <a:outerShdw sx="100000" sy="100000" kx="0" ky="0" algn="bl" rotWithShape="0" blurRad="101600" dist="38100" dir="2700000">
+              <a:srgbClr val="000000">
+                <a:alpha val="12000"/>
+              </a:srgbClr>
+            </a:outerShdw>
+          </a:effectLst>
+        </p:spPr>
+      </p:sp>
+      <p:sp>
+        <p:nvSpPr>
+          <p:cNvPr id="7" name="Text 5"/>
+          <p:cNvSpPr/>
+          <p:nvPr/>
+        </p:nvSpPr>
+        <p:spPr>
+          <a:xfrm>
+            <a:off x="594360" y="1847088"/>
+            <a:ext cx="7955280" cy="886968"/>
+          </a:xfrm>
+          <a:prstGeom prst="rect">
+            <a:avLst/>
+          </a:prstGeom>
+          <a:noFill/>
+          <a:ln/>
+        </p:spPr>
+        <p:txBody>
+          <a:bodyPr wrap="square" lIns="0" tIns="0" rIns="0" bIns="0" rtlCol="0" anchor="ctr"/>
+          <a:lstStyle/>
+          <a:p>
+            <a:pPr indent="0" marL="0">
+              <a:buNone/>
+            </a:pPr>
+            <a:r>
+              <a:rPr lang="en-US" sz="1700" dirty="0">
                 <a:solidFill>
                   <a:srgbClr val="1E293B"/>
                 </a:solidFill>
@@ -4499,48 +4707,104 @@
                 <a:ea typeface="Calibri" pitchFamily="34" charset="-122"/>
                 <a:cs typeface="Calibri" pitchFamily="34" charset="-120"/>
               </a:rPr>
-              <a:t>Open your writing assignment in Canvas.</a:t>
-            </a:r>
-            <a:endParaRPr lang="en-US" sz="1600" dirty="0"/>
-          </a:p>
-        </p:txBody>
-      </p:sp>
-      <p:sp>
-        <p:nvSpPr>
-          <p:cNvPr id="5" name="Text 3"/>
-          <p:cNvSpPr/>
-          <p:nvPr/>
-        </p:nvSpPr>
-        <p:spPr>
-          <a:xfrm>
-            <a:off x="640080" y="2011680"/>
-            <a:ext cx="7863840" cy="457200"/>
-          </a:xfrm>
-          <a:prstGeom prst="rect">
-            <a:avLst/>
-          </a:prstGeom>
-          <a:noFill/>
-          <a:ln/>
-        </p:spPr>
-        <p:txBody>
-          <a:bodyPr wrap="square" lIns="0" tIns="0" rIns="0" bIns="0" rtlCol="0" anchor="ctr"/>
-          <a:lstStyle/>
-          <a:p>
-            <a:pPr indent="0" marL="0">
-              <a:buNone/>
-            </a:pPr>
-            <a:r>
-              <a:rPr lang="en-US" sz="1400" dirty="0">
-                <a:solidFill>
-                  <a:srgbClr val="64748B"/>
-                </a:solidFill>
-                <a:latin typeface="Calibri" pitchFamily="34" charset="0"/>
-                <a:ea typeface="Calibri" pitchFamily="34" charset="-122"/>
-                <a:cs typeface="Calibri" pitchFamily="34" charset="-120"/>
-              </a:rPr>
-              <a:t>Follow the writing prompt for today's workshop.</a:t>
-            </a:r>
-            <a:endParaRPr lang="en-US" sz="1400" dirty="0"/>
+              <a:t>“Maps help people find where they are, where they want to go, and how far away things are.”</a:t>
+            </a:r>
+            <a:endParaRPr lang="en-US" sz="1700" dirty="0"/>
+          </a:p>
+        </p:txBody>
+      </p:sp>
+      <p:sp>
+        <p:nvSpPr>
+          <p:cNvPr id="8" name="Text 6"/>
+          <p:cNvSpPr/>
+          <p:nvPr/>
+        </p:nvSpPr>
+        <p:spPr>
+          <a:xfrm>
+            <a:off x="365760" y="3017520"/>
+            <a:ext cx="8229600" cy="237744"/>
+          </a:xfrm>
+          <a:prstGeom prst="rect">
+            <a:avLst/>
+          </a:prstGeom>
+          <a:noFill/>
+          <a:ln/>
+        </p:spPr>
+        <p:txBody>
+          <a:bodyPr wrap="square" lIns="0" tIns="0" rIns="0" bIns="0" rtlCol="0" anchor="ctr"/>
+          <a:lstStyle/>
+          <a:p>
+            <a:pPr indent="0" marL="0">
+              <a:buNone/>
+            </a:pPr>
+            <a:r>
+              <a:rPr lang="en-US" sz="1100" b="1" spc="100" kern="0" dirty="0">
+                <a:solidFill>
+                  <a:srgbClr val="C7922C"/>
+                </a:solidFill>
+                <a:latin typeface="Calibri" pitchFamily="34" charset="0"/>
+                <a:ea typeface="Calibri" pitchFamily="34" charset="-122"/>
+                <a:cs typeface="Calibri" pitchFamily="34" charset="-120"/>
+              </a:rPr>
+              <a:t>PAUSE &amp; THINK</a:t>
+            </a:r>
+            <a:endParaRPr lang="en-US" sz="1100" dirty="0"/>
+          </a:p>
+        </p:txBody>
+      </p:sp>
+      <p:sp>
+        <p:nvSpPr>
+          <p:cNvPr id="9" name="Text 7"/>
+          <p:cNvSpPr/>
+          <p:nvPr/>
+        </p:nvSpPr>
+        <p:spPr>
+          <a:xfrm>
+            <a:off x="365760" y="3273552"/>
+            <a:ext cx="8412480" cy="914400"/>
+          </a:xfrm>
+          <a:prstGeom prst="rect">
+            <a:avLst/>
+          </a:prstGeom>
+          <a:noFill/>
+          <a:ln/>
+        </p:spPr>
+        <p:txBody>
+          <a:bodyPr wrap="square" lIns="0" tIns="0" rIns="0" bIns="0" rtlCol="0" anchor="ctr"/>
+          <a:lstStyle/>
+          <a:p>
+            <a:pPr indent="0" marL="0">
+              <a:buNone/>
+            </a:pPr>
+            <a:r>
+              <a:rPr lang="en-US" sz="1500" dirty="0">
+                <a:solidFill>
+                  <a:srgbClr val="1E293B"/>
+                </a:solidFill>
+                <a:latin typeface="Calibri" pitchFamily="34" charset="0"/>
+                <a:ea typeface="Calibri" pitchFamily="34" charset="-122"/>
+                <a:cs typeface="Calibri" pitchFamily="34" charset="-120"/>
+              </a:rPr>
+              <a:t>•  How do maps help people find their way and understand the world around them?</a:t>
+            </a:r>
+            <a:endParaRPr lang="en-US" sz="1500" dirty="0"/>
+          </a:p>
+          <a:p>
+            <a:pPr indent="0" marL="0">
+              <a:buNone/>
+            </a:pPr>
+            <a:r>
+              <a:rPr lang="en-US" sz="1500" dirty="0">
+                <a:solidFill>
+                  <a:srgbClr val="1E293B"/>
+                </a:solidFill>
+                <a:latin typeface="Calibri" pitchFamily="34" charset="0"/>
+                <a:ea typeface="Calibri" pitchFamily="34" charset="-122"/>
+                <a:cs typeface="Calibri" pitchFamily="34" charset="-120"/>
+              </a:rPr>
+              <a:t>•  The text says all maps have four things: a title, compass rose, scale, and key. Which of these do you think is most important? Why?</a:t>
+            </a:r>
+            <a:endParaRPr lang="en-US" sz="1500" dirty="0"/>
           </a:p>
         </p:txBody>
       </p:sp>
@@ -4578,65 +4842,62 @@
       </p:grpSpPr>
       <p:sp>
         <p:nvSpPr>
-          <p:cNvPr id="2" name="Text 0"/>
-          <p:cNvSpPr/>
-          <p:nvPr/>
-        </p:nvSpPr>
-        <p:spPr>
-          <a:xfrm>
-            <a:off x="365760" y="164592"/>
-            <a:ext cx="8412480" cy="566928"/>
-          </a:xfrm>
-          <a:prstGeom prst="rect">
-            <a:avLst/>
-          </a:prstGeom>
-          <a:noFill/>
-          <a:ln/>
-        </p:spPr>
-        <p:txBody>
-          <a:bodyPr wrap="square" lIns="0" tIns="0" rIns="0" bIns="0" rtlCol="0" anchor="ctr"/>
-          <a:lstStyle/>
-          <a:p>
-            <a:pPr algn="l" indent="0" marL="0">
-              <a:buNone/>
-            </a:pPr>
-            <a:r>
-              <a:rPr lang="en-US" sz="2800" b="1" dirty="0">
-                <a:solidFill>
-                  <a:srgbClr val="0E1C42"/>
-                </a:solidFill>
-                <a:latin typeface="Calibri" pitchFamily="34" charset="0"/>
-                <a:ea typeface="Calibri" pitchFamily="34" charset="-122"/>
-                <a:cs typeface="Calibri" pitchFamily="34" charset="-120"/>
-              </a:rPr>
-              <a:t>✏️ 10-Minute Write</a:t>
-            </a:r>
-            <a:endParaRPr lang="en-US" sz="2800" dirty="0"/>
-          </a:p>
-        </p:txBody>
-      </p:sp>
-      <p:sp>
-        <p:nvSpPr>
-          <p:cNvPr id="3" name="Shape 1"/>
-          <p:cNvSpPr/>
-          <p:nvPr/>
-        </p:nvSpPr>
-        <p:spPr>
-          <a:xfrm>
-            <a:off x="365760" y="749808"/>
-            <a:ext cx="8412480" cy="0"/>
-          </a:xfrm>
-          <a:prstGeom prst="line">
-            <a:avLst/>
-          </a:prstGeom>
-          <a:noFill/>
-          <a:ln w="19050">
-            <a:solidFill>
-              <a:srgbClr val="C7922C"/>
-            </a:solidFill>
-            <a:prstDash val="solid"/>
-          </a:ln>
-        </p:spPr>
+          <p:cNvPr id="2" name="Shape 0"/>
+          <p:cNvSpPr/>
+          <p:nvPr/>
+        </p:nvSpPr>
+        <p:spPr>
+          <a:xfrm>
+            <a:off x="0" y="0"/>
+            <a:ext cx="9144000" cy="566928"/>
+          </a:xfrm>
+          <a:prstGeom prst="rect">
+            <a:avLst/>
+          </a:prstGeom>
+          <a:solidFill>
+            <a:srgbClr val="C7922C"/>
+          </a:solidFill>
+          <a:ln/>
+        </p:spPr>
+      </p:sp>
+      <p:sp>
+        <p:nvSpPr>
+          <p:cNvPr id="3" name="Text 1"/>
+          <p:cNvSpPr/>
+          <p:nvPr/>
+        </p:nvSpPr>
+        <p:spPr>
+          <a:xfrm>
+            <a:off x="365760" y="54864"/>
+            <a:ext cx="8412480" cy="457200"/>
+          </a:xfrm>
+          <a:prstGeom prst="rect">
+            <a:avLst/>
+          </a:prstGeom>
+          <a:noFill/>
+          <a:ln/>
+        </p:spPr>
+        <p:txBody>
+          <a:bodyPr wrap="square" lIns="0" tIns="0" rIns="0" bIns="0" rtlCol="0" anchor="ctr"/>
+          <a:lstStyle/>
+          <a:p>
+            <a:pPr indent="0" marL="0">
+              <a:buNone/>
+            </a:pPr>
+            <a:r>
+              <a:rPr lang="en-US" sz="2200" b="1" dirty="0">
+                <a:solidFill>
+                  <a:srgbClr val="FFFFFF"/>
+                </a:solidFill>
+                <a:latin typeface="Calibri" pitchFamily="34" charset="0"/>
+                <a:ea typeface="Calibri" pitchFamily="34" charset="-122"/>
+                <a:cs typeface="Calibri" pitchFamily="34" charset="-120"/>
+              </a:rPr>
+              <a:t>✍️  10-Minute Write</a:t>
+            </a:r>
+            <a:endParaRPr lang="en-US" sz="2200" dirty="0"/>
+          </a:p>
+        </p:txBody>
       </p:sp>
       <p:sp>
         <p:nvSpPr>
@@ -4646,24 +4907,24 @@
         </p:nvSpPr>
         <p:spPr>
           <a:xfrm>
-            <a:off x="457200" y="1005840"/>
-            <a:ext cx="8046720" cy="292608"/>
-          </a:xfrm>
-          <a:prstGeom prst="rect">
-            <a:avLst/>
-          </a:prstGeom>
-          <a:noFill/>
-          <a:ln/>
-        </p:spPr>
-        <p:txBody>
-          <a:bodyPr wrap="square" lIns="0" tIns="0" rIns="0" bIns="0" rtlCol="0" anchor="ctr"/>
-          <a:lstStyle/>
-          <a:p>
-            <a:pPr indent="0" marL="0">
-              <a:buNone/>
-            </a:pPr>
-            <a:r>
-              <a:rPr lang="en-US" sz="1100" b="1" spc="200" kern="0" dirty="0">
+            <a:off x="365760" y="822960"/>
+            <a:ext cx="8229600" cy="237744"/>
+          </a:xfrm>
+          <a:prstGeom prst="rect">
+            <a:avLst/>
+          </a:prstGeom>
+          <a:noFill/>
+          <a:ln/>
+        </p:spPr>
+        <p:txBody>
+          <a:bodyPr wrap="square" lIns="0" tIns="0" rIns="0" bIns="0" rtlCol="0" anchor="ctr"/>
+          <a:lstStyle/>
+          <a:p>
+            <a:pPr indent="0" marL="0">
+              <a:buNone/>
+            </a:pPr>
+            <a:r>
+              <a:rPr lang="en-US" sz="1100" b="1" spc="100" kern="0" dirty="0">
                 <a:solidFill>
                   <a:srgbClr val="C7922C"/>
                 </a:solidFill>
@@ -4671,7 +4932,7 @@
                 <a:ea typeface="Calibri" pitchFamily="34" charset="-122"/>
                 <a:cs typeface="Calibri" pitchFamily="34" charset="-120"/>
               </a:rPr>
-              <a:t>📖 READ THE PROMPT — 1 MINUTE</a:t>
+              <a:t>READ THE PROMPT — 1 MINUTE</a:t>
             </a:r>
             <a:endParaRPr lang="en-US" sz="1100" dirty="0"/>
           </a:p>
@@ -4685,18 +4946,18 @@
         </p:nvSpPr>
         <p:spPr>
           <a:xfrm>
-            <a:off x="457200" y="1417320"/>
-            <a:ext cx="8229600" cy="1645920"/>
+            <a:off x="365760" y="1143000"/>
+            <a:ext cx="8412480" cy="1737360"/>
           </a:xfrm>
           <a:prstGeom prst="roundRect">
             <a:avLst>
-              <a:gd name="adj" fmla="val 5556"/>
+              <a:gd name="adj" fmla="val 5263"/>
             </a:avLst>
           </a:prstGeom>
           <a:solidFill>
             <a:srgbClr val="FEF6E8"/>
           </a:solidFill>
-          <a:ln w="12700">
+          <a:ln w="19050">
             <a:solidFill>
               <a:srgbClr val="C7922C"/>
             </a:solidFill>
@@ -4719,24 +4980,24 @@
         </p:nvSpPr>
         <p:spPr>
           <a:xfrm>
-            <a:off x="640080" y="1527048"/>
-            <a:ext cx="7863840" cy="1417320"/>
-          </a:xfrm>
-          <a:prstGeom prst="rect">
-            <a:avLst/>
-          </a:prstGeom>
-          <a:noFill/>
-          <a:ln/>
-        </p:spPr>
-        <p:txBody>
-          <a:bodyPr wrap="square" lIns="0" tIns="0" rIns="0" bIns="0" rtlCol="0" anchor="ctr"/>
-          <a:lstStyle/>
-          <a:p>
-            <a:pPr indent="0" marL="0">
-              <a:buNone/>
-            </a:pPr>
-            <a:r>
-              <a:rPr lang="en-US" sz="1800" i="1" dirty="0">
+            <a:off x="594360" y="1271016"/>
+            <a:ext cx="7955280" cy="1481328"/>
+          </a:xfrm>
+          <a:prstGeom prst="rect">
+            <a:avLst/>
+          </a:prstGeom>
+          <a:noFill/>
+          <a:ln/>
+        </p:spPr>
+        <p:txBody>
+          <a:bodyPr wrap="square" lIns="0" tIns="0" rIns="0" bIns="0" rtlCol="0" anchor="ctr"/>
+          <a:lstStyle/>
+          <a:p>
+            <a:pPr indent="0" marL="0">
+              <a:buNone/>
+            </a:pPr>
+            <a:r>
+              <a:rPr lang="en-US" sz="1700" dirty="0">
                 <a:solidFill>
                   <a:srgbClr val="1E293B"/>
                 </a:solidFill>
@@ -4744,9 +5005,9 @@
                 <a:ea typeface="Calibri" pitchFamily="34" charset="-122"/>
                 <a:cs typeface="Calibri" pitchFamily="34" charset="-120"/>
               </a:rPr>
-              <a:t>Maps help us find our way. Think about a place you know really well — your house, your school, your neighborhood. Write directions from one spot to another for someone who has never been there. Be so clear they could follow your words!</a:t>
-            </a:r>
-            <a:endParaRPr lang="en-US" sz="1800" dirty="0"/>
+              <a:t>Draw a map of your street or your home in words. Write what someone would pass first, second, and third.</a:t>
+            </a:r>
+            <a:endParaRPr lang="en-US" sz="1700" dirty="0"/>
           </a:p>
         </p:txBody>
       </p:sp>
@@ -4758,76 +5019,34 @@
         </p:nvSpPr>
         <p:spPr>
           <a:xfrm>
-            <a:off x="640080" y="3246120"/>
-            <a:ext cx="7863840" cy="457200"/>
-          </a:xfrm>
-          <a:prstGeom prst="rect">
-            <a:avLst/>
-          </a:prstGeom>
-          <a:noFill/>
-          <a:ln/>
-        </p:spPr>
-        <p:txBody>
-          <a:bodyPr wrap="square" lIns="0" tIns="0" rIns="0" bIns="0" rtlCol="0" anchor="ctr"/>
-          <a:lstStyle/>
-          <a:p>
-            <a:pPr indent="0" marL="0">
-              <a:buNone/>
-            </a:pPr>
-            <a:r>
-              <a:rPr lang="en-US" sz="1400" b="1" dirty="0">
-                <a:solidFill>
-                  <a:srgbClr val="0E1C42"/>
-                </a:solidFill>
-                <a:latin typeface="Calibri" pitchFamily="34" charset="0"/>
-                <a:ea typeface="Calibri" pitchFamily="34" charset="-122"/>
-                <a:cs typeface="Calibri" pitchFamily="34" charset="-120"/>
-              </a:rPr>
-              <a:t>Type in the chat </a:t>
-            </a:r>
-            <a:pPr indent="0" marL="0">
-              <a:buNone/>
-            </a:pPr>
-            <a:r>
-              <a:rPr lang="en-US" sz="1400" dirty="0">
-                <a:solidFill>
-                  <a:srgbClr val="1E293B"/>
-                </a:solidFill>
-                <a:latin typeface="Calibri" pitchFamily="34" charset="0"/>
-                <a:ea typeface="Calibri" pitchFamily="34" charset="-122"/>
-                <a:cs typeface="Calibri" pitchFamily="34" charset="-120"/>
-              </a:rPr>
-              <a:t>or </a:t>
-            </a:r>
-            <a:pPr indent="0" marL="0">
-              <a:buNone/>
-            </a:pPr>
-            <a:r>
-              <a:rPr lang="en-US" sz="1400" b="1" dirty="0">
-                <a:solidFill>
-                  <a:srgbClr val="0E1C42"/>
-                </a:solidFill>
-                <a:latin typeface="Calibri" pitchFamily="34" charset="0"/>
-                <a:ea typeface="Calibri" pitchFamily="34" charset="-122"/>
-                <a:cs typeface="Calibri" pitchFamily="34" charset="-120"/>
-              </a:rPr>
-              <a:t>write on paper</a:t>
-            </a:r>
-            <a:pPr indent="0" marL="0">
-              <a:buNone/>
-            </a:pPr>
-            <a:r>
-              <a:rPr lang="en-US" sz="1400" dirty="0">
-                <a:solidFill>
-                  <a:srgbClr val="1E293B"/>
-                </a:solidFill>
-                <a:latin typeface="Calibri" pitchFamily="34" charset="0"/>
-                <a:ea typeface="Calibri" pitchFamily="34" charset="-122"/>
-                <a:cs typeface="Calibri" pitchFamily="34" charset="-120"/>
-              </a:rPr>
-              <a:t> to hold up when we share.</a:t>
-            </a:r>
-            <a:endParaRPr lang="en-US" sz="1400" dirty="0"/>
+            <a:off x="365760" y="3063240"/>
+            <a:ext cx="8412480" cy="365760"/>
+          </a:xfrm>
+          <a:prstGeom prst="rect">
+            <a:avLst/>
+          </a:prstGeom>
+          <a:noFill/>
+          <a:ln/>
+        </p:spPr>
+        <p:txBody>
+          <a:bodyPr wrap="square" lIns="0" tIns="0" rIns="0" bIns="0" rtlCol="0" anchor="ctr"/>
+          <a:lstStyle/>
+          <a:p>
+            <a:pPr indent="0" marL="0">
+              <a:buNone/>
+            </a:pPr>
+            <a:r>
+              <a:rPr lang="en-US" sz="1600" i="1" dirty="0">
+                <a:solidFill>
+                  <a:srgbClr val="64748B"/>
+                </a:solidFill>
+                <a:latin typeface="Calibri" pitchFamily="34" charset="0"/>
+                <a:ea typeface="Calibri" pitchFamily="34" charset="-122"/>
+                <a:cs typeface="Calibri" pitchFamily="34" charset="-120"/>
+              </a:rPr>
+              <a:t>Think first. You will have five minutes to write.</a:t>
+            </a:r>
+            <a:endParaRPr lang="en-US" sz="1600" dirty="0"/>
           </a:p>
         </p:txBody>
       </p:sp>
@@ -4865,30 +5084,89 @@
       </p:grpSpPr>
       <p:sp>
         <p:nvSpPr>
-          <p:cNvPr id="2" name="Text 0"/>
-          <p:cNvSpPr/>
-          <p:nvPr/>
-        </p:nvSpPr>
-        <p:spPr>
-          <a:xfrm>
-            <a:off x="457200" y="228600"/>
-            <a:ext cx="8229600" cy="640080"/>
-          </a:xfrm>
-          <a:prstGeom prst="rect">
-            <a:avLst/>
-          </a:prstGeom>
-          <a:noFill/>
-          <a:ln/>
-        </p:spPr>
-        <p:txBody>
-          <a:bodyPr wrap="square" lIns="0" tIns="0" rIns="0" bIns="0" rtlCol="0" anchor="ctr"/>
-          <a:lstStyle/>
-          <a:p>
-            <a:pPr algn="ctr" indent="0" marL="0">
-              <a:buNone/>
-            </a:pPr>
-            <a:r>
-              <a:rPr lang="en-US" sz="3200" b="1" dirty="0">
+          <p:cNvPr id="2" name="Shape 0"/>
+          <p:cNvSpPr/>
+          <p:nvPr/>
+        </p:nvSpPr>
+        <p:spPr>
+          <a:xfrm>
+            <a:off x="0" y="0"/>
+            <a:ext cx="9144000" cy="566928"/>
+          </a:xfrm>
+          <a:prstGeom prst="rect">
+            <a:avLst/>
+          </a:prstGeom>
+          <a:solidFill>
+            <a:srgbClr val="C7922C"/>
+          </a:solidFill>
+          <a:ln/>
+        </p:spPr>
+      </p:sp>
+      <p:sp>
+        <p:nvSpPr>
+          <p:cNvPr id="3" name="Text 1"/>
+          <p:cNvSpPr/>
+          <p:nvPr/>
+        </p:nvSpPr>
+        <p:spPr>
+          <a:xfrm>
+            <a:off x="365760" y="54864"/>
+            <a:ext cx="8412480" cy="457200"/>
+          </a:xfrm>
+          <a:prstGeom prst="rect">
+            <a:avLst/>
+          </a:prstGeom>
+          <a:noFill/>
+          <a:ln/>
+        </p:spPr>
+        <p:txBody>
+          <a:bodyPr wrap="square" lIns="0" tIns="0" rIns="0" bIns="0" rtlCol="0" anchor="ctr"/>
+          <a:lstStyle/>
+          <a:p>
+            <a:pPr indent="0" marL="0">
+              <a:buNone/>
+            </a:pPr>
+            <a:r>
+              <a:rPr lang="en-US" sz="2200" b="1" dirty="0">
+                <a:solidFill>
+                  <a:srgbClr val="FFFFFF"/>
+                </a:solidFill>
+                <a:latin typeface="Calibri" pitchFamily="34" charset="0"/>
+                <a:ea typeface="Calibri" pitchFamily="34" charset="-122"/>
+                <a:cs typeface="Calibri" pitchFamily="34" charset="-120"/>
+              </a:rPr>
+              <a:t>✍️  Writing Time</a:t>
+            </a:r>
+            <a:endParaRPr lang="en-US" sz="2200" dirty="0"/>
+          </a:p>
+        </p:txBody>
+      </p:sp>
+      <p:sp>
+        <p:nvSpPr>
+          <p:cNvPr id="4" name="Text 2"/>
+          <p:cNvSpPr/>
+          <p:nvPr/>
+        </p:nvSpPr>
+        <p:spPr>
+          <a:xfrm>
+            <a:off x="365760" y="868680"/>
+            <a:ext cx="8412480" cy="502920"/>
+          </a:xfrm>
+          <a:prstGeom prst="rect">
+            <a:avLst/>
+          </a:prstGeom>
+          <a:noFill/>
+          <a:ln/>
+        </p:spPr>
+        <p:txBody>
+          <a:bodyPr wrap="square" lIns="0" tIns="0" rIns="0" bIns="0" rtlCol="0" anchor="ctr"/>
+          <a:lstStyle/>
+          <a:p>
+            <a:pPr indent="0" marL="0">
+              <a:buNone/>
+            </a:pPr>
+            <a:r>
+              <a:rPr lang="en-US" sz="2600" b="1" dirty="0">
                 <a:solidFill>
                   <a:srgbClr val="0E1C42"/>
                 </a:solidFill>
@@ -4896,38 +5174,38 @@
                 <a:ea typeface="Calibri" pitchFamily="34" charset="-122"/>
                 <a:cs typeface="Calibri" pitchFamily="34" charset="-120"/>
               </a:rPr>
-              <a:t>✏️  Writing Time</a:t>
-            </a:r>
-            <a:endParaRPr lang="en-US" sz="3200" dirty="0"/>
-          </a:p>
-        </p:txBody>
-      </p:sp>
-      <p:sp>
-        <p:nvSpPr>
-          <p:cNvPr id="3" name="Text 1"/>
-          <p:cNvSpPr/>
-          <p:nvPr/>
-        </p:nvSpPr>
-        <p:spPr>
-          <a:xfrm>
-            <a:off x="914400" y="822960"/>
-            <a:ext cx="7315200" cy="365760"/>
-          </a:xfrm>
-          <a:prstGeom prst="rect">
-            <a:avLst/>
-          </a:prstGeom>
-          <a:noFill/>
-          <a:ln/>
-        </p:spPr>
-        <p:txBody>
-          <a:bodyPr wrap="square" lIns="0" tIns="0" rIns="0" bIns="0" rtlCol="0" anchor="ctr"/>
-          <a:lstStyle/>
-          <a:p>
-            <a:pPr algn="ctr" indent="0" marL="0">
-              <a:buNone/>
-            </a:pPr>
-            <a:r>
-              <a:rPr lang="en-US" sz="1600" dirty="0">
+              <a:t>5 minutes — keep your pencil moving!</a:t>
+            </a:r>
+            <a:endParaRPr lang="en-US" sz="2600" dirty="0"/>
+          </a:p>
+        </p:txBody>
+      </p:sp>
+      <p:sp>
+        <p:nvSpPr>
+          <p:cNvPr id="5" name="Text 3"/>
+          <p:cNvSpPr/>
+          <p:nvPr/>
+        </p:nvSpPr>
+        <p:spPr>
+          <a:xfrm>
+            <a:off x="365760" y="1463040"/>
+            <a:ext cx="8229600" cy="237744"/>
+          </a:xfrm>
+          <a:prstGeom prst="rect">
+            <a:avLst/>
+          </a:prstGeom>
+          <a:noFill/>
+          <a:ln/>
+        </p:spPr>
+        <p:txBody>
+          <a:bodyPr wrap="square" lIns="0" tIns="0" rIns="0" bIns="0" rtlCol="0" anchor="ctr"/>
+          <a:lstStyle/>
+          <a:p>
+            <a:pPr indent="0" marL="0">
+              <a:buNone/>
+            </a:pPr>
+            <a:r>
+              <a:rPr lang="en-US" sz="1100" b="1" spc="100" kern="0" dirty="0">
                 <a:solidFill>
                   <a:srgbClr val="C7922C"/>
                 </a:solidFill>
@@ -4935,32 +5213,32 @@
                 <a:ea typeface="Calibri" pitchFamily="34" charset="-122"/>
                 <a:cs typeface="Calibri" pitchFamily="34" charset="-120"/>
               </a:rPr>
-              <a:t>5 minutes — keep your pencil moving!</a:t>
-            </a:r>
-            <a:endParaRPr lang="en-US" sz="1600" dirty="0"/>
-          </a:p>
-        </p:txBody>
-      </p:sp>
-      <p:sp>
-        <p:nvSpPr>
-          <p:cNvPr id="4" name="Shape 2"/>
-          <p:cNvSpPr/>
-          <p:nvPr/>
-        </p:nvSpPr>
-        <p:spPr>
-          <a:xfrm>
-            <a:off x="457200" y="1371600"/>
-            <a:ext cx="8229600" cy="1280160"/>
+              <a:t>YOUR PROMPT</a:t>
+            </a:r>
+            <a:endParaRPr lang="en-US" sz="1100" dirty="0"/>
+          </a:p>
+        </p:txBody>
+      </p:sp>
+      <p:sp>
+        <p:nvSpPr>
+          <p:cNvPr id="6" name="Shape 4"/>
+          <p:cNvSpPr/>
+          <p:nvPr/>
+        </p:nvSpPr>
+        <p:spPr>
+          <a:xfrm>
+            <a:off x="365760" y="1737360"/>
+            <a:ext cx="8412480" cy="1417320"/>
           </a:xfrm>
           <a:prstGeom prst="roundRect">
             <a:avLst>
-              <a:gd name="adj" fmla="val 7143"/>
+              <a:gd name="adj" fmla="val 6452"/>
             </a:avLst>
           </a:prstGeom>
           <a:solidFill>
             <a:srgbClr val="FFFFFF"/>
           </a:solidFill>
-          <a:ln w="12700">
+          <a:ln w="19050">
             <a:solidFill>
               <a:srgbClr val="C7922C"/>
             </a:solidFill>
@@ -4977,44 +5255,30 @@
       </p:sp>
       <p:sp>
         <p:nvSpPr>
-          <p:cNvPr id="5" name="Text 3"/>
-          <p:cNvSpPr/>
-          <p:nvPr/>
-        </p:nvSpPr>
-        <p:spPr>
-          <a:xfrm>
-            <a:off x="640080" y="1417320"/>
-            <a:ext cx="7863840" cy="1188720"/>
-          </a:xfrm>
-          <a:prstGeom prst="rect">
-            <a:avLst/>
-          </a:prstGeom>
-          <a:noFill/>
-          <a:ln/>
-        </p:spPr>
-        <p:txBody>
-          <a:bodyPr wrap="square" lIns="0" tIns="0" rIns="0" bIns="0" rtlCol="0" anchor="t"/>
-          <a:lstStyle/>
-          <a:p>
-            <a:pPr indent="0" marL="0">
-              <a:buNone/>
-            </a:pPr>
-            <a:r>
-              <a:rPr lang="en-US" sz="1200" b="1" dirty="0">
-                <a:solidFill>
-                  <a:srgbClr val="C7922C"/>
-                </a:solidFill>
-                <a:latin typeface="Calibri" pitchFamily="34" charset="0"/>
-                <a:ea typeface="Calibri" pitchFamily="34" charset="-122"/>
-                <a:cs typeface="Calibri" pitchFamily="34" charset="-120"/>
-              </a:rPr>
-              <a:t>📖 Prompt: </a:t>
-            </a:r>
-            <a:pPr indent="0" marL="0">
-              <a:buNone/>
-            </a:pPr>
-            <a:r>
-              <a:rPr lang="en-US" sz="1200" i="1" dirty="0">
+          <p:cNvPr id="7" name="Text 5"/>
+          <p:cNvSpPr/>
+          <p:nvPr/>
+        </p:nvSpPr>
+        <p:spPr>
+          <a:xfrm>
+            <a:off x="594360" y="1865376"/>
+            <a:ext cx="7955280" cy="1161288"/>
+          </a:xfrm>
+          <a:prstGeom prst="rect">
+            <a:avLst/>
+          </a:prstGeom>
+          <a:noFill/>
+          <a:ln/>
+        </p:spPr>
+        <p:txBody>
+          <a:bodyPr wrap="square" lIns="0" tIns="0" rIns="0" bIns="0" rtlCol="0" anchor="ctr"/>
+          <a:lstStyle/>
+          <a:p>
+            <a:pPr indent="0" marL="0">
+              <a:buNone/>
+            </a:pPr>
+            <a:r>
+              <a:rPr lang="en-US" sz="1700" dirty="0">
                 <a:solidFill>
                   <a:srgbClr val="1E293B"/>
                 </a:solidFill>
@@ -5022,122 +5286,48 @@
                 <a:ea typeface="Calibri" pitchFamily="34" charset="-122"/>
                 <a:cs typeface="Calibri" pitchFamily="34" charset="-120"/>
               </a:rPr>
-              <a:t>Maps help us find our way. Think about a place you know really well — your house, your school, your neighborhood. Write directions from one spot to another for someone who has never been there. Be so clear they could follow your words!</a:t>
-            </a:r>
-            <a:endParaRPr lang="en-US" sz="1200" dirty="0"/>
-          </a:p>
-        </p:txBody>
-      </p:sp>
-      <p:sp>
-        <p:nvSpPr>
-          <p:cNvPr id="6" name="Shape 4"/>
-          <p:cNvSpPr/>
-          <p:nvPr/>
-        </p:nvSpPr>
-        <p:spPr>
-          <a:xfrm>
-            <a:off x="2286000" y="2926080"/>
-            <a:ext cx="4572000" cy="1280160"/>
-          </a:xfrm>
-          <a:prstGeom prst="roundRect">
-            <a:avLst>
-              <a:gd name="adj" fmla="val 8571"/>
-            </a:avLst>
-          </a:prstGeom>
-          <a:solidFill>
-            <a:srgbClr val="FFFFFF"/>
-          </a:solidFill>
-          <a:ln/>
-          <a:effectLst>
-            <a:outerShdw sx="100000" sy="100000" kx="0" ky="0" algn="bl" rotWithShape="0" blurRad="101600" dist="38100" dir="2700000">
-              <a:srgbClr val="000000">
-                <a:alpha val="12000"/>
-              </a:srgbClr>
-            </a:outerShdw>
-          </a:effectLst>
-        </p:spPr>
-      </p:sp>
-      <p:sp>
-        <p:nvSpPr>
-          <p:cNvPr id="7" name="Text 5"/>
-          <p:cNvSpPr/>
-          <p:nvPr/>
-        </p:nvSpPr>
-        <p:spPr>
-          <a:xfrm>
-            <a:off x="2468880" y="3017520"/>
-            <a:ext cx="4206240" cy="1097280"/>
-          </a:xfrm>
-          <a:prstGeom prst="rect">
-            <a:avLst/>
-          </a:prstGeom>
-          <a:noFill/>
-          <a:ln/>
-        </p:spPr>
-        <p:txBody>
-          <a:bodyPr wrap="square" lIns="0" tIns="0" rIns="0" bIns="0" rtlCol="0" anchor="t"/>
-          <a:lstStyle/>
-          <a:p>
-            <a:pPr indent="0" marL="0">
-              <a:buNone/>
-            </a:pPr>
-            <a:r>
-              <a:rPr lang="en-US" sz="1400" b="1" dirty="0">
-                <a:solidFill>
-                  <a:srgbClr val="0E1C42"/>
-                </a:solidFill>
-                <a:latin typeface="Calibri" pitchFamily="34" charset="0"/>
-                <a:ea typeface="Calibri" pitchFamily="34" charset="-122"/>
-                <a:cs typeface="Calibri" pitchFamily="34" charset="-120"/>
-              </a:rPr>
-              <a:t>If you get stuck:
-</a:t>
-            </a:r>
-            <a:pPr indent="0" marL="0">
-              <a:buNone/>
-            </a:pPr>
-            <a:r>
-              <a:rPr lang="en-US" sz="1300" dirty="0">
-                <a:solidFill>
-                  <a:srgbClr val="1E293B"/>
-                </a:solidFill>
-                <a:latin typeface="Calibri" pitchFamily="34" charset="0"/>
-                <a:ea typeface="Calibri" pitchFamily="34" charset="-122"/>
-                <a:cs typeface="Calibri" pitchFamily="34" charset="-120"/>
-              </a:rPr>
-              <a:t>• Reread the prompt above
-</a:t>
-            </a:r>
-            <a:pPr indent="0" marL="0">
-              <a:buNone/>
-            </a:pPr>
-            <a:r>
-              <a:rPr lang="en-US" sz="1300" dirty="0">
-                <a:solidFill>
-                  <a:srgbClr val="1E293B"/>
-                </a:solidFill>
-                <a:latin typeface="Calibri" pitchFamily="34" charset="0"/>
-                <a:ea typeface="Calibri" pitchFamily="34" charset="-122"/>
-                <a:cs typeface="Calibri" pitchFamily="34" charset="-120"/>
-              </a:rPr>
-              <a:t>• Write "I'm thinking..." until a new idea comes
-</a:t>
-            </a:r>
-            <a:pPr indent="0" marL="0">
-              <a:buNone/>
-            </a:pPr>
-            <a:r>
-              <a:rPr lang="en-US" sz="1300" dirty="0">
-                <a:solidFill>
-                  <a:srgbClr val="1E293B"/>
-                </a:solidFill>
-                <a:latin typeface="Calibri" pitchFamily="34" charset="0"/>
-                <a:ea typeface="Calibri" pitchFamily="34" charset="-122"/>
-                <a:cs typeface="Calibri" pitchFamily="34" charset="-120"/>
-              </a:rPr>
-              <a:t>• Keep going — don't erase!</a:t>
-            </a:r>
-            <a:endParaRPr lang="en-US" sz="1400" dirty="0"/>
+              <a:t>Draw a map of your street or your home in words. Write what someone would pass first, second, and third.</a:t>
+            </a:r>
+            <a:endParaRPr lang="en-US" sz="1700" dirty="0"/>
+          </a:p>
+        </p:txBody>
+      </p:sp>
+      <p:sp>
+        <p:nvSpPr>
+          <p:cNvPr id="8" name="Text 6"/>
+          <p:cNvSpPr/>
+          <p:nvPr/>
+        </p:nvSpPr>
+        <p:spPr>
+          <a:xfrm>
+            <a:off x="365760" y="3291840"/>
+            <a:ext cx="8412480" cy="365760"/>
+          </a:xfrm>
+          <a:prstGeom prst="rect">
+            <a:avLst/>
+          </a:prstGeom>
+          <a:noFill/>
+          <a:ln/>
+        </p:spPr>
+        <p:txBody>
+          <a:bodyPr wrap="square" lIns="0" tIns="0" rIns="0" bIns="0" rtlCol="0" anchor="ctr"/>
+          <a:lstStyle/>
+          <a:p>
+            <a:pPr indent="0" marL="0">
+              <a:buNone/>
+            </a:pPr>
+            <a:r>
+              <a:rPr lang="en-US" sz="1500" i="1" dirty="0">
+                <a:solidFill>
+                  <a:srgbClr val="64748B"/>
+                </a:solidFill>
+                <a:latin typeface="Calibri" pitchFamily="34" charset="0"/>
+                <a:ea typeface="Calibri" pitchFamily="34" charset="-122"/>
+                <a:cs typeface="Calibri" pitchFamily="34" charset="-120"/>
+              </a:rPr>
+              <a:t>Do not stop to erase. If you get stuck, write the last word again and keep going.</a:t>
+            </a:r>
+            <a:endParaRPr lang="en-US" sz="1500" dirty="0"/>
           </a:p>
         </p:txBody>
       </p:sp>
@@ -5175,39 +5365,23 @@
       </p:grpSpPr>
       <p:sp>
         <p:nvSpPr>
-          <p:cNvPr id="2" name="Text 0"/>
-          <p:cNvSpPr/>
-          <p:nvPr/>
-        </p:nvSpPr>
-        <p:spPr>
-          <a:xfrm>
-            <a:off x="3657600" y="365760"/>
-            <a:ext cx="1828800" cy="640080"/>
-          </a:xfrm>
-          <a:prstGeom prst="rect">
-            <a:avLst/>
-          </a:prstGeom>
-          <a:noFill/>
-          <a:ln/>
-        </p:spPr>
-        <p:txBody>
-          <a:bodyPr wrap="square" lIns="0" tIns="0" rIns="0" bIns="0" rtlCol="0" anchor="ctr"/>
-          <a:lstStyle/>
-          <a:p>
-            <a:pPr algn="ctr" indent="0" marL="0">
-              <a:buNone/>
-            </a:pPr>
-            <a:r>
-              <a:rPr lang="en-US" sz="4000" dirty="0">
-                <a:solidFill>
-                  <a:srgbClr val="000000"/>
-                </a:solidFill>
-              </a:rPr>
-              <a:t>🔍</a:t>
-            </a:r>
-            <a:endParaRPr lang="en-US" sz="4000" dirty="0"/>
-          </a:p>
-        </p:txBody>
+          <p:cNvPr id="2" name="Shape 0"/>
+          <p:cNvSpPr/>
+          <p:nvPr/>
+        </p:nvSpPr>
+        <p:spPr>
+          <a:xfrm>
+            <a:off x="0" y="0"/>
+            <a:ext cx="9144000" cy="566928"/>
+          </a:xfrm>
+          <a:prstGeom prst="rect">
+            <a:avLst/>
+          </a:prstGeom>
+          <a:solidFill>
+            <a:srgbClr val="34B76F"/>
+          </a:solidFill>
+          <a:ln/>
+        </p:spPr>
       </p:sp>
       <p:sp>
         <p:nvSpPr>
@@ -5217,24 +5391,63 @@
         </p:nvSpPr>
         <p:spPr>
           <a:xfrm>
-            <a:off x="914400" y="914400"/>
-            <a:ext cx="7315200" cy="640080"/>
-          </a:xfrm>
-          <a:prstGeom prst="rect">
-            <a:avLst/>
-          </a:prstGeom>
-          <a:noFill/>
-          <a:ln/>
-        </p:spPr>
-        <p:txBody>
-          <a:bodyPr wrap="square" lIns="0" tIns="0" rIns="0" bIns="0" rtlCol="0" anchor="ctr"/>
-          <a:lstStyle/>
-          <a:p>
-            <a:pPr algn="ctr" indent="0" marL="0">
-              <a:buNone/>
-            </a:pPr>
-            <a:r>
-              <a:rPr lang="en-US" sz="3200" b="1" dirty="0">
+            <a:off x="365760" y="54864"/>
+            <a:ext cx="8412480" cy="457200"/>
+          </a:xfrm>
+          <a:prstGeom prst="rect">
+            <a:avLst/>
+          </a:prstGeom>
+          <a:noFill/>
+          <a:ln/>
+        </p:spPr>
+        <p:txBody>
+          <a:bodyPr wrap="square" lIns="0" tIns="0" rIns="0" bIns="0" rtlCol="0" anchor="ctr"/>
+          <a:lstStyle/>
+          <a:p>
+            <a:pPr indent="0" marL="0">
+              <a:buNone/>
+            </a:pPr>
+            <a:r>
+              <a:rPr lang="en-US" sz="2200" b="1" dirty="0">
+                <a:solidFill>
+                  <a:srgbClr val="FFFFFF"/>
+                </a:solidFill>
+                <a:latin typeface="Calibri" pitchFamily="34" charset="0"/>
+                <a:ea typeface="Calibri" pitchFamily="34" charset="-122"/>
+                <a:cs typeface="Calibri" pitchFamily="34" charset="-120"/>
+              </a:rPr>
+              <a:t>🔍  Edit &amp; Revise</a:t>
+            </a:r>
+            <a:endParaRPr lang="en-US" sz="2200" dirty="0"/>
+          </a:p>
+        </p:txBody>
+      </p:sp>
+      <p:sp>
+        <p:nvSpPr>
+          <p:cNvPr id="4" name="Text 2"/>
+          <p:cNvSpPr/>
+          <p:nvPr/>
+        </p:nvSpPr>
+        <p:spPr>
+          <a:xfrm>
+            <a:off x="365760" y="868680"/>
+            <a:ext cx="8412480" cy="457200"/>
+          </a:xfrm>
+          <a:prstGeom prst="rect">
+            <a:avLst/>
+          </a:prstGeom>
+          <a:noFill/>
+          <a:ln/>
+        </p:spPr>
+        <p:txBody>
+          <a:bodyPr wrap="square" lIns="0" tIns="0" rIns="0" bIns="0" rtlCol="0" anchor="ctr"/>
+          <a:lstStyle/>
+          <a:p>
+            <a:pPr indent="0" marL="0">
+              <a:buNone/>
+            </a:pPr>
+            <a:r>
+              <a:rPr lang="en-US" sz="2400" b="1" dirty="0">
                 <a:solidFill>
                   <a:srgbClr val="0E1C42"/>
                 </a:solidFill>
@@ -5242,38 +5455,38 @@
                 <a:ea typeface="Calibri" pitchFamily="34" charset="-122"/>
                 <a:cs typeface="Calibri" pitchFamily="34" charset="-120"/>
               </a:rPr>
-              <a:t>Edit &amp; Revise</a:t>
-            </a:r>
-            <a:endParaRPr lang="en-US" sz="3200" dirty="0"/>
-          </a:p>
-        </p:txBody>
-      </p:sp>
-      <p:sp>
-        <p:nvSpPr>
-          <p:cNvPr id="4" name="Text 2"/>
-          <p:cNvSpPr/>
-          <p:nvPr/>
-        </p:nvSpPr>
-        <p:spPr>
-          <a:xfrm>
-            <a:off x="914400" y="1508760"/>
-            <a:ext cx="7315200" cy="457200"/>
-          </a:xfrm>
-          <a:prstGeom prst="rect">
-            <a:avLst/>
-          </a:prstGeom>
-          <a:noFill/>
-          <a:ln/>
-        </p:spPr>
-        <p:txBody>
-          <a:bodyPr wrap="square" lIns="0" tIns="0" rIns="0" bIns="0" rtlCol="0" anchor="ctr"/>
-          <a:lstStyle/>
-          <a:p>
-            <a:pPr algn="ctr" indent="0" marL="0">
-              <a:buNone/>
-            </a:pPr>
-            <a:r>
-              <a:rPr lang="en-US" sz="1600" dirty="0">
+              <a:t>1 minute — pick ONE thing to fix.</a:t>
+            </a:r>
+            <a:endParaRPr lang="en-US" sz="2400" dirty="0"/>
+          </a:p>
+        </p:txBody>
+      </p:sp>
+      <p:sp>
+        <p:nvSpPr>
+          <p:cNvPr id="5" name="Text 3"/>
+          <p:cNvSpPr/>
+          <p:nvPr/>
+        </p:nvSpPr>
+        <p:spPr>
+          <a:xfrm>
+            <a:off x="365760" y="1417320"/>
+            <a:ext cx="8229600" cy="237744"/>
+          </a:xfrm>
+          <a:prstGeom prst="rect">
+            <a:avLst/>
+          </a:prstGeom>
+          <a:noFill/>
+          <a:ln/>
+        </p:spPr>
+        <p:txBody>
+          <a:bodyPr wrap="square" lIns="0" tIns="0" rIns="0" bIns="0" rtlCol="0" anchor="ctr"/>
+          <a:lstStyle/>
+          <a:p>
+            <a:pPr indent="0" marL="0">
+              <a:buNone/>
+            </a:pPr>
+            <a:r>
+              <a:rPr lang="en-US" sz="1100" b="1" spc="100" kern="0" dirty="0">
                 <a:solidFill>
                   <a:srgbClr val="34B76F"/>
                 </a:solidFill>
@@ -5281,26 +5494,26 @@
                 <a:ea typeface="Calibri" pitchFamily="34" charset="-122"/>
                 <a:cs typeface="Calibri" pitchFamily="34" charset="-120"/>
               </a:rPr>
-              <a:t>1 minute — pick ONE thing to fix</a:t>
-            </a:r>
-            <a:endParaRPr lang="en-US" sz="1600" dirty="0"/>
-          </a:p>
-        </p:txBody>
-      </p:sp>
-      <p:sp>
-        <p:nvSpPr>
-          <p:cNvPr id="5" name="Shape 3"/>
-          <p:cNvSpPr/>
-          <p:nvPr/>
-        </p:nvSpPr>
-        <p:spPr>
-          <a:xfrm>
-            <a:off x="1371600" y="2103120"/>
-            <a:ext cx="6400800" cy="640080"/>
+              <a:t>TODAY'S EDIT FOCUS</a:t>
+            </a:r>
+            <a:endParaRPr lang="en-US" sz="1100" dirty="0"/>
+          </a:p>
+        </p:txBody>
+      </p:sp>
+      <p:sp>
+        <p:nvSpPr>
+          <p:cNvPr id="6" name="Shape 4"/>
+          <p:cNvSpPr/>
+          <p:nvPr/>
+        </p:nvSpPr>
+        <p:spPr>
+          <a:xfrm>
+            <a:off x="365760" y="1691640"/>
+            <a:ext cx="8412480" cy="777240"/>
           </a:xfrm>
           <a:prstGeom prst="roundRect">
             <a:avLst>
-              <a:gd name="adj" fmla="val 14286"/>
+              <a:gd name="adj" fmla="val 11765"/>
             </a:avLst>
           </a:prstGeom>
           <a:solidFill>
@@ -5323,44 +5536,30 @@
       </p:sp>
       <p:sp>
         <p:nvSpPr>
-          <p:cNvPr id="6" name="Text 4"/>
-          <p:cNvSpPr/>
-          <p:nvPr/>
-        </p:nvSpPr>
-        <p:spPr>
-          <a:xfrm>
-            <a:off x="1554480" y="2148840"/>
-            <a:ext cx="6035040" cy="548640"/>
-          </a:xfrm>
-          <a:prstGeom prst="rect">
-            <a:avLst/>
-          </a:prstGeom>
-          <a:noFill/>
-          <a:ln/>
-        </p:spPr>
-        <p:txBody>
-          <a:bodyPr wrap="square" lIns="0" tIns="0" rIns="0" bIns="0" rtlCol="0" anchor="ctr"/>
-          <a:lstStyle/>
-          <a:p>
-            <a:pPr indent="0" marL="0">
-              <a:buNone/>
-            </a:pPr>
-            <a:r>
-              <a:rPr lang="en-US" sz="1400" b="1" dirty="0">
-                <a:solidFill>
-                  <a:srgbClr val="34B76F"/>
-                </a:solidFill>
-                <a:latin typeface="Calibri" pitchFamily="34" charset="0"/>
-                <a:ea typeface="Calibri" pitchFamily="34" charset="-122"/>
-                <a:cs typeface="Calibri" pitchFamily="34" charset="-120"/>
-              </a:rPr>
-              <a:t>Today's check: </a:t>
-            </a:r>
-            <a:pPr indent="0" marL="0">
-              <a:buNone/>
-            </a:pPr>
-            <a:r>
-              <a:rPr lang="en-US" sz="1400" dirty="0">
+          <p:cNvPr id="7" name="Text 5"/>
+          <p:cNvSpPr/>
+          <p:nvPr/>
+        </p:nvSpPr>
+        <p:spPr>
+          <a:xfrm>
+            <a:off x="594360" y="1819656"/>
+            <a:ext cx="7955280" cy="521208"/>
+          </a:xfrm>
+          <a:prstGeom prst="rect">
+            <a:avLst/>
+          </a:prstGeom>
+          <a:noFill/>
+          <a:ln/>
+        </p:spPr>
+        <p:txBody>
+          <a:bodyPr wrap="square" lIns="0" tIns="0" rIns="0" bIns="0" rtlCol="0" anchor="ctr"/>
+          <a:lstStyle/>
+          <a:p>
+            <a:pPr indent="0" marL="0">
+              <a:buNone/>
+            </a:pPr>
+            <a:r>
+              <a:rPr lang="en-US" sz="1700" dirty="0">
                 <a:solidFill>
                   <a:srgbClr val="1E293B"/>
                 </a:solidFill>
@@ -5368,40 +5567,11 @@
                 <a:ea typeface="Calibri" pitchFamily="34" charset="-122"/>
                 <a:cs typeface="Calibri" pitchFamily="34" charset="-120"/>
               </a:rPr>
-              <a:t>Did I use direction words like left, right, past, and between?</a:t>
-            </a:r>
-            <a:endParaRPr lang="en-US" sz="1400" dirty="0"/>
-          </a:p>
-        </p:txBody>
-      </p:sp>
-      <p:sp>
-        <p:nvSpPr>
-          <p:cNvPr id="7" name="Shape 5"/>
-          <p:cNvSpPr/>
-          <p:nvPr/>
-        </p:nvSpPr>
-        <p:spPr>
-          <a:xfrm>
-            <a:off x="1371600" y="2926080"/>
-            <a:ext cx="6400800" cy="1463040"/>
-          </a:xfrm>
-          <a:prstGeom prst="roundRect">
-            <a:avLst>
-              <a:gd name="adj" fmla="val 6250"/>
-            </a:avLst>
-          </a:prstGeom>
-          <a:solidFill>
-            <a:srgbClr val="FFFFFF"/>
-          </a:solidFill>
-          <a:ln/>
-          <a:effectLst>
-            <a:outerShdw sx="100000" sy="100000" kx="0" ky="0" algn="bl" rotWithShape="0" blurRad="101600" dist="38100" dir="2700000">
-              <a:srgbClr val="000000">
-                <a:alpha val="12000"/>
-              </a:srgbClr>
-            </a:outerShdw>
-          </a:effectLst>
-        </p:spPr>
+              <a:t>Did I start each sentence with a capital letter?</a:t>
+            </a:r>
+            <a:endParaRPr lang="en-US" sz="1700" dirty="0"/>
+          </a:p>
+        </p:txBody>
       </p:sp>
       <p:sp>
         <p:nvSpPr>
@@ -5411,45 +5581,24 @@
         </p:nvSpPr>
         <p:spPr>
           <a:xfrm>
-            <a:off x="1554480" y="3017520"/>
-            <a:ext cx="6035040" cy="1280160"/>
-          </a:xfrm>
-          <a:prstGeom prst="rect">
-            <a:avLst/>
-          </a:prstGeom>
-          <a:noFill/>
-          <a:ln/>
-        </p:spPr>
-        <p:txBody>
-          <a:bodyPr wrap="square" lIns="0" tIns="0" rIns="0" bIns="0" rtlCol="0" anchor="t"/>
-          <a:lstStyle/>
-          <a:p>
-            <a:pPr indent="0" marL="0">
-              <a:spcAft>
-                <a:spcPts val="200"/>
-              </a:spcAft>
-              <a:buNone/>
-            </a:pPr>
-            <a:r>
-              <a:rPr lang="en-US" sz="1300" b="1" dirty="0">
-                <a:solidFill>
-                  <a:srgbClr val="0E1C42"/>
-                </a:solidFill>
-                <a:latin typeface="Calibri" pitchFamily="34" charset="0"/>
-                <a:ea typeface="Calibri" pitchFamily="34" charset="-122"/>
-                <a:cs typeface="Calibri" pitchFamily="34" charset="-120"/>
-              </a:rPr>
-              <a:t>Quick check:
-</a:t>
-            </a:r>
-            <a:pPr indent="0" marL="0">
-              <a:spcAft>
-                <a:spcPts val="200"/>
-              </a:spcAft>
-              <a:buNone/>
-            </a:pPr>
-            <a:r>
-              <a:rPr lang="en-US" sz="1200" dirty="0">
+            <a:off x="365760" y="2651760"/>
+            <a:ext cx="8412480" cy="365760"/>
+          </a:xfrm>
+          <a:prstGeom prst="rect">
+            <a:avLst/>
+          </a:prstGeom>
+          <a:noFill/>
+          <a:ln/>
+        </p:spPr>
+        <p:txBody>
+          <a:bodyPr wrap="square" lIns="0" tIns="0" rIns="0" bIns="0" rtlCol="0" anchor="ctr"/>
+          <a:lstStyle/>
+          <a:p>
+            <a:pPr indent="0" marL="0">
+              <a:buNone/>
+            </a:pPr>
+            <a:r>
+              <a:rPr lang="en-US" sz="1500" b="1" dirty="0">
                 <a:solidFill>
                   <a:srgbClr val="1E293B"/>
                 </a:solidFill>
@@ -5457,17 +5606,13 @@
                 <a:ea typeface="Calibri" pitchFamily="34" charset="-122"/>
                 <a:cs typeface="Calibri" pitchFamily="34" charset="-120"/>
               </a:rPr>
-              <a:t>□ Capital letters at the start of every sentence
-</a:t>
-            </a:r>
-            <a:pPr indent="0" marL="0">
-              <a:spcAft>
-                <a:spcPts val="200"/>
-              </a:spcAft>
-              <a:buNone/>
-            </a:pPr>
-            <a:r>
-              <a:rPr lang="en-US" sz="1200" dirty="0">
+              <a:t>Quick check:  </a:t>
+            </a:r>
+            <a:pPr indent="0" marL="0">
+              <a:buNone/>
+            </a:pPr>
+            <a:r>
+              <a:rPr lang="en-US" sz="1500" dirty="0">
                 <a:solidFill>
                   <a:srgbClr val="1E293B"/>
                 </a:solidFill>
@@ -5475,45 +5620,9 @@
                 <a:ea typeface="Calibri" pitchFamily="34" charset="-122"/>
                 <a:cs typeface="Calibri" pitchFamily="34" charset="-120"/>
               </a:rPr>
-              <a:t>□ End punctuation ( .  ?  ! )
-</a:t>
-            </a:r>
-            <a:pPr indent="0" marL="0">
-              <a:spcAft>
-                <a:spcPts val="200"/>
-              </a:spcAft>
-              <a:buNone/>
-            </a:pPr>
-            <a:r>
-              <a:rPr lang="en-US" sz="1200" dirty="0">
-                <a:solidFill>
-                  <a:srgbClr val="1E293B"/>
-                </a:solidFill>
-                <a:latin typeface="Calibri" pitchFamily="34" charset="0"/>
-                <a:ea typeface="Calibri" pitchFamily="34" charset="-122"/>
-                <a:cs typeface="Calibri" pitchFamily="34" charset="-120"/>
-              </a:rPr>
-              <a:t>□ Spelling — circle any words that look wrong
-</a:t>
-            </a:r>
-            <a:pPr indent="0" marL="0">
-              <a:spcAft>
-                <a:spcPts val="200"/>
-              </a:spcAft>
-              <a:buNone/>
-            </a:pPr>
-            <a:r>
-              <a:rPr lang="en-US" sz="1200" dirty="0">
-                <a:solidFill>
-                  <a:srgbClr val="1E293B"/>
-                </a:solidFill>
-                <a:latin typeface="Calibri" pitchFamily="34" charset="0"/>
-                <a:ea typeface="Calibri" pitchFamily="34" charset="-122"/>
-                <a:cs typeface="Calibri" pitchFamily="34" charset="-120"/>
-              </a:rPr>
-              <a:t>□ Read it quietly to yourself — does it sound right?</a:t>
-            </a:r>
-            <a:endParaRPr lang="en-US" sz="1300" dirty="0"/>
+              <a:t>capitals  ·  end punctuation  ·  circle a word you are unsure of  ·  read it aloud</a:t>
+            </a:r>
+            <a:endParaRPr lang="en-US" sz="1500" dirty="0"/>
           </a:p>
         </p:txBody>
       </p:sp>
@@ -5551,39 +5660,23 @@
       </p:grpSpPr>
       <p:sp>
         <p:nvSpPr>
-          <p:cNvPr id="2" name="Text 0"/>
-          <p:cNvSpPr/>
-          <p:nvPr/>
-        </p:nvSpPr>
-        <p:spPr>
-          <a:xfrm>
-            <a:off x="3657600" y="457200"/>
-            <a:ext cx="1828800" cy="731520"/>
-          </a:xfrm>
-          <a:prstGeom prst="rect">
-            <a:avLst/>
-          </a:prstGeom>
-          <a:noFill/>
-          <a:ln/>
-        </p:spPr>
-        <p:txBody>
-          <a:bodyPr wrap="square" lIns="0" tIns="0" rIns="0" bIns="0" rtlCol="0" anchor="ctr"/>
-          <a:lstStyle/>
-          <a:p>
-            <a:pPr algn="ctr" indent="0" marL="0">
-              <a:buNone/>
-            </a:pPr>
-            <a:r>
-              <a:rPr lang="en-US" sz="4400" dirty="0">
-                <a:solidFill>
-                  <a:srgbClr val="000000"/>
-                </a:solidFill>
-              </a:rPr>
-              <a:t>🗣️</a:t>
-            </a:r>
-            <a:endParaRPr lang="en-US" sz="4400" dirty="0"/>
-          </a:p>
-        </p:txBody>
+          <p:cNvPr id="2" name="Shape 0"/>
+          <p:cNvSpPr/>
+          <p:nvPr/>
+        </p:nvSpPr>
+        <p:spPr>
+          <a:xfrm>
+            <a:off x="0" y="0"/>
+            <a:ext cx="9144000" cy="566928"/>
+          </a:xfrm>
+          <a:prstGeom prst="rect">
+            <a:avLst/>
+          </a:prstGeom>
+          <a:solidFill>
+            <a:srgbClr val="55C8E8"/>
+          </a:solidFill>
+          <a:ln/>
+        </p:spPr>
       </p:sp>
       <p:sp>
         <p:nvSpPr>
@@ -5593,24 +5686,63 @@
         </p:nvSpPr>
         <p:spPr>
           <a:xfrm>
-            <a:off x="914400" y="1097280"/>
-            <a:ext cx="7315200" cy="640080"/>
-          </a:xfrm>
-          <a:prstGeom prst="rect">
-            <a:avLst/>
-          </a:prstGeom>
-          <a:noFill/>
-          <a:ln/>
-        </p:spPr>
-        <p:txBody>
-          <a:bodyPr wrap="square" lIns="0" tIns="0" rIns="0" bIns="0" rtlCol="0" anchor="ctr"/>
-          <a:lstStyle/>
-          <a:p>
-            <a:pPr algn="ctr" indent="0" marL="0">
-              <a:buNone/>
-            </a:pPr>
-            <a:r>
-              <a:rPr lang="en-US" sz="3400" b="1" dirty="0">
+            <a:off x="365760" y="54864"/>
+            <a:ext cx="8412480" cy="457200"/>
+          </a:xfrm>
+          <a:prstGeom prst="rect">
+            <a:avLst/>
+          </a:prstGeom>
+          <a:noFill/>
+          <a:ln/>
+        </p:spPr>
+        <p:txBody>
+          <a:bodyPr wrap="square" lIns="0" tIns="0" rIns="0" bIns="0" rtlCol="0" anchor="ctr"/>
+          <a:lstStyle/>
+          <a:p>
+            <a:pPr indent="0" marL="0">
+              <a:buNone/>
+            </a:pPr>
+            <a:r>
+              <a:rPr lang="en-US" sz="2200" b="1" dirty="0">
+                <a:solidFill>
+                  <a:srgbClr val="FFFFFF"/>
+                </a:solidFill>
+                <a:latin typeface="Calibri" pitchFamily="34" charset="0"/>
+                <a:ea typeface="Calibri" pitchFamily="34" charset="-122"/>
+                <a:cs typeface="Calibri" pitchFamily="34" charset="-120"/>
+              </a:rPr>
+              <a:t>🗣️  Share Time</a:t>
+            </a:r>
+            <a:endParaRPr lang="en-US" sz="2200" dirty="0"/>
+          </a:p>
+        </p:txBody>
+      </p:sp>
+      <p:sp>
+        <p:nvSpPr>
+          <p:cNvPr id="4" name="Text 2"/>
+          <p:cNvSpPr/>
+          <p:nvPr/>
+        </p:nvSpPr>
+        <p:spPr>
+          <a:xfrm>
+            <a:off x="365760" y="1005840"/>
+            <a:ext cx="8412480" cy="548640"/>
+          </a:xfrm>
+          <a:prstGeom prst="rect">
+            <a:avLst/>
+          </a:prstGeom>
+          <a:noFill/>
+          <a:ln/>
+        </p:spPr>
+        <p:txBody>
+          <a:bodyPr wrap="square" lIns="0" tIns="0" rIns="0" bIns="0" rtlCol="0" anchor="ctr"/>
+          <a:lstStyle/>
+          <a:p>
+            <a:pPr indent="0" marL="0">
+              <a:buNone/>
+            </a:pPr>
+            <a:r>
+              <a:rPr lang="en-US" sz="2600" b="1" dirty="0">
                 <a:solidFill>
                   <a:srgbClr val="0E1C42"/>
                 </a:solidFill>
@@ -5618,191 +5750,48 @@
                 <a:ea typeface="Calibri" pitchFamily="34" charset="-122"/>
                 <a:cs typeface="Calibri" pitchFamily="34" charset="-120"/>
               </a:rPr>
-              <a:t>Share Time</a:t>
-            </a:r>
-            <a:endParaRPr lang="en-US" sz="3400" dirty="0"/>
-          </a:p>
-        </p:txBody>
-      </p:sp>
-      <p:sp>
-        <p:nvSpPr>
-          <p:cNvPr id="4" name="Text 2"/>
-          <p:cNvSpPr/>
-          <p:nvPr/>
-        </p:nvSpPr>
-        <p:spPr>
-          <a:xfrm>
-            <a:off x="914400" y="1737360"/>
-            <a:ext cx="7315200" cy="457200"/>
-          </a:xfrm>
-          <a:prstGeom prst="rect">
-            <a:avLst/>
-          </a:prstGeom>
-          <a:noFill/>
-          <a:ln/>
-        </p:spPr>
-        <p:txBody>
-          <a:bodyPr wrap="square" lIns="0" tIns="0" rIns="0" bIns="0" rtlCol="0" anchor="ctr"/>
-          <a:lstStyle/>
-          <a:p>
-            <a:pPr algn="ctr" indent="0" marL="0">
+              <a:t>3 minutes — let's hear your writing!</a:t>
+            </a:r>
+            <a:endParaRPr lang="en-US" sz="2600" dirty="0"/>
+          </a:p>
+        </p:txBody>
+      </p:sp>
+      <p:sp>
+        <p:nvSpPr>
+          <p:cNvPr id="5" name="Text 3"/>
+          <p:cNvSpPr/>
+          <p:nvPr/>
+        </p:nvSpPr>
+        <p:spPr>
+          <a:xfrm>
+            <a:off x="365760" y="1691640"/>
+            <a:ext cx="8412480" cy="457200"/>
+          </a:xfrm>
+          <a:prstGeom prst="rect">
+            <a:avLst/>
+          </a:prstGeom>
+          <a:noFill/>
+          <a:ln/>
+        </p:spPr>
+        <p:txBody>
+          <a:bodyPr wrap="square" lIns="0" tIns="0" rIns="0" bIns="0" rtlCol="0" anchor="ctr"/>
+          <a:lstStyle/>
+          <a:p>
+            <a:pPr indent="0" marL="0">
               <a:buNone/>
             </a:pPr>
             <a:r>
               <a:rPr lang="en-US" sz="1700" dirty="0">
                 <a:solidFill>
-                  <a:srgbClr val="55C8E8"/>
-                </a:solidFill>
-                <a:latin typeface="Calibri" pitchFamily="34" charset="0"/>
-                <a:ea typeface="Calibri" pitchFamily="34" charset="-122"/>
-                <a:cs typeface="Calibri" pitchFamily="34" charset="-120"/>
-              </a:rPr>
-              <a:t>3 minutes — let's hear your writing!</a:t>
+                  <a:srgbClr val="1E293B"/>
+                </a:solidFill>
+                <a:latin typeface="Calibri" pitchFamily="34" charset="0"/>
+                <a:ea typeface="Calibri" pitchFamily="34" charset="-122"/>
+                <a:cs typeface="Calibri" pitchFamily="34" charset="-120"/>
+              </a:rPr>
+              <a:t>Raise your hand  ·  paste it in the chat  ·  or hold your paper up to the camera</a:t>
             </a:r>
             <a:endParaRPr lang="en-US" sz="1700" dirty="0"/>
-          </a:p>
-        </p:txBody>
-      </p:sp>
-      <p:sp>
-        <p:nvSpPr>
-          <p:cNvPr id="5" name="Shape 3"/>
-          <p:cNvSpPr/>
-          <p:nvPr/>
-        </p:nvSpPr>
-        <p:spPr>
-          <a:xfrm>
-            <a:off x="1828800" y="2468880"/>
-            <a:ext cx="5486400" cy="1645920"/>
-          </a:xfrm>
-          <a:prstGeom prst="roundRect">
-            <a:avLst>
-              <a:gd name="adj" fmla="val 6667"/>
-            </a:avLst>
-          </a:prstGeom>
-          <a:solidFill>
-            <a:srgbClr val="FFFFFF"/>
-          </a:solidFill>
-          <a:ln/>
-          <a:effectLst>
-            <a:outerShdw sx="100000" sy="100000" kx="0" ky="0" algn="bl" rotWithShape="0" blurRad="101600" dist="38100" dir="2700000">
-              <a:srgbClr val="000000">
-                <a:alpha val="12000"/>
-              </a:srgbClr>
-            </a:outerShdw>
-          </a:effectLst>
-        </p:spPr>
-      </p:sp>
-      <p:sp>
-        <p:nvSpPr>
-          <p:cNvPr id="6" name="Text 4"/>
-          <p:cNvSpPr/>
-          <p:nvPr/>
-        </p:nvSpPr>
-        <p:spPr>
-          <a:xfrm>
-            <a:off x="2103120" y="2560320"/>
-            <a:ext cx="4937760" cy="1463040"/>
-          </a:xfrm>
-          <a:prstGeom prst="rect">
-            <a:avLst/>
-          </a:prstGeom>
-          <a:noFill/>
-          <a:ln/>
-        </p:spPr>
-        <p:txBody>
-          <a:bodyPr wrap="square" lIns="0" tIns="0" rIns="0" bIns="0" rtlCol="0" anchor="t"/>
-          <a:lstStyle/>
-          <a:p>
-            <a:pPr indent="0" marL="0">
-              <a:spcAft>
-                <a:spcPts val="200"/>
-              </a:spcAft>
-              <a:buNone/>
-            </a:pPr>
-            <a:r>
-              <a:rPr lang="en-US" sz="1400" b="1" dirty="0">
-                <a:solidFill>
-                  <a:srgbClr val="0E1C42"/>
-                </a:solidFill>
-                <a:latin typeface="Calibri" pitchFamily="34" charset="0"/>
-                <a:ea typeface="Calibri" pitchFamily="34" charset="-122"/>
-                <a:cs typeface="Calibri" pitchFamily="34" charset="-120"/>
-              </a:rPr>
-              <a:t>How to share:
-</a:t>
-            </a:r>
-            <a:pPr indent="0" marL="0">
-              <a:spcAft>
-                <a:spcPts val="200"/>
-              </a:spcAft>
-              <a:buNone/>
-            </a:pPr>
-            <a:r>
-              <a:rPr lang="en-US" sz="1300" dirty="0">
-                <a:solidFill>
-                  <a:srgbClr val="1E293B"/>
-                </a:solidFill>
-                <a:latin typeface="Calibri" pitchFamily="34" charset="0"/>
-                <a:ea typeface="Calibri" pitchFamily="34" charset="-122"/>
-                <a:cs typeface="Calibri" pitchFamily="34" charset="-120"/>
-              </a:rPr>
-              <a:t>✋ Raise your hand if you want to read yours aloud
-</a:t>
-            </a:r>
-            <a:pPr indent="0" marL="0">
-              <a:spcAft>
-                <a:spcPts val="200"/>
-              </a:spcAft>
-              <a:buNone/>
-            </a:pPr>
-            <a:r>
-              <a:rPr lang="en-US" sz="1300" dirty="0">
-                <a:solidFill>
-                  <a:srgbClr val="1E293B"/>
-                </a:solidFill>
-                <a:latin typeface="Calibri" pitchFamily="34" charset="0"/>
-                <a:ea typeface="Calibri" pitchFamily="34" charset="-122"/>
-                <a:cs typeface="Calibri" pitchFamily="34" charset="-120"/>
-              </a:rPr>
-              <a:t>💬 Or paste your writing in the chat
-</a:t>
-            </a:r>
-            <a:pPr indent="0" marL="0">
-              <a:spcAft>
-                <a:spcPts val="200"/>
-              </a:spcAft>
-              <a:buNone/>
-            </a:pPr>
-            <a:r>
-              <a:rPr lang="en-US" sz="1300" dirty="0">
-                <a:solidFill>
-                  <a:srgbClr val="1E293B"/>
-                </a:solidFill>
-                <a:latin typeface="Calibri" pitchFamily="34" charset="0"/>
-                <a:ea typeface="Calibri" pitchFamily="34" charset="-122"/>
-                <a:cs typeface="Calibri" pitchFamily="34" charset="-120"/>
-              </a:rPr>
-              <a:t>👂 Listen respectfully when others share
-</a:t>
-            </a:r>
-            <a:pPr indent="0" marL="0">
-              <a:spcAft>
-                <a:spcPts val="200"/>
-              </a:spcAft>
-              <a:buNone/>
-            </a:pPr>
-            <a:r>
-              <a:rPr lang="en-US" sz="1200" i="1" dirty="0">
-                <a:solidFill>
-                  <a:srgbClr val="64748B"/>
-                </a:solidFill>
-                <a:latin typeface="Calibri" pitchFamily="34" charset="0"/>
-                <a:ea typeface="Calibri" pitchFamily="34" charset="-122"/>
-                <a:cs typeface="Calibri" pitchFamily="34" charset="-120"/>
-              </a:rPr>
-              <a:t>Every writer's ideas matter — there are no wrong answers.</a:t>
-            </a:r>
-            <a:endParaRPr lang="en-US" sz="1400" dirty="0"/>
           </a:p>
         </p:txBody>
       </p:sp>
@@ -5820,7 +5809,7 @@
     <p:bg>
       <p:bgPr>
         <a:solidFill>
-          <a:srgbClr val="E5F7FC"/>
+          <a:srgbClr val="F8FAFC"/>
         </a:solidFill>
       </p:bgPr>
     </p:bg>
@@ -5840,81 +5829,17 @@
       </p:grpSpPr>
       <p:sp>
         <p:nvSpPr>
-          <p:cNvPr id="2" name="Text 0"/>
-          <p:cNvSpPr/>
-          <p:nvPr/>
-        </p:nvSpPr>
-        <p:spPr>
-          <a:xfrm>
-            <a:off x="365760" y="164592"/>
-            <a:ext cx="5943600" cy="566928"/>
-          </a:xfrm>
-          <a:prstGeom prst="rect">
-            <a:avLst/>
-          </a:prstGeom>
-          <a:noFill/>
-          <a:ln/>
-        </p:spPr>
-        <p:txBody>
-          <a:bodyPr wrap="square" lIns="0" tIns="0" rIns="0" bIns="0" rtlCol="0" anchor="ctr"/>
-          <a:lstStyle/>
-          <a:p>
-            <a:pPr algn="l" indent="0" marL="0">
-              <a:buNone/>
-            </a:pPr>
-            <a:r>
-              <a:rPr lang="en-US" sz="2800" b="1" dirty="0">
-                <a:solidFill>
-                  <a:srgbClr val="0E1C42"/>
-                </a:solidFill>
-                <a:latin typeface="Calibri" pitchFamily="34" charset="0"/>
-                <a:ea typeface="Calibri" pitchFamily="34" charset="-122"/>
-                <a:cs typeface="Calibri" pitchFamily="34" charset="-120"/>
-              </a:rPr>
-              <a:t>💡 Today's Focus</a:t>
-            </a:r>
-            <a:endParaRPr lang="en-US" sz="2800" dirty="0"/>
-          </a:p>
-        </p:txBody>
-      </p:sp>
-      <p:sp>
-        <p:nvSpPr>
-          <p:cNvPr id="3" name="Shape 1"/>
-          <p:cNvSpPr/>
-          <p:nvPr/>
-        </p:nvSpPr>
-        <p:spPr>
-          <a:xfrm>
-            <a:off x="365760" y="749808"/>
-            <a:ext cx="8412480" cy="0"/>
-          </a:xfrm>
-          <a:prstGeom prst="line">
-            <a:avLst/>
-          </a:prstGeom>
-          <a:noFill/>
-          <a:ln w="19050">
-            <a:solidFill>
-              <a:srgbClr val="5CB85C"/>
-            </a:solidFill>
-            <a:prstDash val="solid"/>
-          </a:ln>
-        </p:spPr>
-      </p:sp>
-      <p:sp>
-        <p:nvSpPr>
-          <p:cNvPr id="4" name="Shape 2"/>
-          <p:cNvSpPr/>
-          <p:nvPr/>
-        </p:nvSpPr>
-        <p:spPr>
-          <a:xfrm>
-            <a:off x="6492240" y="173736"/>
-            <a:ext cx="2286000" cy="502920"/>
-          </a:xfrm>
-          <a:prstGeom prst="roundRect">
-            <a:avLst>
-              <a:gd name="adj" fmla="val 21818"/>
-            </a:avLst>
+          <p:cNvPr id="2" name="Shape 0"/>
+          <p:cNvSpPr/>
+          <p:nvPr/>
+        </p:nvSpPr>
+        <p:spPr>
+          <a:xfrm>
+            <a:off x="0" y="0"/>
+            <a:ext cx="9144000" cy="566928"/>
+          </a:xfrm>
+          <a:prstGeom prst="rect">
+            <a:avLst/>
           </a:prstGeom>
           <a:solidFill>
             <a:srgbClr val="5CB85C"/>
@@ -5924,30 +5849,108 @@
       </p:sp>
       <p:sp>
         <p:nvSpPr>
+          <p:cNvPr id="3" name="Text 1"/>
+          <p:cNvSpPr/>
+          <p:nvPr/>
+        </p:nvSpPr>
+        <p:spPr>
+          <a:xfrm>
+            <a:off x="365760" y="54864"/>
+            <a:ext cx="8412480" cy="457200"/>
+          </a:xfrm>
+          <a:prstGeom prst="rect">
+            <a:avLst/>
+          </a:prstGeom>
+          <a:noFill/>
+          <a:ln/>
+        </p:spPr>
+        <p:txBody>
+          <a:bodyPr wrap="square" lIns="0" tIns="0" rIns="0" bIns="0" rtlCol="0" anchor="ctr"/>
+          <a:lstStyle/>
+          <a:p>
+            <a:pPr indent="0" marL="0">
+              <a:buNone/>
+            </a:pPr>
+            <a:r>
+              <a:rPr lang="en-US" sz="2200" b="1" dirty="0">
+                <a:solidFill>
+                  <a:srgbClr val="FFFFFF"/>
+                </a:solidFill>
+                <a:latin typeface="Calibri" pitchFamily="34" charset="0"/>
+                <a:ea typeface="Calibri" pitchFamily="34" charset="-122"/>
+                <a:cs typeface="Calibri" pitchFamily="34" charset="-120"/>
+              </a:rPr>
+              <a:t>📖  Today</a:t>
+            </a:r>
+            <a:endParaRPr lang="en-US" sz="2200" dirty="0"/>
+          </a:p>
+        </p:txBody>
+      </p:sp>
+      <p:sp>
+        <p:nvSpPr>
+          <p:cNvPr id="4" name="Text 2"/>
+          <p:cNvSpPr/>
+          <p:nvPr/>
+        </p:nvSpPr>
+        <p:spPr>
+          <a:xfrm>
+            <a:off x="365760" y="777240"/>
+            <a:ext cx="8229600" cy="237744"/>
+          </a:xfrm>
+          <a:prstGeom prst="rect">
+            <a:avLst/>
+          </a:prstGeom>
+          <a:noFill/>
+          <a:ln/>
+        </p:spPr>
+        <p:txBody>
+          <a:bodyPr wrap="square" lIns="0" tIns="0" rIns="0" bIns="0" rtlCol="0" anchor="ctr"/>
+          <a:lstStyle/>
+          <a:p>
+            <a:pPr indent="0" marL="0">
+              <a:buNone/>
+            </a:pPr>
+            <a:r>
+              <a:rPr lang="en-US" sz="1100" b="1" spc="100" kern="0" dirty="0">
+                <a:solidFill>
+                  <a:srgbClr val="8B6FC0"/>
+                </a:solidFill>
+                <a:latin typeface="Calibri" pitchFamily="34" charset="0"/>
+                <a:ea typeface="Calibri" pitchFamily="34" charset="-122"/>
+                <a:cs typeface="Calibri" pitchFamily="34" charset="-120"/>
+              </a:rPr>
+              <a:t>READING</a:t>
+            </a:r>
+            <a:endParaRPr lang="en-US" sz="1100" dirty="0"/>
+          </a:p>
+        </p:txBody>
+      </p:sp>
+      <p:sp>
+        <p:nvSpPr>
           <p:cNvPr id="5" name="Text 3"/>
           <p:cNvSpPr/>
           <p:nvPr/>
         </p:nvSpPr>
         <p:spPr>
           <a:xfrm>
-            <a:off x="6492240" y="173736"/>
-            <a:ext cx="2286000" cy="502920"/>
-          </a:xfrm>
-          <a:prstGeom prst="rect">
-            <a:avLst/>
-          </a:prstGeom>
-          <a:noFill/>
-          <a:ln/>
-        </p:spPr>
-        <p:txBody>
-          <a:bodyPr wrap="square" lIns="0" tIns="0" rIns="0" bIns="0" rtlCol="0" anchor="ctr"/>
-          <a:lstStyle/>
-          <a:p>
-            <a:pPr algn="ctr" indent="0" marL="0">
-              <a:buNone/>
-            </a:pPr>
-            <a:r>
-              <a:rPr lang="en-US" sz="1100" b="1" dirty="0">
+            <a:off x="365760" y="1014984"/>
+            <a:ext cx="8412480" cy="365760"/>
+          </a:xfrm>
+          <a:prstGeom prst="rect">
+            <a:avLst/>
+          </a:prstGeom>
+          <a:noFill/>
+          <a:ln/>
+        </p:spPr>
+        <p:txBody>
+          <a:bodyPr wrap="square" lIns="0" tIns="0" rIns="0" bIns="0" rtlCol="0" anchor="ctr"/>
+          <a:lstStyle/>
+          <a:p>
+            <a:pPr indent="0" marL="0">
+              <a:buNone/>
+            </a:pPr>
+            <a:r>
+              <a:rPr lang="en-US" sz="2000" b="1" dirty="0">
                 <a:solidFill>
                   <a:srgbClr val="0E1C42"/>
                 </a:solidFill>
@@ -5955,7 +5958,46 @@
                 <a:ea typeface="Calibri" pitchFamily="34" charset="-122"/>
                 <a:cs typeface="Calibri" pitchFamily="34" charset="-120"/>
               </a:rPr>
-              <a:t>CHAT PROMPT</a:t>
+              <a:t>📰 Read: What Is a Map?</a:t>
+            </a:r>
+            <a:endParaRPr lang="en-US" sz="2000" dirty="0"/>
+          </a:p>
+        </p:txBody>
+      </p:sp>
+      <p:sp>
+        <p:nvSpPr>
+          <p:cNvPr id="6" name="Text 4"/>
+          <p:cNvSpPr/>
+          <p:nvPr/>
+        </p:nvSpPr>
+        <p:spPr>
+          <a:xfrm>
+            <a:off x="365760" y="1508760"/>
+            <a:ext cx="8229600" cy="237744"/>
+          </a:xfrm>
+          <a:prstGeom prst="rect">
+            <a:avLst/>
+          </a:prstGeom>
+          <a:noFill/>
+          <a:ln/>
+        </p:spPr>
+        <p:txBody>
+          <a:bodyPr wrap="square" lIns="0" tIns="0" rIns="0" bIns="0" rtlCol="0" anchor="ctr"/>
+          <a:lstStyle/>
+          <a:p>
+            <a:pPr indent="0" marL="0">
+              <a:buNone/>
+            </a:pPr>
+            <a:r>
+              <a:rPr lang="en-US" sz="1100" b="1" spc="100" kern="0" dirty="0">
+                <a:solidFill>
+                  <a:srgbClr val="C7922C"/>
+                </a:solidFill>
+                <a:latin typeface="Calibri" pitchFamily="34" charset="0"/>
+                <a:ea typeface="Calibri" pitchFamily="34" charset="-122"/>
+                <a:cs typeface="Calibri" pitchFamily="34" charset="-120"/>
+              </a:rPr>
+              <a:t>BIG QUESTION</a:t>
             </a:r>
             <a:endParaRPr lang="en-US" sz="1100" dirty="0"/>
           </a:p>
@@ -5963,63 +6005,24 @@
       </p:sp>
       <p:sp>
         <p:nvSpPr>
-          <p:cNvPr id="6" name="Text 4"/>
-          <p:cNvSpPr/>
-          <p:nvPr/>
-        </p:nvSpPr>
-        <p:spPr>
-          <a:xfrm>
-            <a:off x="457200" y="914400"/>
-            <a:ext cx="8046720" cy="292608"/>
-          </a:xfrm>
-          <a:prstGeom prst="rect">
-            <a:avLst/>
-          </a:prstGeom>
-          <a:noFill/>
-          <a:ln/>
-        </p:spPr>
-        <p:txBody>
-          <a:bodyPr wrap="square" lIns="0" tIns="0" rIns="0" bIns="0" rtlCol="0" anchor="ctr"/>
-          <a:lstStyle/>
-          <a:p>
-            <a:pPr indent="0" marL="0">
-              <a:buNone/>
-            </a:pPr>
-            <a:r>
-              <a:rPr lang="en-US" sz="1100" b="1" spc="200" kern="0" dirty="0">
-                <a:solidFill>
-                  <a:srgbClr val="C7922C"/>
-                </a:solidFill>
-                <a:latin typeface="Calibri" pitchFamily="34" charset="0"/>
-                <a:ea typeface="Calibri" pitchFamily="34" charset="-122"/>
-                <a:cs typeface="Calibri" pitchFamily="34" charset="-120"/>
-              </a:rPr>
-              <a:t>BIG QUESTION</a:t>
-            </a:r>
-            <a:endParaRPr lang="en-US" sz="1100" dirty="0"/>
-          </a:p>
-        </p:txBody>
-      </p:sp>
-      <p:sp>
-        <p:nvSpPr>
           <p:cNvPr id="7" name="Shape 5"/>
           <p:cNvSpPr/>
           <p:nvPr/>
         </p:nvSpPr>
         <p:spPr>
           <a:xfrm>
-            <a:off x="457200" y="1234440"/>
-            <a:ext cx="8229600" cy="640080"/>
+            <a:off x="365760" y="1746504"/>
+            <a:ext cx="8412480" cy="731520"/>
           </a:xfrm>
           <a:prstGeom prst="roundRect">
             <a:avLst>
-              <a:gd name="adj" fmla="val 14286"/>
+              <a:gd name="adj" fmla="val 12500"/>
             </a:avLst>
           </a:prstGeom>
           <a:solidFill>
             <a:srgbClr val="FEF6E8"/>
           </a:solidFill>
-          <a:ln w="12700">
+          <a:ln w="19050">
             <a:solidFill>
               <a:srgbClr val="C7922C"/>
             </a:solidFill>
@@ -6042,24 +6045,24 @@
         </p:nvSpPr>
         <p:spPr>
           <a:xfrm>
-            <a:off x="640080" y="1344168"/>
-            <a:ext cx="7863840" cy="411480"/>
-          </a:xfrm>
-          <a:prstGeom prst="rect">
-            <a:avLst/>
-          </a:prstGeom>
-          <a:noFill/>
-          <a:ln/>
-        </p:spPr>
-        <p:txBody>
-          <a:bodyPr wrap="square" lIns="0" tIns="0" rIns="0" bIns="0" rtlCol="0" anchor="ctr"/>
-          <a:lstStyle/>
-          <a:p>
-            <a:pPr indent="0" marL="0">
-              <a:buNone/>
-            </a:pPr>
-            <a:r>
-              <a:rPr lang="en-US" sz="1800" i="1" dirty="0">
+            <a:off x="594360" y="1874520"/>
+            <a:ext cx="7955280" cy="475488"/>
+          </a:xfrm>
+          <a:prstGeom prst="rect">
+            <a:avLst/>
+          </a:prstGeom>
+          <a:noFill/>
+          <a:ln/>
+        </p:spPr>
+        <p:txBody>
+          <a:bodyPr wrap="square" lIns="0" tIns="0" rIns="0" bIns="0" rtlCol="0" anchor="ctr"/>
+          <a:lstStyle/>
+          <a:p>
+            <a:pPr indent="0" marL="0">
+              <a:buNone/>
+            </a:pPr>
+            <a:r>
+              <a:rPr lang="en-US" sz="1700" dirty="0">
                 <a:solidFill>
                   <a:srgbClr val="1E293B"/>
                 </a:solidFill>
@@ -6069,43 +6072,48 @@
               </a:rPr>
               <a:t>How do maps help people find their way and understand the world around them?</a:t>
             </a:r>
-            <a:endParaRPr lang="en-US" sz="1800" dirty="0"/>
-          </a:p>
-        </p:txBody>
-      </p:sp>
-      <p:sp>
-        <p:nvSpPr>
-          <p:cNvPr id="9" name="Shape 7"/>
-          <p:cNvSpPr/>
-          <p:nvPr/>
-        </p:nvSpPr>
-        <p:spPr>
-          <a:xfrm>
-            <a:off x="457200" y="1965960"/>
-            <a:ext cx="8229600" cy="640080"/>
-          </a:xfrm>
-          <a:prstGeom prst="roundRect">
-            <a:avLst>
-              <a:gd name="adj" fmla="val 14286"/>
-            </a:avLst>
-          </a:prstGeom>
-          <a:solidFill>
-            <a:srgbClr val="FEF6E8"/>
-          </a:solidFill>
-          <a:ln w="12700">
-            <a:solidFill>
-              <a:srgbClr val="C7922C"/>
-            </a:solidFill>
-            <a:prstDash val="solid"/>
-          </a:ln>
-          <a:effectLst>
-            <a:outerShdw sx="100000" sy="100000" kx="0" ky="0" algn="bl" rotWithShape="0" blurRad="101600" dist="38100" dir="2700000">
-              <a:srgbClr val="000000">
-                <a:alpha val="12000"/>
-              </a:srgbClr>
-            </a:outerShdw>
-          </a:effectLst>
-        </p:spPr>
+            <a:endParaRPr lang="en-US" sz="1700" dirty="0"/>
+          </a:p>
+        </p:txBody>
+      </p:sp>
+      <p:sp>
+        <p:nvSpPr>
+          <p:cNvPr id="9" name="Text 7"/>
+          <p:cNvSpPr/>
+          <p:nvPr/>
+        </p:nvSpPr>
+        <p:spPr>
+          <a:xfrm>
+            <a:off x="365760" y="2606040"/>
+            <a:ext cx="8229600" cy="237744"/>
+          </a:xfrm>
+          <a:prstGeom prst="rect">
+            <a:avLst/>
+          </a:prstGeom>
+          <a:noFill/>
+          <a:ln/>
+        </p:spPr>
+        <p:txBody>
+          <a:bodyPr wrap="square" lIns="0" tIns="0" rIns="0" bIns="0" rtlCol="0" anchor="ctr"/>
+          <a:lstStyle/>
+          <a:p>
+            <a:pPr indent="0" marL="0">
+              <a:buNone/>
+            </a:pPr>
+            <a:r>
+              <a:rPr lang="en-US" sz="1100" b="1" spc="100" kern="0" dirty="0">
+                <a:solidFill>
+                  <a:srgbClr val="55C8E8"/>
+                </a:solidFill>
+                <a:latin typeface="Calibri" pitchFamily="34" charset="0"/>
+                <a:ea typeface="Calibri" pitchFamily="34" charset="-122"/>
+                <a:cs typeface="Calibri" pitchFamily="34" charset="-120"/>
+              </a:rPr>
+              <a:t>READING LENS</a:t>
+            </a:r>
+            <a:endParaRPr lang="en-US" sz="1100" dirty="0"/>
+          </a:p>
+        </p:txBody>
       </p:sp>
       <p:sp>
         <p:nvSpPr>
@@ -6115,24 +6123,24 @@
         </p:nvSpPr>
         <p:spPr>
           <a:xfrm>
-            <a:off x="640080" y="2075688"/>
-            <a:ext cx="7863840" cy="411480"/>
-          </a:xfrm>
-          <a:prstGeom prst="rect">
-            <a:avLst/>
-          </a:prstGeom>
-          <a:noFill/>
-          <a:ln/>
-        </p:spPr>
-        <p:txBody>
-          <a:bodyPr wrap="square" lIns="0" tIns="0" rIns="0" bIns="0" rtlCol="0" anchor="ctr"/>
-          <a:lstStyle/>
-          <a:p>
-            <a:pPr indent="0" marL="0">
-              <a:buNone/>
-            </a:pPr>
-            <a:r>
-              <a:rPr lang="en-US" sz="1800" i="1" dirty="0">
+            <a:off x="365760" y="2843784"/>
+            <a:ext cx="8412480" cy="914400"/>
+          </a:xfrm>
+          <a:prstGeom prst="rect">
+            <a:avLst/>
+          </a:prstGeom>
+          <a:noFill/>
+          <a:ln/>
+        </p:spPr>
+        <p:txBody>
+          <a:bodyPr wrap="square" lIns="0" tIns="0" rIns="0" bIns="0" rtlCol="0" anchor="ctr"/>
+          <a:lstStyle/>
+          <a:p>
+            <a:pPr indent="0" marL="0">
+              <a:buNone/>
+            </a:pPr>
+            <a:r>
+              <a:rPr lang="en-US" sz="1500" dirty="0">
                 <a:solidFill>
                   <a:srgbClr val="1E293B"/>
                 </a:solidFill>
@@ -6140,9 +6148,9 @@
                 <a:ea typeface="Calibri" pitchFamily="34" charset="-122"/>
                 <a:cs typeface="Calibri" pitchFamily="34" charset="-120"/>
               </a:rPr>
-              <a:t>The text says all maps have four things: a title, compass rose, scale, and key. Which of these do you think is most important? Why?</a:t>
-            </a:r>
-            <a:endParaRPr lang="en-US" sz="1800" dirty="0"/>
+              <a:t>Good nonfiction readers look for the central idea as they read. The central idea is the most important point the author wants you to understand. Supporting details back it up.</a:t>
+            </a:r>
+            <a:endParaRPr lang="en-US" sz="1500" dirty="0"/>
           </a:p>
         </p:txBody>
       </p:sp>
@@ -6157,6 +6165,749 @@
 <file path=ppt/slides/slide7.xml><?xml version="1.0" encoding="utf-8"?>
 <p:sld xmlns:a="http://schemas.openxmlformats.org/drawingml/2006/main" xmlns:r="http://schemas.openxmlformats.org/officeDocument/2006/relationships" xmlns:p="http://schemas.openxmlformats.org/presentationml/2006/main">
   <p:cSld name="Slide 7">
+    <p:bg>
+      <p:bgPr>
+        <a:solidFill>
+          <a:srgbClr val="F8FAFC"/>
+        </a:solidFill>
+      </p:bgPr>
+    </p:bg>
+    <p:spTree>
+      <p:nvGrpSpPr>
+        <p:cNvPr id="1" name=""/>
+        <p:cNvGrpSpPr/>
+        <p:nvPr/>
+      </p:nvGrpSpPr>
+      <p:grpSpPr>
+        <a:xfrm>
+          <a:off x="0" y="0"/>
+          <a:ext cx="0" cy="0"/>
+          <a:chOff x="0" y="0"/>
+          <a:chExt cx="0" cy="0"/>
+        </a:xfrm>
+      </p:grpSpPr>
+      <p:sp>
+        <p:nvSpPr>
+          <p:cNvPr id="2" name="Shape 0"/>
+          <p:cNvSpPr/>
+          <p:nvPr/>
+        </p:nvSpPr>
+        <p:spPr>
+          <a:xfrm>
+            <a:off x="0" y="0"/>
+            <a:ext cx="9144000" cy="566928"/>
+          </a:xfrm>
+          <a:prstGeom prst="rect">
+            <a:avLst/>
+          </a:prstGeom>
+          <a:solidFill>
+            <a:srgbClr val="55C8E8"/>
+          </a:solidFill>
+          <a:ln/>
+        </p:spPr>
+      </p:sp>
+      <p:sp>
+        <p:nvSpPr>
+          <p:cNvPr id="3" name="Text 1"/>
+          <p:cNvSpPr/>
+          <p:nvPr/>
+        </p:nvSpPr>
+        <p:spPr>
+          <a:xfrm>
+            <a:off x="365760" y="54864"/>
+            <a:ext cx="8412480" cy="457200"/>
+          </a:xfrm>
+          <a:prstGeom prst="rect">
+            <a:avLst/>
+          </a:prstGeom>
+          <a:noFill/>
+          <a:ln/>
+        </p:spPr>
+        <p:txBody>
+          <a:bodyPr wrap="square" lIns="0" tIns="0" rIns="0" bIns="0" rtlCol="0" anchor="ctr"/>
+          <a:lstStyle/>
+          <a:p>
+            <a:pPr indent="0" marL="0">
+              <a:buNone/>
+            </a:pPr>
+            <a:r>
+              <a:rPr lang="en-US" sz="2200" b="1" dirty="0">
+                <a:solidFill>
+                  <a:srgbClr val="FFFFFF"/>
+                </a:solidFill>
+                <a:latin typeface="Calibri" pitchFamily="34" charset="0"/>
+                <a:ea typeface="Calibri" pitchFamily="34" charset="-122"/>
+                <a:cs typeface="Calibri" pitchFamily="34" charset="-120"/>
+              </a:rPr>
+              <a:t>✏️  Daily Oral Language</a:t>
+            </a:r>
+            <a:endParaRPr lang="en-US" sz="2200" dirty="0"/>
+          </a:p>
+        </p:txBody>
+      </p:sp>
+      <p:sp>
+        <p:nvSpPr>
+          <p:cNvPr id="4" name="Text 2"/>
+          <p:cNvSpPr/>
+          <p:nvPr/>
+        </p:nvSpPr>
+        <p:spPr>
+          <a:xfrm>
+            <a:off x="365760" y="749808"/>
+            <a:ext cx="8229600" cy="237744"/>
+          </a:xfrm>
+          <a:prstGeom prst="rect">
+            <a:avLst/>
+          </a:prstGeom>
+          <a:noFill/>
+          <a:ln/>
+        </p:spPr>
+        <p:txBody>
+          <a:bodyPr wrap="square" lIns="0" tIns="0" rIns="0" bIns="0" rtlCol="0" anchor="ctr"/>
+          <a:lstStyle/>
+          <a:p>
+            <a:pPr indent="0" marL="0">
+              <a:buNone/>
+            </a:pPr>
+            <a:r>
+              <a:rPr lang="en-US" sz="1100" b="1" spc="100" kern="0" dirty="0">
+                <a:solidFill>
+                  <a:srgbClr val="55C8E8"/>
+                </a:solidFill>
+                <a:latin typeface="Calibri" pitchFamily="34" charset="0"/>
+                <a:ea typeface="Calibri" pitchFamily="34" charset="-122"/>
+                <a:cs typeface="Calibri" pitchFamily="34" charset="-120"/>
+              </a:rPr>
+              <a:t>FIX THESE SENTENCES</a:t>
+            </a:r>
+            <a:endParaRPr lang="en-US" sz="1100" dirty="0"/>
+          </a:p>
+        </p:txBody>
+      </p:sp>
+      <p:sp>
+        <p:nvSpPr>
+          <p:cNvPr id="5" name="Shape 3"/>
+          <p:cNvSpPr/>
+          <p:nvPr/>
+        </p:nvSpPr>
+        <p:spPr>
+          <a:xfrm>
+            <a:off x="365760" y="1024128"/>
+            <a:ext cx="8412480" cy="777240"/>
+          </a:xfrm>
+          <a:prstGeom prst="roundRect">
+            <a:avLst>
+              <a:gd name="adj" fmla="val 11765"/>
+            </a:avLst>
+          </a:prstGeom>
+          <a:solidFill>
+            <a:srgbClr val="FFFFFF"/>
+          </a:solidFill>
+          <a:ln w="19050">
+            <a:solidFill>
+              <a:srgbClr val="55C8E8"/>
+            </a:solidFill>
+            <a:prstDash val="solid"/>
+          </a:ln>
+          <a:effectLst>
+            <a:outerShdw sx="100000" sy="100000" kx="0" ky="0" algn="bl" rotWithShape="0" blurRad="101600" dist="38100" dir="2700000">
+              <a:srgbClr val="000000">
+                <a:alpha val="12000"/>
+              </a:srgbClr>
+            </a:outerShdw>
+          </a:effectLst>
+        </p:spPr>
+      </p:sp>
+      <p:sp>
+        <p:nvSpPr>
+          <p:cNvPr id="6" name="Text 4"/>
+          <p:cNvSpPr/>
+          <p:nvPr/>
+        </p:nvSpPr>
+        <p:spPr>
+          <a:xfrm>
+            <a:off x="594360" y="1152144"/>
+            <a:ext cx="7955280" cy="521208"/>
+          </a:xfrm>
+          <a:prstGeom prst="rect">
+            <a:avLst/>
+          </a:prstGeom>
+          <a:noFill/>
+          <a:ln/>
+        </p:spPr>
+        <p:txBody>
+          <a:bodyPr wrap="square" lIns="0" tIns="0" rIns="0" bIns="0" rtlCol="0" anchor="ctr"/>
+          <a:lstStyle/>
+          <a:p>
+            <a:pPr indent="0" marL="0">
+              <a:buNone/>
+            </a:pPr>
+            <a:r>
+              <a:rPr lang="en-US" sz="1700" dirty="0">
+                <a:solidFill>
+                  <a:srgbClr val="1E293B"/>
+                </a:solidFill>
+                <a:latin typeface="Calibri" pitchFamily="34" charset="0"/>
+                <a:ea typeface="Calibri" pitchFamily="34" charset="-122"/>
+                <a:cs typeface="Calibri" pitchFamily="34" charset="-120"/>
+              </a:rPr>
+              <a:t>A compass rose shows the directions north, south, east, and west.</a:t>
+            </a:r>
+            <a:endParaRPr lang="en-US" sz="1700" dirty="0"/>
+          </a:p>
+        </p:txBody>
+      </p:sp>
+      <p:sp>
+        <p:nvSpPr>
+          <p:cNvPr id="7" name="Shape 5"/>
+          <p:cNvSpPr/>
+          <p:nvPr/>
+        </p:nvSpPr>
+        <p:spPr>
+          <a:xfrm>
+            <a:off x="365760" y="1874520"/>
+            <a:ext cx="8412480" cy="777240"/>
+          </a:xfrm>
+          <a:prstGeom prst="roundRect">
+            <a:avLst>
+              <a:gd name="adj" fmla="val 11765"/>
+            </a:avLst>
+          </a:prstGeom>
+          <a:solidFill>
+            <a:srgbClr val="FFFFFF"/>
+          </a:solidFill>
+          <a:ln w="19050">
+            <a:solidFill>
+              <a:srgbClr val="55C8E8"/>
+            </a:solidFill>
+            <a:prstDash val="solid"/>
+          </a:ln>
+          <a:effectLst>
+            <a:outerShdw sx="100000" sy="100000" kx="0" ky="0" algn="bl" rotWithShape="0" blurRad="101600" dist="38100" dir="2700000">
+              <a:srgbClr val="000000">
+                <a:alpha val="12000"/>
+              </a:srgbClr>
+            </a:outerShdw>
+          </a:effectLst>
+        </p:spPr>
+      </p:sp>
+      <p:sp>
+        <p:nvSpPr>
+          <p:cNvPr id="8" name="Text 6"/>
+          <p:cNvSpPr/>
+          <p:nvPr/>
+        </p:nvSpPr>
+        <p:spPr>
+          <a:xfrm>
+            <a:off x="594360" y="2002536"/>
+            <a:ext cx="7955280" cy="521208"/>
+          </a:xfrm>
+          <a:prstGeom prst="rect">
+            <a:avLst/>
+          </a:prstGeom>
+          <a:noFill/>
+          <a:ln/>
+        </p:spPr>
+        <p:txBody>
+          <a:bodyPr wrap="square" lIns="0" tIns="0" rIns="0" bIns="0" rtlCol="0" anchor="ctr"/>
+          <a:lstStyle/>
+          <a:p>
+            <a:pPr indent="0" marL="0">
+              <a:buNone/>
+            </a:pPr>
+            <a:r>
+              <a:rPr lang="en-US" sz="1700" dirty="0">
+                <a:solidFill>
+                  <a:srgbClr val="1E293B"/>
+                </a:solidFill>
+                <a:latin typeface="Calibri" pitchFamily="34" charset="0"/>
+                <a:ea typeface="Calibri" pitchFamily="34" charset="-122"/>
+                <a:cs typeface="Calibri" pitchFamily="34" charset="-120"/>
+              </a:rPr>
+              <a:t>the key on a map is sometimes called a legend it explains all the symbols on the map</a:t>
+            </a:r>
+            <a:endParaRPr lang="en-US" sz="1700" dirty="0"/>
+          </a:p>
+        </p:txBody>
+      </p:sp>
+      <p:sp>
+        <p:nvSpPr>
+          <p:cNvPr id="9" name="Text 7"/>
+          <p:cNvSpPr/>
+          <p:nvPr/>
+        </p:nvSpPr>
+        <p:spPr>
+          <a:xfrm>
+            <a:off x="365760" y="2788920"/>
+            <a:ext cx="8412480" cy="365760"/>
+          </a:xfrm>
+          <a:prstGeom prst="rect">
+            <a:avLst/>
+          </a:prstGeom>
+          <a:noFill/>
+          <a:ln/>
+        </p:spPr>
+        <p:txBody>
+          <a:bodyPr wrap="square" lIns="0" tIns="0" rIns="0" bIns="0" rtlCol="0" anchor="ctr"/>
+          <a:lstStyle/>
+          <a:p>
+            <a:pPr indent="0" marL="0">
+              <a:buNone/>
+            </a:pPr>
+            <a:r>
+              <a:rPr lang="en-US" sz="1600" b="1" dirty="0">
+                <a:solidFill>
+                  <a:srgbClr val="0E1C42"/>
+                </a:solidFill>
+                <a:latin typeface="Calibri" pitchFamily="34" charset="0"/>
+                <a:ea typeface="Calibri" pitchFamily="34" charset="-122"/>
+                <a:cs typeface="Calibri" pitchFamily="34" charset="-120"/>
+              </a:rPr>
+              <a:t>Rewrite both sentences correctly in your notebook.</a:t>
+            </a:r>
+            <a:endParaRPr lang="en-US" sz="1600" dirty="0"/>
+          </a:p>
+        </p:txBody>
+      </p:sp>
+    </p:spTree>
+  </p:cSld>
+  <p:clrMapOvr>
+    <a:masterClrMapping/>
+  </p:clrMapOvr>
+</p:sld>
+</file>
+
+<file path=ppt/slides/slide8.xml><?xml version="1.0" encoding="utf-8"?>
+<p:sld xmlns:a="http://schemas.openxmlformats.org/drawingml/2006/main" xmlns:r="http://schemas.openxmlformats.org/officeDocument/2006/relationships" xmlns:p="http://schemas.openxmlformats.org/presentationml/2006/main">
+  <p:cSld name="Slide 8">
+    <p:bg>
+      <p:bgPr>
+        <a:solidFill>
+          <a:srgbClr val="F8FAFC"/>
+        </a:solidFill>
+      </p:bgPr>
+    </p:bg>
+    <p:spTree>
+      <p:nvGrpSpPr>
+        <p:cNvPr id="1" name=""/>
+        <p:cNvGrpSpPr/>
+        <p:nvPr/>
+      </p:nvGrpSpPr>
+      <p:grpSpPr>
+        <a:xfrm>
+          <a:off x="0" y="0"/>
+          <a:ext cx="0" cy="0"/>
+          <a:chOff x="0" y="0"/>
+          <a:chExt cx="0" cy="0"/>
+        </a:xfrm>
+      </p:grpSpPr>
+      <p:sp>
+        <p:nvSpPr>
+          <p:cNvPr id="2" name="Shape 0"/>
+          <p:cNvSpPr/>
+          <p:nvPr/>
+        </p:nvSpPr>
+        <p:spPr>
+          <a:xfrm>
+            <a:off x="0" y="0"/>
+            <a:ext cx="9144000" cy="566928"/>
+          </a:xfrm>
+          <a:prstGeom prst="rect">
+            <a:avLst/>
+          </a:prstGeom>
+          <a:solidFill>
+            <a:srgbClr val="55C8E8"/>
+          </a:solidFill>
+          <a:ln/>
+        </p:spPr>
+      </p:sp>
+      <p:sp>
+        <p:nvSpPr>
+          <p:cNvPr id="3" name="Text 1"/>
+          <p:cNvSpPr/>
+          <p:nvPr/>
+        </p:nvSpPr>
+        <p:spPr>
+          <a:xfrm>
+            <a:off x="365760" y="54864"/>
+            <a:ext cx="8412480" cy="457200"/>
+          </a:xfrm>
+          <a:prstGeom prst="rect">
+            <a:avLst/>
+          </a:prstGeom>
+          <a:noFill/>
+          <a:ln/>
+        </p:spPr>
+        <p:txBody>
+          <a:bodyPr wrap="square" lIns="0" tIns="0" rIns="0" bIns="0" rtlCol="0" anchor="ctr"/>
+          <a:lstStyle/>
+          <a:p>
+            <a:pPr indent="0" marL="0">
+              <a:buNone/>
+            </a:pPr>
+            <a:r>
+              <a:rPr lang="en-US" sz="2200" b="1" dirty="0">
+                <a:solidFill>
+                  <a:srgbClr val="FFFFFF"/>
+                </a:solidFill>
+                <a:latin typeface="Calibri" pitchFamily="34" charset="0"/>
+                <a:ea typeface="Calibri" pitchFamily="34" charset="-122"/>
+                <a:cs typeface="Calibri" pitchFamily="34" charset="-120"/>
+              </a:rPr>
+              <a:t>✏️  Daily Oral Language</a:t>
+            </a:r>
+            <a:endParaRPr lang="en-US" sz="2200" dirty="0"/>
+          </a:p>
+        </p:txBody>
+      </p:sp>
+      <p:sp>
+        <p:nvSpPr>
+          <p:cNvPr id="4" name="Text 2"/>
+          <p:cNvSpPr/>
+          <p:nvPr/>
+        </p:nvSpPr>
+        <p:spPr>
+          <a:xfrm>
+            <a:off x="365760" y="749808"/>
+            <a:ext cx="8229600" cy="237744"/>
+          </a:xfrm>
+          <a:prstGeom prst="rect">
+            <a:avLst/>
+          </a:prstGeom>
+          <a:noFill/>
+          <a:ln/>
+        </p:spPr>
+        <p:txBody>
+          <a:bodyPr wrap="square" lIns="0" tIns="0" rIns="0" bIns="0" rtlCol="0" anchor="ctr"/>
+          <a:lstStyle/>
+          <a:p>
+            <a:pPr indent="0" marL="0">
+              <a:buNone/>
+            </a:pPr>
+            <a:r>
+              <a:rPr lang="en-US" sz="1100" b="1" spc="100" kern="0" dirty="0">
+                <a:solidFill>
+                  <a:srgbClr val="55C8E8"/>
+                </a:solidFill>
+                <a:latin typeface="Calibri" pitchFamily="34" charset="0"/>
+                <a:ea typeface="Calibri" pitchFamily="34" charset="-122"/>
+                <a:cs typeface="Calibri" pitchFamily="34" charset="-120"/>
+              </a:rPr>
+              <a:t>FIX THESE SENTENCES</a:t>
+            </a:r>
+            <a:endParaRPr lang="en-US" sz="1100" dirty="0"/>
+          </a:p>
+        </p:txBody>
+      </p:sp>
+      <p:sp>
+        <p:nvSpPr>
+          <p:cNvPr id="5" name="Shape 3"/>
+          <p:cNvSpPr/>
+          <p:nvPr/>
+        </p:nvSpPr>
+        <p:spPr>
+          <a:xfrm>
+            <a:off x="365760" y="1024128"/>
+            <a:ext cx="8412480" cy="777240"/>
+          </a:xfrm>
+          <a:prstGeom prst="roundRect">
+            <a:avLst>
+              <a:gd name="adj" fmla="val 11765"/>
+            </a:avLst>
+          </a:prstGeom>
+          <a:solidFill>
+            <a:srgbClr val="FFFFFF"/>
+          </a:solidFill>
+          <a:ln w="19050">
+            <a:solidFill>
+              <a:srgbClr val="55C8E8"/>
+            </a:solidFill>
+            <a:prstDash val="solid"/>
+          </a:ln>
+          <a:effectLst>
+            <a:outerShdw sx="100000" sy="100000" kx="0" ky="0" algn="bl" rotWithShape="0" blurRad="101600" dist="38100" dir="2700000">
+              <a:srgbClr val="000000">
+                <a:alpha val="12000"/>
+              </a:srgbClr>
+            </a:outerShdw>
+          </a:effectLst>
+        </p:spPr>
+      </p:sp>
+      <p:sp>
+        <p:nvSpPr>
+          <p:cNvPr id="6" name="Text 4"/>
+          <p:cNvSpPr/>
+          <p:nvPr/>
+        </p:nvSpPr>
+        <p:spPr>
+          <a:xfrm>
+            <a:off x="594360" y="1152144"/>
+            <a:ext cx="7955280" cy="521208"/>
+          </a:xfrm>
+          <a:prstGeom prst="rect">
+            <a:avLst/>
+          </a:prstGeom>
+          <a:noFill/>
+          <a:ln/>
+        </p:spPr>
+        <p:txBody>
+          <a:bodyPr wrap="square" lIns="0" tIns="0" rIns="0" bIns="0" rtlCol="0" anchor="ctr"/>
+          <a:lstStyle/>
+          <a:p>
+            <a:pPr indent="0" marL="0">
+              <a:buNone/>
+            </a:pPr>
+            <a:r>
+              <a:rPr lang="en-US" sz="1700" dirty="0">
+                <a:solidFill>
+                  <a:srgbClr val="1E293B"/>
+                </a:solidFill>
+                <a:latin typeface="Calibri" pitchFamily="34" charset="0"/>
+                <a:ea typeface="Calibri" pitchFamily="34" charset="-122"/>
+                <a:cs typeface="Calibri" pitchFamily="34" charset="-120"/>
+              </a:rPr>
+              <a:t>A compass rose shows the directions north, south, east, and west.</a:t>
+            </a:r>
+            <a:endParaRPr lang="en-US" sz="1700" dirty="0"/>
+          </a:p>
+        </p:txBody>
+      </p:sp>
+      <p:sp>
+        <p:nvSpPr>
+          <p:cNvPr id="7" name="Shape 5"/>
+          <p:cNvSpPr/>
+          <p:nvPr/>
+        </p:nvSpPr>
+        <p:spPr>
+          <a:xfrm>
+            <a:off x="365760" y="1874520"/>
+            <a:ext cx="8412480" cy="777240"/>
+          </a:xfrm>
+          <a:prstGeom prst="roundRect">
+            <a:avLst>
+              <a:gd name="adj" fmla="val 11765"/>
+            </a:avLst>
+          </a:prstGeom>
+          <a:solidFill>
+            <a:srgbClr val="FFFFFF"/>
+          </a:solidFill>
+          <a:ln w="19050">
+            <a:solidFill>
+              <a:srgbClr val="55C8E8"/>
+            </a:solidFill>
+            <a:prstDash val="solid"/>
+          </a:ln>
+          <a:effectLst>
+            <a:outerShdw sx="100000" sy="100000" kx="0" ky="0" algn="bl" rotWithShape="0" blurRad="101600" dist="38100" dir="2700000">
+              <a:srgbClr val="000000">
+                <a:alpha val="12000"/>
+              </a:srgbClr>
+            </a:outerShdw>
+          </a:effectLst>
+        </p:spPr>
+      </p:sp>
+      <p:sp>
+        <p:nvSpPr>
+          <p:cNvPr id="8" name="Text 6"/>
+          <p:cNvSpPr/>
+          <p:nvPr/>
+        </p:nvSpPr>
+        <p:spPr>
+          <a:xfrm>
+            <a:off x="594360" y="2002536"/>
+            <a:ext cx="7955280" cy="521208"/>
+          </a:xfrm>
+          <a:prstGeom prst="rect">
+            <a:avLst/>
+          </a:prstGeom>
+          <a:noFill/>
+          <a:ln/>
+        </p:spPr>
+        <p:txBody>
+          <a:bodyPr wrap="square" lIns="0" tIns="0" rIns="0" bIns="0" rtlCol="0" anchor="ctr"/>
+          <a:lstStyle/>
+          <a:p>
+            <a:pPr indent="0" marL="0">
+              <a:buNone/>
+            </a:pPr>
+            <a:r>
+              <a:rPr lang="en-US" sz="1700" dirty="0">
+                <a:solidFill>
+                  <a:srgbClr val="1E293B"/>
+                </a:solidFill>
+                <a:latin typeface="Calibri" pitchFamily="34" charset="0"/>
+                <a:ea typeface="Calibri" pitchFamily="34" charset="-122"/>
+                <a:cs typeface="Calibri" pitchFamily="34" charset="-120"/>
+              </a:rPr>
+              <a:t>the key on a map is sometimes called a legend it explains all the symbols on the map</a:t>
+            </a:r>
+            <a:endParaRPr lang="en-US" sz="1700" dirty="0"/>
+          </a:p>
+        </p:txBody>
+      </p:sp>
+      <p:sp>
+        <p:nvSpPr>
+          <p:cNvPr id="9" name="Shape 7"/>
+          <p:cNvSpPr/>
+          <p:nvPr/>
+        </p:nvSpPr>
+        <p:spPr>
+          <a:xfrm>
+            <a:off x="365760" y="2743200"/>
+            <a:ext cx="8412480" cy="1417320"/>
+          </a:xfrm>
+          <a:prstGeom prst="roundRect">
+            <a:avLst>
+              <a:gd name="adj" fmla="val 6452"/>
+            </a:avLst>
+          </a:prstGeom>
+          <a:solidFill>
+            <a:srgbClr val="E8F8EF"/>
+          </a:solidFill>
+          <a:ln/>
+          <a:effectLst>
+            <a:outerShdw sx="100000" sy="100000" kx="0" ky="0" algn="bl" rotWithShape="0" blurRad="101600" dist="38100" dir="2700000">
+              <a:srgbClr val="000000">
+                <a:alpha val="12000"/>
+              </a:srgbClr>
+            </a:outerShdw>
+          </a:effectLst>
+        </p:spPr>
+      </p:sp>
+      <p:sp>
+        <p:nvSpPr>
+          <p:cNvPr id="10" name="Text 8"/>
+          <p:cNvSpPr/>
+          <p:nvPr/>
+        </p:nvSpPr>
+        <p:spPr>
+          <a:xfrm>
+            <a:off x="566928" y="2816352"/>
+            <a:ext cx="8229600" cy="237744"/>
+          </a:xfrm>
+          <a:prstGeom prst="rect">
+            <a:avLst/>
+          </a:prstGeom>
+          <a:noFill/>
+          <a:ln/>
+        </p:spPr>
+        <p:txBody>
+          <a:bodyPr wrap="square" lIns="0" tIns="0" rIns="0" bIns="0" rtlCol="0" anchor="ctr"/>
+          <a:lstStyle/>
+          <a:p>
+            <a:pPr indent="0" marL="0">
+              <a:buNone/>
+            </a:pPr>
+            <a:r>
+              <a:rPr lang="en-US" sz="1100" b="1" spc="100" kern="0" dirty="0">
+                <a:solidFill>
+                  <a:srgbClr val="34B76F"/>
+                </a:solidFill>
+                <a:latin typeface="Calibri" pitchFamily="34" charset="0"/>
+                <a:ea typeface="Calibri" pitchFamily="34" charset="-122"/>
+                <a:cs typeface="Calibri" pitchFamily="34" charset="-120"/>
+              </a:rPr>
+              <a:t>✅  CORRECTED</a:t>
+            </a:r>
+            <a:endParaRPr lang="en-US" sz="1100" dirty="0"/>
+          </a:p>
+        </p:txBody>
+      </p:sp>
+      <p:sp>
+        <p:nvSpPr>
+          <p:cNvPr id="11" name="Text 9"/>
+          <p:cNvSpPr/>
+          <p:nvPr/>
+        </p:nvSpPr>
+        <p:spPr>
+          <a:xfrm>
+            <a:off x="566928" y="3072384"/>
+            <a:ext cx="8010144" cy="685800"/>
+          </a:xfrm>
+          <a:prstGeom prst="rect">
+            <a:avLst/>
+          </a:prstGeom>
+          <a:noFill/>
+          <a:ln/>
+        </p:spPr>
+        <p:txBody>
+          <a:bodyPr wrap="square" lIns="0" tIns="0" rIns="0" bIns="0" rtlCol="0" anchor="ctr"/>
+          <a:lstStyle/>
+          <a:p>
+            <a:pPr indent="0" marL="0">
+              <a:buNone/>
+            </a:pPr>
+            <a:r>
+              <a:rPr lang="en-US" sz="1400" i="1" dirty="0">
+                <a:solidFill>
+                  <a:srgbClr val="1E293B"/>
+                </a:solidFill>
+                <a:latin typeface="Calibri" pitchFamily="34" charset="0"/>
+                <a:ea typeface="Calibri" pitchFamily="34" charset="-122"/>
+                <a:cs typeface="Calibri" pitchFamily="34" charset="-120"/>
+              </a:rPr>
+              <a:t>Corrected:</a:t>
+            </a:r>
+            <a:endParaRPr lang="en-US" sz="1400" dirty="0"/>
+          </a:p>
+          <a:p>
+            <a:pPr indent="0" marL="0">
+              <a:buNone/>
+            </a:pPr>
+            <a:endParaRPr lang="en-US" sz="1400" dirty="0"/>
+          </a:p>
+        </p:txBody>
+      </p:sp>
+      <p:sp>
+        <p:nvSpPr>
+          <p:cNvPr id="12" name="Text 10"/>
+          <p:cNvSpPr/>
+          <p:nvPr/>
+        </p:nvSpPr>
+        <p:spPr>
+          <a:xfrm>
+            <a:off x="566928" y="3767328"/>
+            <a:ext cx="8010144" cy="320040"/>
+          </a:xfrm>
+          <a:prstGeom prst="rect">
+            <a:avLst/>
+          </a:prstGeom>
+          <a:noFill/>
+          <a:ln/>
+        </p:spPr>
+        <p:txBody>
+          <a:bodyPr wrap="square" lIns="0" tIns="0" rIns="0" bIns="0" rtlCol="0" anchor="ctr"/>
+          <a:lstStyle/>
+          <a:p>
+            <a:pPr indent="0" marL="0">
+              <a:buNone/>
+            </a:pPr>
+            <a:r>
+              <a:rPr lang="en-US" sz="1200" dirty="0">
+                <a:solidFill>
+                  <a:srgbClr val="64748B"/>
+                </a:solidFill>
+                <a:latin typeface="Calibri" pitchFamily="34" charset="0"/>
+                <a:ea typeface="Calibri" pitchFamily="34" charset="-122"/>
+                <a:cs typeface="Calibri" pitchFamily="34" charset="-120"/>
+              </a:rPr>
+              <a:t>The key on a map is sometimes called a legend . It explains all the symbols on the map .</a:t>
+            </a:r>
+            <a:endParaRPr lang="en-US" sz="1200" dirty="0"/>
+          </a:p>
+        </p:txBody>
+      </p:sp>
+    </p:spTree>
+  </p:cSld>
+  <p:clrMapOvr>
+    <a:masterClrMapping/>
+  </p:clrMapOvr>
+</p:sld>
+</file>
+
+<file path=ppt/slides/slide9.xml><?xml version="1.0" encoding="utf-8"?>
+<p:sld xmlns:a="http://schemas.openxmlformats.org/drawingml/2006/main" xmlns:r="http://schemas.openxmlformats.org/officeDocument/2006/relationships" xmlns:p="http://schemas.openxmlformats.org/presentationml/2006/main">
+  <p:cSld name="Slide 9">
     <p:bg>
       <p:bgPr>
         <a:solidFill>
@@ -6180,91 +6931,122 @@
       </p:grpSpPr>
       <p:sp>
         <p:nvSpPr>
-          <p:cNvPr id="2" name="Text 0"/>
-          <p:cNvSpPr/>
-          <p:nvPr/>
-        </p:nvSpPr>
-        <p:spPr>
-          <a:xfrm>
-            <a:off x="365760" y="164592"/>
-            <a:ext cx="8412480" cy="566928"/>
-          </a:xfrm>
-          <a:prstGeom prst="rect">
-            <a:avLst/>
-          </a:prstGeom>
-          <a:noFill/>
-          <a:ln/>
-        </p:spPr>
-        <p:txBody>
-          <a:bodyPr wrap="square" lIns="0" tIns="0" rIns="0" bIns="0" rtlCol="0" anchor="ctr"/>
-          <a:lstStyle/>
-          <a:p>
-            <a:pPr algn="l" indent="0" marL="0">
-              <a:buNone/>
-            </a:pPr>
-            <a:r>
-              <a:rPr lang="en-US" sz="2800" b="1" dirty="0">
-                <a:solidFill>
-                  <a:srgbClr val="0E1C42"/>
-                </a:solidFill>
-                <a:latin typeface="Calibri" pitchFamily="34" charset="0"/>
-                <a:ea typeface="Calibri" pitchFamily="34" charset="-122"/>
-                <a:cs typeface="Calibri" pitchFamily="34" charset="-120"/>
-              </a:rPr>
-              <a:t>✅ Model Sentence — Study What's Right</a:t>
-            </a:r>
-            <a:endParaRPr lang="en-US" sz="2800" dirty="0"/>
-          </a:p>
-        </p:txBody>
-      </p:sp>
-      <p:sp>
-        <p:nvSpPr>
-          <p:cNvPr id="3" name="Shape 1"/>
-          <p:cNvSpPr/>
-          <p:nvPr/>
-        </p:nvSpPr>
-        <p:spPr>
-          <a:xfrm>
-            <a:off x="365760" y="749808"/>
-            <a:ext cx="8412480" cy="0"/>
-          </a:xfrm>
-          <a:prstGeom prst="line">
-            <a:avLst/>
-          </a:prstGeom>
-          <a:noFill/>
-          <a:ln w="19050">
-            <a:solidFill>
-              <a:srgbClr val="34B76F"/>
-            </a:solidFill>
-            <a:prstDash val="solid"/>
-          </a:ln>
-        </p:spPr>
-      </p:sp>
-      <p:sp>
-        <p:nvSpPr>
-          <p:cNvPr id="4" name="Shape 2"/>
-          <p:cNvSpPr/>
-          <p:nvPr/>
-        </p:nvSpPr>
-        <p:spPr>
-          <a:xfrm>
-            <a:off x="457200" y="1097280"/>
-            <a:ext cx="8229600" cy="914400"/>
+          <p:cNvPr id="2" name="Shape 0"/>
+          <p:cNvSpPr/>
+          <p:nvPr/>
+        </p:nvSpPr>
+        <p:spPr>
+          <a:xfrm>
+            <a:off x="0" y="0"/>
+            <a:ext cx="9144000" cy="566928"/>
+          </a:xfrm>
+          <a:prstGeom prst="rect">
+            <a:avLst/>
+          </a:prstGeom>
+          <a:solidFill>
+            <a:srgbClr val="5CB85C"/>
+          </a:solidFill>
+          <a:ln/>
+        </p:spPr>
+      </p:sp>
+      <p:sp>
+        <p:nvSpPr>
+          <p:cNvPr id="3" name="Text 1"/>
+          <p:cNvSpPr/>
+          <p:nvPr/>
+        </p:nvSpPr>
+        <p:spPr>
+          <a:xfrm>
+            <a:off x="365760" y="54864"/>
+            <a:ext cx="8412480" cy="457200"/>
+          </a:xfrm>
+          <a:prstGeom prst="rect">
+            <a:avLst/>
+          </a:prstGeom>
+          <a:noFill/>
+          <a:ln/>
+        </p:spPr>
+        <p:txBody>
+          <a:bodyPr wrap="square" lIns="0" tIns="0" rIns="0" bIns="0" rtlCol="0" anchor="ctr"/>
+          <a:lstStyle/>
+          <a:p>
+            <a:pPr indent="0" marL="0">
+              <a:buNone/>
+            </a:pPr>
+            <a:r>
+              <a:rPr lang="en-US" sz="2200" b="1" dirty="0">
+                <a:solidFill>
+                  <a:srgbClr val="FFFFFF"/>
+                </a:solidFill>
+                <a:latin typeface="Calibri" pitchFamily="34" charset="0"/>
+                <a:ea typeface="Calibri" pitchFamily="34" charset="-122"/>
+                <a:cs typeface="Calibri" pitchFamily="34" charset="-120"/>
+              </a:rPr>
+              <a:t>🌱  Morphology</a:t>
+            </a:r>
+            <a:endParaRPr lang="en-US" sz="2200" dirty="0"/>
+          </a:p>
+        </p:txBody>
+      </p:sp>
+      <p:sp>
+        <p:nvSpPr>
+          <p:cNvPr id="4" name="Text 2"/>
+          <p:cNvSpPr/>
+          <p:nvPr/>
+        </p:nvSpPr>
+        <p:spPr>
+          <a:xfrm>
+            <a:off x="365760" y="804672"/>
+            <a:ext cx="8229600" cy="237744"/>
+          </a:xfrm>
+          <a:prstGeom prst="rect">
+            <a:avLst/>
+          </a:prstGeom>
+          <a:noFill/>
+          <a:ln/>
+        </p:spPr>
+        <p:txBody>
+          <a:bodyPr wrap="square" lIns="0" tIns="0" rIns="0" bIns="0" rtlCol="0" anchor="ctr"/>
+          <a:lstStyle/>
+          <a:p>
+            <a:pPr indent="0" marL="0">
+              <a:buNone/>
+            </a:pPr>
+            <a:r>
+              <a:rPr lang="en-US" sz="1100" b="1" spc="100" kern="0" dirty="0">
+                <a:solidFill>
+                  <a:srgbClr val="8B6FC0"/>
+                </a:solidFill>
+                <a:latin typeface="Calibri" pitchFamily="34" charset="0"/>
+                <a:ea typeface="Calibri" pitchFamily="34" charset="-122"/>
+                <a:cs typeface="Calibri" pitchFamily="34" charset="-120"/>
+              </a:rPr>
+              <a:t>PREFIX MIS- MEANS WRONG</a:t>
+            </a:r>
+            <a:endParaRPr lang="en-US" sz="1100" dirty="0"/>
+          </a:p>
+        </p:txBody>
+      </p:sp>
+      <p:sp>
+        <p:nvSpPr>
+          <p:cNvPr id="5" name="Shape 3"/>
+          <p:cNvSpPr/>
+          <p:nvPr/>
+        </p:nvSpPr>
+        <p:spPr>
+          <a:xfrm>
+            <a:off x="365760" y="1097280"/>
+            <a:ext cx="8412480" cy="621792"/>
           </a:xfrm>
           <a:prstGeom prst="roundRect">
             <a:avLst>
-              <a:gd name="adj" fmla="val 10000"/>
+              <a:gd name="adj" fmla="val 14706"/>
             </a:avLst>
           </a:prstGeom>
           <a:solidFill>
-            <a:srgbClr val="E8F8EF"/>
+            <a:srgbClr val="F0E8FF"/>
           </a:solidFill>
-          <a:ln w="12700">
-            <a:solidFill>
-              <a:srgbClr val="34B76F"/>
-            </a:solidFill>
-            <a:prstDash val="solid"/>
-          </a:ln>
+          <a:ln/>
           <a:effectLst>
             <a:outerShdw sx="100000" sy="100000" kx="0" ky="0" algn="bl" rotWithShape="0" blurRad="101600" dist="38100" dir="2700000">
               <a:srgbClr val="000000">
@@ -6276,30 +7058,30 @@
       </p:sp>
       <p:sp>
         <p:nvSpPr>
-          <p:cNvPr id="5" name="Text 3"/>
-          <p:cNvSpPr/>
-          <p:nvPr/>
-        </p:nvSpPr>
-        <p:spPr>
-          <a:xfrm>
-            <a:off x="640080" y="1207008"/>
-            <a:ext cx="7863840" cy="685800"/>
-          </a:xfrm>
-          <a:prstGeom prst="rect">
-            <a:avLst/>
-          </a:prstGeom>
-          <a:noFill/>
-          <a:ln/>
-        </p:spPr>
-        <p:txBody>
-          <a:bodyPr wrap="square" lIns="0" tIns="0" rIns="0" bIns="0" rtlCol="0" anchor="ctr"/>
-          <a:lstStyle/>
-          <a:p>
-            <a:pPr indent="0" marL="0">
-              <a:buNone/>
-            </a:pPr>
-            <a:r>
-              <a:rPr lang="en-US" sz="1800" i="1" dirty="0">
+          <p:cNvPr id="6" name="Text 4"/>
+          <p:cNvSpPr/>
+          <p:nvPr/>
+        </p:nvSpPr>
+        <p:spPr>
+          <a:xfrm>
+            <a:off x="594360" y="1216152"/>
+            <a:ext cx="7863840" cy="384048"/>
+          </a:xfrm>
+          <a:prstGeom prst="rect">
+            <a:avLst/>
+          </a:prstGeom>
+          <a:noFill/>
+          <a:ln/>
+        </p:spPr>
+        <p:txBody>
+          <a:bodyPr wrap="square" lIns="0" tIns="0" rIns="0" bIns="0" rtlCol="0" anchor="ctr"/>
+          <a:lstStyle/>
+          <a:p>
+            <a:pPr indent="0" marL="0">
+              <a:buNone/>
+            </a:pPr>
+            <a:r>
+              <a:rPr lang="en-US" sz="1500" dirty="0">
                 <a:solidFill>
                   <a:srgbClr val="1E293B"/>
                 </a:solidFill>
@@ -6307,192 +7089,32 @@
                 <a:ea typeface="Calibri" pitchFamily="34" charset="-122"/>
                 <a:cs typeface="Calibri" pitchFamily="34" charset="-120"/>
               </a:rPr>
-              <a:t>A compass rose shows the directions north, south, east, and west.</a:t>
-            </a:r>
-            <a:endParaRPr lang="en-US" sz="1800" dirty="0"/>
-          </a:p>
-        </p:txBody>
-      </p:sp>
-    </p:spTree>
-  </p:cSld>
-  <p:clrMapOvr>
-    <a:masterClrMapping/>
-  </p:clrMapOvr>
-</p:sld>
-</file>
-
-<file path=ppt/slides/slide8.xml><?xml version="1.0" encoding="utf-8"?>
-<p:sld xmlns:a="http://schemas.openxmlformats.org/drawingml/2006/main" xmlns:r="http://schemas.openxmlformats.org/officeDocument/2006/relationships" xmlns:p="http://schemas.openxmlformats.org/presentationml/2006/main">
-  <p:cSld name="Slide 8">
-    <p:bg>
-      <p:bgPr>
-        <a:solidFill>
-          <a:srgbClr val="E5F7FC"/>
-        </a:solidFill>
-      </p:bgPr>
-    </p:bg>
-    <p:spTree>
-      <p:nvGrpSpPr>
-        <p:cNvPr id="1" name=""/>
-        <p:cNvGrpSpPr/>
-        <p:nvPr/>
-      </p:nvGrpSpPr>
-      <p:grpSpPr>
-        <a:xfrm>
-          <a:off x="0" y="0"/>
-          <a:ext cx="0" cy="0"/>
-          <a:chOff x="0" y="0"/>
-          <a:chExt cx="0" cy="0"/>
-        </a:xfrm>
-      </p:grpSpPr>
-      <p:sp>
-        <p:nvSpPr>
-          <p:cNvPr id="2" name="Text 0"/>
-          <p:cNvSpPr/>
-          <p:nvPr/>
-        </p:nvSpPr>
-        <p:spPr>
-          <a:xfrm>
-            <a:off x="365760" y="164592"/>
-            <a:ext cx="5943600" cy="566928"/>
-          </a:xfrm>
-          <a:prstGeom prst="rect">
-            <a:avLst/>
-          </a:prstGeom>
-          <a:noFill/>
-          <a:ln/>
-        </p:spPr>
-        <p:txBody>
-          <a:bodyPr wrap="square" lIns="0" tIns="0" rIns="0" bIns="0" rtlCol="0" anchor="ctr"/>
-          <a:lstStyle/>
-          <a:p>
-            <a:pPr algn="l" indent="0" marL="0">
-              <a:buNone/>
-            </a:pPr>
-            <a:r>
-              <a:rPr lang="en-US" sz="2800" b="1" dirty="0">
-                <a:solidFill>
-                  <a:srgbClr val="0E1C42"/>
-                </a:solidFill>
-                <a:latin typeface="Calibri" pitchFamily="34" charset="0"/>
-                <a:ea typeface="Calibri" pitchFamily="34" charset="-122"/>
-                <a:cs typeface="Calibri" pitchFamily="34" charset="-120"/>
-              </a:rPr>
-              <a:t>🔧 Fix-It Sentence — Now You Try</a:t>
-            </a:r>
-            <a:endParaRPr lang="en-US" sz="2800" dirty="0"/>
-          </a:p>
-        </p:txBody>
-      </p:sp>
-      <p:sp>
-        <p:nvSpPr>
-          <p:cNvPr id="3" name="Shape 1"/>
-          <p:cNvSpPr/>
-          <p:nvPr/>
-        </p:nvSpPr>
-        <p:spPr>
-          <a:xfrm>
-            <a:off x="365760" y="749808"/>
-            <a:ext cx="8412480" cy="0"/>
-          </a:xfrm>
-          <a:prstGeom prst="line">
-            <a:avLst/>
-          </a:prstGeom>
-          <a:noFill/>
-          <a:ln w="19050">
-            <a:solidFill>
-              <a:srgbClr val="5CB85C"/>
-            </a:solidFill>
-            <a:prstDash val="solid"/>
-          </a:ln>
-        </p:spPr>
-      </p:sp>
-      <p:sp>
-        <p:nvSpPr>
-          <p:cNvPr id="4" name="Shape 2"/>
-          <p:cNvSpPr/>
-          <p:nvPr/>
-        </p:nvSpPr>
-        <p:spPr>
-          <a:xfrm>
-            <a:off x="6492240" y="173736"/>
-            <a:ext cx="2286000" cy="502920"/>
+              <a:t>🌱  mis- + read =misread</a:t>
+            </a:r>
+            <a:endParaRPr lang="en-US" sz="1500" dirty="0"/>
+          </a:p>
+        </p:txBody>
+      </p:sp>
+      <p:sp>
+        <p:nvSpPr>
+          <p:cNvPr id="7" name="Shape 5"/>
+          <p:cNvSpPr/>
+          <p:nvPr/>
+        </p:nvSpPr>
+        <p:spPr>
+          <a:xfrm>
+            <a:off x="365760" y="1792224"/>
+            <a:ext cx="8412480" cy="621792"/>
           </a:xfrm>
           <a:prstGeom prst="roundRect">
             <a:avLst>
-              <a:gd name="adj" fmla="val 21818"/>
+              <a:gd name="adj" fmla="val 14706"/>
             </a:avLst>
           </a:prstGeom>
           <a:solidFill>
-            <a:srgbClr val="5CB85C"/>
+            <a:srgbClr val="F8F4FF"/>
           </a:solidFill>
           <a:ln/>
-        </p:spPr>
-      </p:sp>
-      <p:sp>
-        <p:nvSpPr>
-          <p:cNvPr id="5" name="Text 3"/>
-          <p:cNvSpPr/>
-          <p:nvPr/>
-        </p:nvSpPr>
-        <p:spPr>
-          <a:xfrm>
-            <a:off x="6492240" y="173736"/>
-            <a:ext cx="2286000" cy="502920"/>
-          </a:xfrm>
-          <a:prstGeom prst="rect">
-            <a:avLst/>
-          </a:prstGeom>
-          <a:noFill/>
-          <a:ln/>
-        </p:spPr>
-        <p:txBody>
-          <a:bodyPr wrap="square" lIns="0" tIns="0" rIns="0" bIns="0" rtlCol="0" anchor="ctr"/>
-          <a:lstStyle/>
-          <a:p>
-            <a:pPr algn="ctr" indent="0" marL="0">
-              <a:buNone/>
-            </a:pPr>
-            <a:r>
-              <a:rPr lang="en-US" sz="1100" b="1" dirty="0">
-                <a:solidFill>
-                  <a:srgbClr val="0E1C42"/>
-                </a:solidFill>
-                <a:latin typeface="Calibri" pitchFamily="34" charset="0"/>
-                <a:ea typeface="Calibri" pitchFamily="34" charset="-122"/>
-                <a:cs typeface="Calibri" pitchFamily="34" charset="-120"/>
-              </a:rPr>
-              <a:t>CHAT PROMPT</a:t>
-            </a:r>
-            <a:endParaRPr lang="en-US" sz="1100" dirty="0"/>
-          </a:p>
-        </p:txBody>
-      </p:sp>
-      <p:sp>
-        <p:nvSpPr>
-          <p:cNvPr id="6" name="Shape 4"/>
-          <p:cNvSpPr/>
-          <p:nvPr/>
-        </p:nvSpPr>
-        <p:spPr>
-          <a:xfrm>
-            <a:off x="457200" y="1005840"/>
-            <a:ext cx="8229600" cy="640080"/>
-          </a:xfrm>
-          <a:prstGeom prst="roundRect">
-            <a:avLst>
-              <a:gd name="adj" fmla="val 14286"/>
-            </a:avLst>
-          </a:prstGeom>
-          <a:solidFill>
-            <a:srgbClr val="F8FAFC"/>
-          </a:solidFill>
-          <a:ln w="12700">
-            <a:solidFill>
-              <a:srgbClr val="C7922C"/>
-            </a:solidFill>
-            <a:prstDash val="solid"/>
-          </a:ln>
           <a:effectLst>
             <a:outerShdw sx="100000" sy="100000" kx="0" ky="0" algn="bl" rotWithShape="0" blurRad="101600" dist="38100" dir="2700000">
               <a:srgbClr val="000000">
@@ -6504,30 +7126,30 @@
       </p:sp>
       <p:sp>
         <p:nvSpPr>
-          <p:cNvPr id="7" name="Text 5"/>
-          <p:cNvSpPr/>
-          <p:nvPr/>
-        </p:nvSpPr>
-        <p:spPr>
-          <a:xfrm>
-            <a:off x="640080" y="1115568"/>
-            <a:ext cx="7863840" cy="411480"/>
-          </a:xfrm>
-          <a:prstGeom prst="rect">
-            <a:avLst/>
-          </a:prstGeom>
-          <a:noFill/>
-          <a:ln/>
-        </p:spPr>
-        <p:txBody>
-          <a:bodyPr wrap="square" lIns="0" tIns="0" rIns="0" bIns="0" rtlCol="0" anchor="ctr"/>
-          <a:lstStyle/>
-          <a:p>
-            <a:pPr indent="0" marL="0">
-              <a:buNone/>
-            </a:pPr>
-            <a:r>
-              <a:rPr lang="en-US" sz="1800" i="1" dirty="0">
+          <p:cNvPr id="8" name="Text 6"/>
+          <p:cNvSpPr/>
+          <p:nvPr/>
+        </p:nvSpPr>
+        <p:spPr>
+          <a:xfrm>
+            <a:off x="594360" y="1911096"/>
+            <a:ext cx="7863840" cy="384048"/>
+          </a:xfrm>
+          <a:prstGeom prst="rect">
+            <a:avLst/>
+          </a:prstGeom>
+          <a:noFill/>
+          <a:ln/>
+        </p:spPr>
+        <p:txBody>
+          <a:bodyPr wrap="square" lIns="0" tIns="0" rIns="0" bIns="0" rtlCol="0" anchor="ctr"/>
+          <a:lstStyle/>
+          <a:p>
+            <a:pPr indent="0" marL="0">
+              <a:buNone/>
+            </a:pPr>
+            <a:r>
+              <a:rPr lang="en-US" sz="1500" dirty="0">
                 <a:solidFill>
                   <a:srgbClr val="1E293B"/>
                 </a:solidFill>
@@ -6535,192 +7157,32 @@
                 <a:ea typeface="Calibri" pitchFamily="34" charset="-122"/>
                 <a:cs typeface="Calibri" pitchFamily="34" charset="-120"/>
               </a:rPr>
-              <a:t>the key on a map is sometimes called a legend it explains all the symbols on the map</a:t>
-            </a:r>
-            <a:endParaRPr lang="en-US" sz="1800" dirty="0"/>
-          </a:p>
-        </p:txBody>
-      </p:sp>
-    </p:spTree>
-  </p:cSld>
-  <p:clrMapOvr>
-    <a:masterClrMapping/>
-  </p:clrMapOvr>
-</p:sld>
-</file>
-
-<file path=ppt/slides/slide9.xml><?xml version="1.0" encoding="utf-8"?>
-<p:sld xmlns:a="http://schemas.openxmlformats.org/drawingml/2006/main" xmlns:r="http://schemas.openxmlformats.org/officeDocument/2006/relationships" xmlns:p="http://schemas.openxmlformats.org/presentationml/2006/main">
-  <p:cSld name="Slide 9">
-    <p:bg>
-      <p:bgPr>
-        <a:solidFill>
-          <a:srgbClr val="E5F7FC"/>
-        </a:solidFill>
-      </p:bgPr>
-    </p:bg>
-    <p:spTree>
-      <p:nvGrpSpPr>
-        <p:cNvPr id="1" name=""/>
-        <p:cNvGrpSpPr/>
-        <p:nvPr/>
-      </p:nvGrpSpPr>
-      <p:grpSpPr>
-        <a:xfrm>
-          <a:off x="0" y="0"/>
-          <a:ext cx="0" cy="0"/>
-          <a:chOff x="0" y="0"/>
-          <a:chExt cx="0" cy="0"/>
-        </a:xfrm>
-      </p:grpSpPr>
-      <p:sp>
-        <p:nvSpPr>
-          <p:cNvPr id="2" name="Text 0"/>
-          <p:cNvSpPr/>
-          <p:nvPr/>
-        </p:nvSpPr>
-        <p:spPr>
-          <a:xfrm>
-            <a:off x="365760" y="164592"/>
-            <a:ext cx="5943600" cy="566928"/>
-          </a:xfrm>
-          <a:prstGeom prst="rect">
-            <a:avLst/>
-          </a:prstGeom>
-          <a:noFill/>
-          <a:ln/>
-        </p:spPr>
-        <p:txBody>
-          <a:bodyPr wrap="square" lIns="0" tIns="0" rIns="0" bIns="0" rtlCol="0" anchor="ctr"/>
-          <a:lstStyle/>
-          <a:p>
-            <a:pPr algn="l" indent="0" marL="0">
-              <a:buNone/>
-            </a:pPr>
-            <a:r>
-              <a:rPr lang="en-US" sz="2800" b="1" dirty="0">
-                <a:solidFill>
-                  <a:srgbClr val="0E1C42"/>
-                </a:solidFill>
-                <a:latin typeface="Calibri" pitchFamily="34" charset="0"/>
-                <a:ea typeface="Calibri" pitchFamily="34" charset="-122"/>
-                <a:cs typeface="Calibri" pitchFamily="34" charset="-120"/>
-              </a:rPr>
-              <a:t>🔧 Fix-It Sentence — Answer Revealed</a:t>
-            </a:r>
-            <a:endParaRPr lang="en-US" sz="2800" dirty="0"/>
-          </a:p>
-        </p:txBody>
-      </p:sp>
-      <p:sp>
-        <p:nvSpPr>
-          <p:cNvPr id="3" name="Shape 1"/>
-          <p:cNvSpPr/>
-          <p:nvPr/>
-        </p:nvSpPr>
-        <p:spPr>
-          <a:xfrm>
-            <a:off x="365760" y="749808"/>
-            <a:ext cx="8412480" cy="0"/>
-          </a:xfrm>
-          <a:prstGeom prst="line">
-            <a:avLst/>
-          </a:prstGeom>
-          <a:noFill/>
-          <a:ln w="19050">
-            <a:solidFill>
-              <a:srgbClr val="5CB85C"/>
-            </a:solidFill>
-            <a:prstDash val="solid"/>
-          </a:ln>
-        </p:spPr>
-      </p:sp>
-      <p:sp>
-        <p:nvSpPr>
-          <p:cNvPr id="4" name="Shape 2"/>
-          <p:cNvSpPr/>
-          <p:nvPr/>
-        </p:nvSpPr>
-        <p:spPr>
-          <a:xfrm>
-            <a:off x="6492240" y="173736"/>
-            <a:ext cx="2286000" cy="502920"/>
+              <a:t>🌱  mis- + use =misuse</a:t>
+            </a:r>
+            <a:endParaRPr lang="en-US" sz="1500" dirty="0"/>
+          </a:p>
+        </p:txBody>
+      </p:sp>
+      <p:sp>
+        <p:nvSpPr>
+          <p:cNvPr id="9" name="Shape 7"/>
+          <p:cNvSpPr/>
+          <p:nvPr/>
+        </p:nvSpPr>
+        <p:spPr>
+          <a:xfrm>
+            <a:off x="365760" y="2487168"/>
+            <a:ext cx="8412480" cy="621792"/>
           </a:xfrm>
           <a:prstGeom prst="roundRect">
             <a:avLst>
-              <a:gd name="adj" fmla="val 21818"/>
+              <a:gd name="adj" fmla="val 14706"/>
             </a:avLst>
           </a:prstGeom>
           <a:solidFill>
-            <a:srgbClr val="5CB85C"/>
+            <a:srgbClr val="F0E8FF"/>
           </a:solidFill>
           <a:ln/>
-        </p:spPr>
-      </p:sp>
-      <p:sp>
-        <p:nvSpPr>
-          <p:cNvPr id="5" name="Text 3"/>
-          <p:cNvSpPr/>
-          <p:nvPr/>
-        </p:nvSpPr>
-        <p:spPr>
-          <a:xfrm>
-            <a:off x="6492240" y="173736"/>
-            <a:ext cx="2286000" cy="502920"/>
-          </a:xfrm>
-          <a:prstGeom prst="rect">
-            <a:avLst/>
-          </a:prstGeom>
-          <a:noFill/>
-          <a:ln/>
-        </p:spPr>
-        <p:txBody>
-          <a:bodyPr wrap="square" lIns="0" tIns="0" rIns="0" bIns="0" rtlCol="0" anchor="ctr"/>
-          <a:lstStyle/>
-          <a:p>
-            <a:pPr algn="ctr" indent="0" marL="0">
-              <a:buNone/>
-            </a:pPr>
-            <a:r>
-              <a:rPr lang="en-US" sz="1100" b="1" dirty="0">
-                <a:solidFill>
-                  <a:srgbClr val="0E1C42"/>
-                </a:solidFill>
-                <a:latin typeface="Calibri" pitchFamily="34" charset="0"/>
-                <a:ea typeface="Calibri" pitchFamily="34" charset="-122"/>
-                <a:cs typeface="Calibri" pitchFamily="34" charset="-120"/>
-              </a:rPr>
-              <a:t>CHAT PROMPT</a:t>
-            </a:r>
-            <a:endParaRPr lang="en-US" sz="1100" dirty="0"/>
-          </a:p>
-        </p:txBody>
-      </p:sp>
-      <p:sp>
-        <p:nvSpPr>
-          <p:cNvPr id="6" name="Shape 4"/>
-          <p:cNvSpPr/>
-          <p:nvPr/>
-        </p:nvSpPr>
-        <p:spPr>
-          <a:xfrm>
-            <a:off x="457200" y="1005840"/>
-            <a:ext cx="8229600" cy="640080"/>
-          </a:xfrm>
-          <a:prstGeom prst="roundRect">
-            <a:avLst>
-              <a:gd name="adj" fmla="val 14286"/>
-            </a:avLst>
-          </a:prstGeom>
-          <a:solidFill>
-            <a:srgbClr val="F8FAFC"/>
-          </a:solidFill>
-          <a:ln w="12700">
-            <a:solidFill>
-              <a:srgbClr val="C7922C"/>
-            </a:solidFill>
-            <a:prstDash val="solid"/>
-          </a:ln>
           <a:effectLst>
             <a:outerShdw sx="100000" sy="100000" kx="0" ky="0" algn="bl" rotWithShape="0" blurRad="101600" dist="38100" dir="2700000">
               <a:srgbClr val="000000">
@@ -6732,30 +7194,30 @@
       </p:sp>
       <p:sp>
         <p:nvSpPr>
-          <p:cNvPr id="7" name="Text 5"/>
-          <p:cNvSpPr/>
-          <p:nvPr/>
-        </p:nvSpPr>
-        <p:spPr>
-          <a:xfrm>
-            <a:off x="640080" y="1115568"/>
-            <a:ext cx="7863840" cy="411480"/>
-          </a:xfrm>
-          <a:prstGeom prst="rect">
-            <a:avLst/>
-          </a:prstGeom>
-          <a:noFill/>
-          <a:ln/>
-        </p:spPr>
-        <p:txBody>
-          <a:bodyPr wrap="square" lIns="0" tIns="0" rIns="0" bIns="0" rtlCol="0" anchor="ctr"/>
-          <a:lstStyle/>
-          <a:p>
-            <a:pPr indent="0" marL="0">
-              <a:buNone/>
-            </a:pPr>
-            <a:r>
-              <a:rPr lang="en-US" sz="1800" i="1" dirty="0">
+          <p:cNvPr id="10" name="Text 8"/>
+          <p:cNvSpPr/>
+          <p:nvPr/>
+        </p:nvSpPr>
+        <p:spPr>
+          <a:xfrm>
+            <a:off x="594360" y="2606040"/>
+            <a:ext cx="7863840" cy="384048"/>
+          </a:xfrm>
+          <a:prstGeom prst="rect">
+            <a:avLst/>
+          </a:prstGeom>
+          <a:noFill/>
+          <a:ln/>
+        </p:spPr>
+        <p:txBody>
+          <a:bodyPr wrap="square" lIns="0" tIns="0" rIns="0" bIns="0" rtlCol="0" anchor="ctr"/>
+          <a:lstStyle/>
+          <a:p>
+            <a:pPr indent="0" marL="0">
+              <a:buNone/>
+            </a:pPr>
+            <a:r>
+              <a:rPr lang="en-US" sz="1500" dirty="0">
                 <a:solidFill>
                   <a:srgbClr val="1E293B"/>
                 </a:solidFill>
@@ -6763,87 +7225,77 @@
                 <a:ea typeface="Calibri" pitchFamily="34" charset="-122"/>
                 <a:cs typeface="Calibri" pitchFamily="34" charset="-120"/>
               </a:rPr>
-              <a:t>the key on a map is sometimes called a legend it explains all the symbols on the map</a:t>
-            </a:r>
-            <a:endParaRPr lang="en-US" sz="1800" dirty="0"/>
-          </a:p>
-        </p:txBody>
-      </p:sp>
-      <p:sp>
-        <p:nvSpPr>
-          <p:cNvPr id="8" name="Text 6"/>
-          <p:cNvSpPr/>
-          <p:nvPr/>
-        </p:nvSpPr>
-        <p:spPr>
-          <a:xfrm>
-            <a:off x="457200" y="1737360"/>
-            <a:ext cx="8046720" cy="292608"/>
-          </a:xfrm>
-          <a:prstGeom prst="rect">
-            <a:avLst/>
-          </a:prstGeom>
-          <a:noFill/>
-          <a:ln/>
-        </p:spPr>
-        <p:txBody>
-          <a:bodyPr wrap="square" lIns="0" tIns="0" rIns="0" bIns="0" rtlCol="0" anchor="ctr"/>
-          <a:lstStyle/>
-          <a:p>
-            <a:pPr indent="0" marL="0">
-              <a:buNone/>
-            </a:pPr>
-            <a:r>
-              <a:rPr lang="en-US" sz="1100" b="1" spc="200" kern="0" dirty="0">
-                <a:solidFill>
-                  <a:srgbClr val="64748B"/>
-                </a:solidFill>
-                <a:latin typeface="Calibri" pitchFamily="34" charset="0"/>
-                <a:ea typeface="Calibri" pitchFamily="34" charset="-122"/>
-                <a:cs typeface="Calibri" pitchFamily="34" charset="-120"/>
-              </a:rPr>
-              <a:t>WHY</a:t>
-            </a:r>
-            <a:endParaRPr lang="en-US" sz="1100" dirty="0"/>
-          </a:p>
-        </p:txBody>
-      </p:sp>
-      <p:sp>
-        <p:nvSpPr>
-          <p:cNvPr id="9" name="Text 7"/>
-          <p:cNvSpPr/>
-          <p:nvPr/>
-        </p:nvSpPr>
-        <p:spPr>
-          <a:xfrm>
-            <a:off x="640080" y="2011680"/>
-            <a:ext cx="7863840" cy="502920"/>
-          </a:xfrm>
-          <a:prstGeom prst="rect">
-            <a:avLst/>
-          </a:prstGeom>
-          <a:noFill/>
-          <a:ln/>
-        </p:spPr>
-        <p:txBody>
-          <a:bodyPr wrap="square" lIns="0" tIns="0" rIns="0" bIns="0" rtlCol="0" anchor="ctr"/>
-          <a:lstStyle/>
-          <a:p>
-            <a:pPr indent="0" marL="0">
-              <a:buNone/>
-            </a:pPr>
-            <a:r>
-              <a:rPr lang="en-US" sz="1300" i="1" dirty="0">
-                <a:solidFill>
-                  <a:srgbClr val="64748B"/>
-                </a:solidFill>
-                <a:latin typeface="Calibri" pitchFamily="34" charset="0"/>
-                <a:ea typeface="Calibri" pitchFamily="34" charset="-122"/>
-                <a:cs typeface="Calibri" pitchFamily="34" charset="-120"/>
-              </a:rPr>
-              <a:t>The key on a map is sometimes called a legend . It explains all the symbols on the map .</a:t>
-            </a:r>
-            <a:endParaRPr lang="en-US" sz="1300" dirty="0"/>
+              <a:t>🌱  mis- + take =mistake</a:t>
+            </a:r>
+            <a:endParaRPr lang="en-US" sz="1500" dirty="0"/>
+          </a:p>
+        </p:txBody>
+      </p:sp>
+      <p:sp>
+        <p:nvSpPr>
+          <p:cNvPr id="11" name="Shape 9"/>
+          <p:cNvSpPr/>
+          <p:nvPr/>
+        </p:nvSpPr>
+        <p:spPr>
+          <a:xfrm>
+            <a:off x="365760" y="3182112"/>
+            <a:ext cx="8412480" cy="621792"/>
+          </a:xfrm>
+          <a:prstGeom prst="roundRect">
+            <a:avLst>
+              <a:gd name="adj" fmla="val 14706"/>
+            </a:avLst>
+          </a:prstGeom>
+          <a:solidFill>
+            <a:srgbClr val="F8F4FF"/>
+          </a:solidFill>
+          <a:ln/>
+          <a:effectLst>
+            <a:outerShdw sx="100000" sy="100000" kx="0" ky="0" algn="bl" rotWithShape="0" blurRad="101600" dist="38100" dir="2700000">
+              <a:srgbClr val="000000">
+                <a:alpha val="12000"/>
+              </a:srgbClr>
+            </a:outerShdw>
+          </a:effectLst>
+        </p:spPr>
+      </p:sp>
+      <p:sp>
+        <p:nvSpPr>
+          <p:cNvPr id="12" name="Text 10"/>
+          <p:cNvSpPr/>
+          <p:nvPr/>
+        </p:nvSpPr>
+        <p:spPr>
+          <a:xfrm>
+            <a:off x="594360" y="3300984"/>
+            <a:ext cx="7863840" cy="384048"/>
+          </a:xfrm>
+          <a:prstGeom prst="rect">
+            <a:avLst/>
+          </a:prstGeom>
+          <a:noFill/>
+          <a:ln/>
+        </p:spPr>
+        <p:txBody>
+          <a:bodyPr wrap="square" lIns="0" tIns="0" rIns="0" bIns="0" rtlCol="0" anchor="ctr"/>
+          <a:lstStyle/>
+          <a:p>
+            <a:pPr indent="0" marL="0">
+              <a:buNone/>
+            </a:pPr>
+            <a:r>
+              <a:rPr lang="en-US" sz="1500" dirty="0">
+                <a:solidFill>
+                  <a:srgbClr val="1E293B"/>
+                </a:solidFill>
+                <a:latin typeface="Calibri" pitchFamily="34" charset="0"/>
+                <a:ea typeface="Calibri" pitchFamily="34" charset="-122"/>
+                <a:cs typeface="Calibri" pitchFamily="34" charset="-120"/>
+              </a:rPr>
+              <a:t>🌱  mis- + match =mismatch</a:t>
+            </a:r>
+            <a:endParaRPr lang="en-US" sz="1500" dirty="0"/>
           </a:p>
         </p:txBody>
       </p:sp>

--- a/Planning docs/Slides/lesson-6-1-teacher-slides.pptx
+++ b/Planning docs/Slides/lesson-6-1-teacher-slides.pptx
@@ -516,7 +516,7 @@
           <a:p>
             <a:r>
               <a:rPr lang="en-US" dirty="0"/>
-              <a:t>Lesson 6.1. Reading: 📰 Read: What Is a Map?.</a:t>
+              <a:t>Lesson 6.1. Reading: What Is a Map?.</a:t>
             </a:r>
             <a:endParaRPr lang="en-US" dirty="0"/>
           </a:p>
@@ -2231,7 +2231,7 @@
                 <a:ea typeface="Calibri" pitchFamily="34" charset="-122"/>
                 <a:cs typeface="Calibri" pitchFamily="34" charset="-120"/>
               </a:rPr>
-              <a:t>Lesson 6.1  ·  📰 Read: What Is a Map?</a:t>
+              <a:t>Lesson 6.1  ·  What Is a Map?</a:t>
             </a:r>
             <a:endParaRPr lang="en-US" sz="2000" dirty="0"/>
           </a:p>
@@ -4595,7 +4595,7 @@
                 <a:ea typeface="Calibri" pitchFamily="34" charset="-122"/>
                 <a:cs typeface="Calibri" pitchFamily="34" charset="-120"/>
               </a:rPr>
-              <a:t>📰 Read: What Is a Map?</a:t>
+              <a:t>What Is a Map?</a:t>
             </a:r>
             <a:endParaRPr lang="en-US" sz="2600" dirty="0"/>
           </a:p>
@@ -4785,24 +4785,7 @@
                 <a:ea typeface="Calibri" pitchFamily="34" charset="-122"/>
                 <a:cs typeface="Calibri" pitchFamily="34" charset="-120"/>
               </a:rPr>
-              <a:t>•  How do maps help people find their way and understand the world around them?</a:t>
-            </a:r>
-            <a:endParaRPr lang="en-US" sz="1500" dirty="0"/>
-          </a:p>
-          <a:p>
-            <a:pPr indent="0" marL="0">
-              <a:buNone/>
-            </a:pPr>
-            <a:r>
-              <a:rPr lang="en-US" sz="1500" dirty="0">
-                <a:solidFill>
-                  <a:srgbClr val="1E293B"/>
-                </a:solidFill>
-                <a:latin typeface="Calibri" pitchFamily="34" charset="0"/>
-                <a:ea typeface="Calibri" pitchFamily="34" charset="-122"/>
-                <a:cs typeface="Calibri" pitchFamily="34" charset="-120"/>
-              </a:rPr>
-              <a:t>•  The text says all maps have four things: a title, compass rose, scale, and key. Which of these do you think is most important? Why?</a:t>
+              <a:t>•  Stop after the sentence that names all four things a map has. That sentence is the central idea of this article — the next four sentences are the details that back it up. If you could keep only three of those details, which one would you cut, and why?</a:t>
             </a:r>
             <a:endParaRPr lang="en-US" sz="1500" dirty="0"/>
           </a:p>
@@ -5958,7 +5941,7 @@
                 <a:ea typeface="Calibri" pitchFamily="34" charset="-122"/>
                 <a:cs typeface="Calibri" pitchFamily="34" charset="-120"/>
               </a:rPr>
-              <a:t>📰 Read: What Is a Map?</a:t>
+              <a:t>What Is a Map?</a:t>
             </a:r>
             <a:endParaRPr lang="en-US" sz="2000" dirty="0"/>
           </a:p>
